--- a/slides/output/Career_Canvas_Meeting_2_Meet_The_Business.pptx
+++ b/slides/output/Career_Canvas_Meeting_2_Meet_The_Business.pptx
@@ -2,23 +2,23 @@
 <file path=ppt/presentation.xml><?xml version="1.0" encoding="utf-8"?>
 <p:presentation xmlns:p="http://schemas.openxmlformats.org/presentationml/2006/main">
   <p:sldMasterIdLst>
-    <p:sldMasterId xmlns:r="http://schemas.openxmlformats.org/officeDocument/2006/relationships" id="2147483648" r:id="R8635068da5fa46fb"/>
+    <p:sldMasterId xmlns:r="http://schemas.openxmlformats.org/officeDocument/2006/relationships" id="2147483648" r:id="R85d5ac7195fb46ef"/>
   </p:sldMasterIdLst>
   <p:notesMasterIdLst>
-    <p:notesMasterId xmlns:r="http://schemas.openxmlformats.org/officeDocument/2006/relationships" r:id="Rac21ac0701a849fd"/>
+    <p:notesMasterId xmlns:r="http://schemas.openxmlformats.org/officeDocument/2006/relationships" r:id="R5073eff2f64c46e9"/>
   </p:notesMasterIdLst>
   <p:sldIdLst>
-    <p:sldId xmlns:r="http://schemas.openxmlformats.org/officeDocument/2006/relationships" id="256" r:id="R04cc9aacc93f4d9b"/>
-    <p:sldId xmlns:r="http://schemas.openxmlformats.org/officeDocument/2006/relationships" id="257" r:id="R31467e2e8b8d40ba"/>
-    <p:sldId xmlns:r="http://schemas.openxmlformats.org/officeDocument/2006/relationships" id="258" r:id="Rc726f6b7938440f2"/>
-    <p:sldId xmlns:r="http://schemas.openxmlformats.org/officeDocument/2006/relationships" id="259" r:id="R9b026b9b6e114d65"/>
-    <p:sldId xmlns:r="http://schemas.openxmlformats.org/officeDocument/2006/relationships" id="260" r:id="R5db05f85c97f49a3"/>
-    <p:sldId xmlns:r="http://schemas.openxmlformats.org/officeDocument/2006/relationships" id="261" r:id="Ra384a2660a2641d9"/>
-    <p:sldId xmlns:r="http://schemas.openxmlformats.org/officeDocument/2006/relationships" id="262" r:id="R908fce45ea034d5f"/>
-    <p:sldId xmlns:r="http://schemas.openxmlformats.org/officeDocument/2006/relationships" id="263" r:id="R526e98adf8604f5f"/>
-    <p:sldId xmlns:r="http://schemas.openxmlformats.org/officeDocument/2006/relationships" id="264" r:id="R263b93bf670b4c04"/>
-    <p:sldId xmlns:r="http://schemas.openxmlformats.org/officeDocument/2006/relationships" id="265" r:id="R49995495babe411f"/>
-    <p:sldId xmlns:r="http://schemas.openxmlformats.org/officeDocument/2006/relationships" id="266" r:id="R15393c13d7db47aa"/>
+    <p:sldId xmlns:r="http://schemas.openxmlformats.org/officeDocument/2006/relationships" id="256" r:id="R52feaf3d763a40a5"/>
+    <p:sldId xmlns:r="http://schemas.openxmlformats.org/officeDocument/2006/relationships" id="257" r:id="R10320b5889654680"/>
+    <p:sldId xmlns:r="http://schemas.openxmlformats.org/officeDocument/2006/relationships" id="258" r:id="R66f6af5202ee48f9"/>
+    <p:sldId xmlns:r="http://schemas.openxmlformats.org/officeDocument/2006/relationships" id="259" r:id="Rf1138c1aa17e40fb"/>
+    <p:sldId xmlns:r="http://schemas.openxmlformats.org/officeDocument/2006/relationships" id="260" r:id="R015ad689761541cc"/>
+    <p:sldId xmlns:r="http://schemas.openxmlformats.org/officeDocument/2006/relationships" id="261" r:id="R011f941b85af4a79"/>
+    <p:sldId xmlns:r="http://schemas.openxmlformats.org/officeDocument/2006/relationships" id="262" r:id="R54ec15ca487940c4"/>
+    <p:sldId xmlns:r="http://schemas.openxmlformats.org/officeDocument/2006/relationships" id="263" r:id="R5af8a004e7b44df7"/>
+    <p:sldId xmlns:r="http://schemas.openxmlformats.org/officeDocument/2006/relationships" id="264" r:id="R90dc4e4ab4104c25"/>
+    <p:sldId xmlns:r="http://schemas.openxmlformats.org/officeDocument/2006/relationships" id="265" r:id="R1bdcf90f0ab64f62"/>
+    <p:sldId xmlns:r="http://schemas.openxmlformats.org/officeDocument/2006/relationships" id="266" r:id="Rfc084b39ab8f406c"/>
   </p:sldIdLst>
   <p:sldSz cx="12192000" cy="6858000"/>
   <p:notesSz cx="6858000" cy="9144000"/>
@@ -1350,7 +1350,7 @@
   </p:cSld>
   <p:clrMap bg1="lt1" tx1="dk1" bg2="lt2" tx2="dk2" accent1="accent1" accent2="accent2" accent3="accent3" accent4="accent4" accent5="accent5" accent6="accent6" hlink="hlink" folHlink="folHlink"/>
   <p:sldLayoutIdLst>
-    <p:sldLayoutId xmlns:r="http://schemas.openxmlformats.org/officeDocument/2006/relationships" id="2147483649" r:id="R405f6b1117a94be5"/>
+    <p:sldLayoutId xmlns:r="http://schemas.openxmlformats.org/officeDocument/2006/relationships" id="2147483649" r:id="R04fc6af9ee584504"/>
   </p:sldLayoutIdLst>
   <p:txStyles>
     <p:titleStyle>
@@ -1898,10 +1898,10 @@
       </p:grpSpPr>
       <p:sp>
         <p:nvSpPr>
-          <p:cNvPr id="11" name="">
-            <a:extLst xmlns:a="http://schemas.openxmlformats.org/drawingml/2006/main">
-              <a:ext uri="{FF2B5EF4-FFF2-40B4-BE49-F238E27FC236}">
-                <a16:creationId xmlns:a16="http://schemas.microsoft.com/office/drawing/2014/main" id="{33943D18-69EB-482D-8FF5-05EE5A4E2B8F}"/>
+          <p:cNvPr id="12" name="">
+            <a:extLst xmlns:a="http://schemas.openxmlformats.org/drawingml/2006/main">
+              <a:ext uri="{FF2B5EF4-FFF2-40B4-BE49-F238E27FC236}">
+                <a16:creationId xmlns:a16="http://schemas.microsoft.com/office/drawing/2014/main" id="{FF50FD57-1FF1-446A-B879-4113F45FB79F}"/>
               </a:ext>
             </a:extLst>
           </p:cNvPr>
@@ -1919,7 +1919,7 @@
             <a:avLst/>
           </a:prstGeom>
           <a:solidFill xmlns:a="http://schemas.openxmlformats.org/drawingml/2006/main">
-            <a:srgbClr val="EEF7FF"/>
+            <a:srgbClr val="0F1A2B"/>
           </a:solidFill>
           <a:ln xmlns:a="http://schemas.openxmlformats.org/drawingml/2006/main" w="0">
             <a:noFill/>
@@ -1931,27 +1931,27 @@
           <p:cNvPr id="2" name="">
             <a:extLst xmlns:a="http://schemas.openxmlformats.org/drawingml/2006/main">
               <a:ext uri="{FF2B5EF4-FFF2-40B4-BE49-F238E27FC236}">
-                <a16:creationId xmlns:a16="http://schemas.microsoft.com/office/drawing/2014/main" id="{5A8969CD-E0FE-4E61-87B1-48E8F3068E24}"/>
-              </a:ext>
-            </a:extLst>
-          </p:cNvPr>
-          <p:cNvSpPr>
-            <a:spLocks xmlns:a="http://schemas.openxmlformats.org/drawingml/2006/main" noGrp="1"/>
-          </p:cNvSpPr>
-          <p:nvPr/>
-        </p:nvSpPr>
-        <p:spPr>
-          <a:xfrm xmlns:a="http://schemas.openxmlformats.org/drawingml/2006/main">
-            <a:off x="7239000" y="1143000"/>
-            <a:ext cx="4381500" cy="4572000"/>
+                <a16:creationId xmlns:a16="http://schemas.microsoft.com/office/drawing/2014/main" id="{AAE11984-85EE-4D5F-B4C1-145763B771DE}"/>
+              </a:ext>
+            </a:extLst>
+          </p:cNvPr>
+          <p:cNvSpPr>
+            <a:spLocks xmlns:a="http://schemas.openxmlformats.org/drawingml/2006/main" noGrp="1"/>
+          </p:cNvSpPr>
+          <p:nvPr/>
+        </p:nvSpPr>
+        <p:spPr>
+          <a:xfrm xmlns:a="http://schemas.openxmlformats.org/drawingml/2006/main">
+            <a:off x="7239000" y="1333500"/>
+            <a:ext cx="4381500" cy="4191000"/>
           </a:xfrm>
           <a:prstGeom xmlns:a="http://schemas.openxmlformats.org/drawingml/2006/main" prst="roundRect">
             <a:avLst>
-              <a:gd name="adj" fmla="val 1739"/>
+              <a:gd name="adj" fmla="val 1818"/>
             </a:avLst>
           </a:prstGeom>
           <a:solidFill xmlns:a="http://schemas.openxmlformats.org/drawingml/2006/main">
-            <a:srgbClr val="092454"/>
+            <a:srgbClr val="1C2E4A"/>
           </a:solidFill>
           <a:ln xmlns:a="http://schemas.openxmlformats.org/drawingml/2006/main" w="0">
             <a:noFill/>
@@ -1963,18 +1963,18 @@
           <p:cNvPr id="3" name="">
             <a:extLst xmlns:a="http://schemas.openxmlformats.org/drawingml/2006/main">
               <a:ext uri="{FF2B5EF4-FFF2-40B4-BE49-F238E27FC236}">
-                <a16:creationId xmlns:a16="http://schemas.microsoft.com/office/drawing/2014/main" id="{FF95515E-FCC1-4B4F-B60C-6856A1F765BD}"/>
-              </a:ext>
-            </a:extLst>
-          </p:cNvPr>
-          <p:cNvSpPr>
-            <a:spLocks xmlns:a="http://schemas.openxmlformats.org/drawingml/2006/main" noGrp="1"/>
-          </p:cNvSpPr>
-          <p:nvPr/>
-        </p:nvSpPr>
-        <p:spPr>
-          <a:xfrm xmlns:a="http://schemas.openxmlformats.org/drawingml/2006/main">
-            <a:off x="7620000" y="1600200"/>
+                <a16:creationId xmlns:a16="http://schemas.microsoft.com/office/drawing/2014/main" id="{F329A407-0777-4D30-9A9D-1CBD412947D9}"/>
+              </a:ext>
+            </a:extLst>
+          </p:cNvPr>
+          <p:cNvSpPr>
+            <a:spLocks xmlns:a="http://schemas.openxmlformats.org/drawingml/2006/main" noGrp="1"/>
+          </p:cNvSpPr>
+          <p:nvPr/>
+        </p:nvSpPr>
+        <p:spPr>
+          <a:xfrm xmlns:a="http://schemas.openxmlformats.org/drawingml/2006/main">
+            <a:off x="7620000" y="1771650"/>
             <a:ext cx="3619500" cy="266700"/>
           </a:xfrm>
           <a:prstGeom xmlns:a="http://schemas.openxmlformats.org/drawingml/2006/main" prst="rect">
@@ -1992,19 +1992,19 @@
           <a:lstStyle xmlns:a="http://schemas.openxmlformats.org/drawingml/2006/main"/>
           <a:p xmlns:a="http://schemas.openxmlformats.org/drawingml/2006/main">
             <a:pPr algn="l">
-              <a:defRPr sz="1125" b="1">
-                <a:solidFill>
-                  <a:srgbClr val="FFD43B"/>
-                </a:solidFill>
-                <a:latin typeface="Helvetica Neue"/>
-                <a:ea typeface="Helvetica Neue"/>
-                <a:cs typeface="Helvetica Neue"/>
-              </a:defRPr>
-            </a:pPr>
-            <a:r>
-              <a:rPr sz="1125" b="1">
-                <a:solidFill>
-                  <a:srgbClr val="FFD43B"/>
+              <a:defRPr sz="1050" b="1">
+                <a:solidFill>
+                  <a:srgbClr val="D1CFC9"/>
+                </a:solidFill>
+                <a:latin typeface="Helvetica Neue"/>
+                <a:ea typeface="Helvetica Neue"/>
+                <a:cs typeface="Helvetica Neue"/>
+              </a:defRPr>
+            </a:pPr>
+            <a:r>
+              <a:rPr sz="1050" b="1">
+                <a:solidFill>
+                  <a:srgbClr val="D1CFC9"/>
                 </a:solidFill>
                 <a:latin typeface="Helvetica Neue"/>
                 <a:ea typeface="Helvetica Neue"/>
@@ -2020,156 +2020,19 @@
           <p:cNvPr id="4" name="">
             <a:extLst xmlns:a="http://schemas.openxmlformats.org/drawingml/2006/main">
               <a:ext uri="{FF2B5EF4-FFF2-40B4-BE49-F238E27FC236}">
-                <a16:creationId xmlns:a16="http://schemas.microsoft.com/office/drawing/2014/main" id="{F1116B16-EC4B-485D-843A-45C29070A0AC}"/>
-              </a:ext>
-            </a:extLst>
-          </p:cNvPr>
-          <p:cNvSpPr>
-            <a:spLocks xmlns:a="http://schemas.openxmlformats.org/drawingml/2006/main" noGrp="1"/>
-          </p:cNvSpPr>
-          <p:nvPr/>
-        </p:nvSpPr>
-        <p:spPr>
-          <a:xfrm xmlns:a="http://schemas.openxmlformats.org/drawingml/2006/main">
-            <a:off x="7620000" y="2114550"/>
-            <a:ext cx="3657600" cy="2857500"/>
-          </a:xfrm>
-          <a:prstGeom xmlns:a="http://schemas.openxmlformats.org/drawingml/2006/main" prst="rect">
-            <a:avLst/>
-          </a:prstGeom>
-          <a:noFill xmlns:a="http://schemas.openxmlformats.org/drawingml/2006/main"/>
-          <a:ln xmlns:a="http://schemas.openxmlformats.org/drawingml/2006/main" w="0">
-            <a:noFill/>
-          </a:ln>
-        </p:spPr>
-        <p:txBody>
-          <a:bodyPr xmlns:a="http://schemas.openxmlformats.org/drawingml/2006/main" anchor="t">
-            <a:noAutofit/>
-          </a:bodyPr>
-          <a:lstStyle xmlns:a="http://schemas.openxmlformats.org/drawingml/2006/main"/>
-          <a:p xmlns:a="http://schemas.openxmlformats.org/drawingml/2006/main">
-            <a:pPr algn="l">
-              <a:defRPr sz="3000" b="1">
-                <a:solidFill>
-                  <a:srgbClr val="FFFFFF"/>
-                </a:solidFill>
-                <a:latin typeface="Helvetica Neue"/>
-                <a:ea typeface="Helvetica Neue"/>
-                <a:cs typeface="Helvetica Neue"/>
-              </a:defRPr>
-            </a:pPr>
-            <a:r>
-              <a:rPr sz="3000" b="1">
-                <a:solidFill>
-                  <a:srgbClr val="FFFFFF"/>
-                </a:solidFill>
-                <a:latin typeface="Helvetica Neue"/>
-                <a:ea typeface="Helvetica Neue"/>
-                <a:cs typeface="Helvetica Neue"/>
-              </a:rPr>
-              <a:t>Meet the</a:t>
-            </a:r>
-          </a:p>
-          <a:p xmlns:a="http://schemas.openxmlformats.org/drawingml/2006/main">
-            <a:pPr algn="l">
-              <a:defRPr sz="3000" b="1">
-                <a:solidFill>
-                  <a:srgbClr val="FFFFFF"/>
-                </a:solidFill>
-                <a:latin typeface="Helvetica Neue"/>
-                <a:ea typeface="Helvetica Neue"/>
-                <a:cs typeface="Helvetica Neue"/>
-              </a:defRPr>
-            </a:pPr>
-            <a:r>
-              <a:rPr sz="3000" b="1">
-                <a:solidFill>
-                  <a:srgbClr val="FFFFFF"/>
-                </a:solidFill>
-                <a:latin typeface="Helvetica Neue"/>
-                <a:ea typeface="Helvetica Neue"/>
-                <a:cs typeface="Helvetica Neue"/>
-              </a:rPr>
-              <a:t>business</a:t>
-            </a:r>
-          </a:p>
-        </p:txBody>
-      </p:sp>
-      <p:sp>
-        <p:nvSpPr>
-          <p:cNvPr id="5" name="">
-            <a:extLst xmlns:a="http://schemas.openxmlformats.org/drawingml/2006/main">
-              <a:ext uri="{FF2B5EF4-FFF2-40B4-BE49-F238E27FC236}">
-                <a16:creationId xmlns:a16="http://schemas.microsoft.com/office/drawing/2014/main" id="{924258CE-DAC1-4771-BF08-162A97D82B25}"/>
-              </a:ext>
-            </a:extLst>
-          </p:cNvPr>
-          <p:cNvSpPr>
-            <a:spLocks xmlns:a="http://schemas.openxmlformats.org/drawingml/2006/main" noGrp="1"/>
-          </p:cNvSpPr>
-          <p:nvPr/>
-        </p:nvSpPr>
-        <p:spPr>
-          <a:xfrm xmlns:a="http://schemas.openxmlformats.org/drawingml/2006/main">
-            <a:off x="685800" y="552450"/>
-            <a:ext cx="2857500" cy="247650"/>
-          </a:xfrm>
-          <a:prstGeom xmlns:a="http://schemas.openxmlformats.org/drawingml/2006/main" prst="rect">
-            <a:avLst/>
-          </a:prstGeom>
-          <a:noFill xmlns:a="http://schemas.openxmlformats.org/drawingml/2006/main"/>
-          <a:ln xmlns:a="http://schemas.openxmlformats.org/drawingml/2006/main" w="0">
-            <a:noFill/>
-          </a:ln>
-        </p:spPr>
-        <p:txBody>
-          <a:bodyPr xmlns:a="http://schemas.openxmlformats.org/drawingml/2006/main" anchor="t">
-            <a:noAutofit/>
-          </a:bodyPr>
-          <a:lstStyle xmlns:a="http://schemas.openxmlformats.org/drawingml/2006/main"/>
-          <a:p xmlns:a="http://schemas.openxmlformats.org/drawingml/2006/main">
-            <a:pPr algn="l">
-              <a:defRPr sz="1200" b="1">
-                <a:solidFill>
-                  <a:srgbClr val="2563EB"/>
-                </a:solidFill>
-                <a:latin typeface="Helvetica Neue"/>
-                <a:ea typeface="Helvetica Neue"/>
-                <a:cs typeface="Helvetica Neue"/>
-              </a:defRPr>
-            </a:pPr>
-            <a:r>
-              <a:rPr sz="1200" b="1">
-                <a:solidFill>
-                  <a:srgbClr val="2563EB"/>
-                </a:solidFill>
-                <a:latin typeface="Helvetica Neue"/>
-                <a:ea typeface="Helvetica Neue"/>
-                <a:cs typeface="Helvetica Neue"/>
-              </a:rPr>
-              <a:t>CAREER CANVAS</a:t>
-            </a:r>
-          </a:p>
-        </p:txBody>
-      </p:sp>
-      <p:sp>
-        <p:nvSpPr>
-          <p:cNvPr id="6" name="">
-            <a:extLst xmlns:a="http://schemas.openxmlformats.org/drawingml/2006/main">
-              <a:ext uri="{FF2B5EF4-FFF2-40B4-BE49-F238E27FC236}">
-                <a16:creationId xmlns:a16="http://schemas.microsoft.com/office/drawing/2014/main" id="{E4C7460D-99CC-419F-BC90-A7C23A2E900E}"/>
-              </a:ext>
-            </a:extLst>
-          </p:cNvPr>
-          <p:cNvSpPr>
-            <a:spLocks xmlns:a="http://schemas.openxmlformats.org/drawingml/2006/main" noGrp="1"/>
-          </p:cNvSpPr>
-          <p:nvPr/>
-        </p:nvSpPr>
-        <p:spPr>
-          <a:xfrm xmlns:a="http://schemas.openxmlformats.org/drawingml/2006/main">
-            <a:off x="685800" y="914400"/>
-            <a:ext cx="685800" cy="76200"/>
+                <a16:creationId xmlns:a16="http://schemas.microsoft.com/office/drawing/2014/main" id="{4E710C81-8E4E-4384-9F36-3E25C86D9045}"/>
+              </a:ext>
+            </a:extLst>
+          </p:cNvPr>
+          <p:cNvSpPr>
+            <a:spLocks xmlns:a="http://schemas.openxmlformats.org/drawingml/2006/main" noGrp="1"/>
+          </p:cNvSpPr>
+          <p:nvPr/>
+        </p:nvSpPr>
+        <p:spPr>
+          <a:xfrm xmlns:a="http://schemas.openxmlformats.org/drawingml/2006/main">
+            <a:off x="7620000" y="2152650"/>
+            <a:ext cx="571500" cy="57150"/>
           </a:xfrm>
           <a:prstGeom xmlns:a="http://schemas.openxmlformats.org/drawingml/2006/main" prst="roundRect">
             <a:avLst>
@@ -2177,7 +2040,7 @@
             </a:avLst>
           </a:prstGeom>
           <a:solidFill xmlns:a="http://schemas.openxmlformats.org/drawingml/2006/main">
-            <a:srgbClr val="FFD43B"/>
+            <a:srgbClr val="D1CFC9"/>
           </a:solidFill>
           <a:ln xmlns:a="http://schemas.openxmlformats.org/drawingml/2006/main" w="0">
             <a:noFill/>
@@ -2186,10 +2049,179 @@
       </p:sp>
       <p:sp>
         <p:nvSpPr>
+          <p:cNvPr id="5" name="">
+            <a:extLst xmlns:a="http://schemas.openxmlformats.org/drawingml/2006/main">
+              <a:ext uri="{FF2B5EF4-FFF2-40B4-BE49-F238E27FC236}">
+                <a16:creationId xmlns:a16="http://schemas.microsoft.com/office/drawing/2014/main" id="{80C8811F-3F08-4916-9BBF-42A1AC67BA77}"/>
+              </a:ext>
+            </a:extLst>
+          </p:cNvPr>
+          <p:cNvSpPr>
+            <a:spLocks xmlns:a="http://schemas.openxmlformats.org/drawingml/2006/main" noGrp="1"/>
+          </p:cNvSpPr>
+          <p:nvPr/>
+        </p:nvSpPr>
+        <p:spPr>
+          <a:xfrm xmlns:a="http://schemas.openxmlformats.org/drawingml/2006/main">
+            <a:off x="7620000" y="2495550"/>
+            <a:ext cx="3657600" cy="2667000"/>
+          </a:xfrm>
+          <a:prstGeom xmlns:a="http://schemas.openxmlformats.org/drawingml/2006/main" prst="rect">
+            <a:avLst/>
+          </a:prstGeom>
+          <a:noFill xmlns:a="http://schemas.openxmlformats.org/drawingml/2006/main"/>
+          <a:ln xmlns:a="http://schemas.openxmlformats.org/drawingml/2006/main" w="0">
+            <a:noFill/>
+          </a:ln>
+        </p:spPr>
+        <p:txBody>
+          <a:bodyPr xmlns:a="http://schemas.openxmlformats.org/drawingml/2006/main" anchor="t">
+            <a:noAutofit/>
+          </a:bodyPr>
+          <a:lstStyle xmlns:a="http://schemas.openxmlformats.org/drawingml/2006/main"/>
+          <a:p xmlns:a="http://schemas.openxmlformats.org/drawingml/2006/main">
+            <a:pPr algn="l">
+              <a:defRPr sz="2850" b="1">
+                <a:solidFill>
+                  <a:srgbClr val="FFFFFF"/>
+                </a:solidFill>
+                <a:latin typeface="Helvetica Neue"/>
+                <a:ea typeface="Helvetica Neue"/>
+                <a:cs typeface="Helvetica Neue"/>
+              </a:defRPr>
+            </a:pPr>
+            <a:r>
+              <a:rPr sz="2850" b="1">
+                <a:solidFill>
+                  <a:srgbClr val="FFFFFF"/>
+                </a:solidFill>
+                <a:latin typeface="Helvetica Neue"/>
+                <a:ea typeface="Helvetica Neue"/>
+                <a:cs typeface="Helvetica Neue"/>
+              </a:rPr>
+              <a:t>Meet the</a:t>
+            </a:r>
+          </a:p>
+          <a:p xmlns:a="http://schemas.openxmlformats.org/drawingml/2006/main">
+            <a:pPr algn="l">
+              <a:defRPr sz="2850" b="1">
+                <a:solidFill>
+                  <a:srgbClr val="FFFFFF"/>
+                </a:solidFill>
+                <a:latin typeface="Helvetica Neue"/>
+                <a:ea typeface="Helvetica Neue"/>
+                <a:cs typeface="Helvetica Neue"/>
+              </a:defRPr>
+            </a:pPr>
+            <a:r>
+              <a:rPr sz="2850" b="1">
+                <a:solidFill>
+                  <a:srgbClr val="FFFFFF"/>
+                </a:solidFill>
+                <a:latin typeface="Helvetica Neue"/>
+                <a:ea typeface="Helvetica Neue"/>
+                <a:cs typeface="Helvetica Neue"/>
+              </a:rPr>
+              <a:t>business</a:t>
+            </a:r>
+          </a:p>
+        </p:txBody>
+      </p:sp>
+      <p:sp>
+        <p:nvSpPr>
+          <p:cNvPr id="6" name="">
+            <a:extLst xmlns:a="http://schemas.openxmlformats.org/drawingml/2006/main">
+              <a:ext uri="{FF2B5EF4-FFF2-40B4-BE49-F238E27FC236}">
+                <a16:creationId xmlns:a16="http://schemas.microsoft.com/office/drawing/2014/main" id="{5BBCCF9D-986B-430F-B175-3E968B39FDB8}"/>
+              </a:ext>
+            </a:extLst>
+          </p:cNvPr>
+          <p:cNvSpPr>
+            <a:spLocks xmlns:a="http://schemas.openxmlformats.org/drawingml/2006/main" noGrp="1"/>
+          </p:cNvSpPr>
+          <p:nvPr/>
+        </p:nvSpPr>
+        <p:spPr>
+          <a:xfrm xmlns:a="http://schemas.openxmlformats.org/drawingml/2006/main">
+            <a:off x="685800" y="552450"/>
+            <a:ext cx="2857500" cy="247650"/>
+          </a:xfrm>
+          <a:prstGeom xmlns:a="http://schemas.openxmlformats.org/drawingml/2006/main" prst="rect">
+            <a:avLst/>
+          </a:prstGeom>
+          <a:noFill xmlns:a="http://schemas.openxmlformats.org/drawingml/2006/main"/>
+          <a:ln xmlns:a="http://schemas.openxmlformats.org/drawingml/2006/main" w="0">
+            <a:noFill/>
+          </a:ln>
+        </p:spPr>
+        <p:txBody>
+          <a:bodyPr xmlns:a="http://schemas.openxmlformats.org/drawingml/2006/main" anchor="t">
+            <a:noAutofit/>
+          </a:bodyPr>
+          <a:lstStyle xmlns:a="http://schemas.openxmlformats.org/drawingml/2006/main"/>
+          <a:p xmlns:a="http://schemas.openxmlformats.org/drawingml/2006/main">
+            <a:pPr algn="l">
+              <a:defRPr sz="1125" b="1">
+                <a:solidFill>
+                  <a:srgbClr val="52677D"/>
+                </a:solidFill>
+                <a:latin typeface="Helvetica Neue"/>
+                <a:ea typeface="Helvetica Neue"/>
+                <a:cs typeface="Helvetica Neue"/>
+              </a:defRPr>
+            </a:pPr>
+            <a:r>
+              <a:rPr sz="1125" b="1">
+                <a:solidFill>
+                  <a:srgbClr val="52677D"/>
+                </a:solidFill>
+                <a:latin typeface="Helvetica Neue"/>
+                <a:ea typeface="Helvetica Neue"/>
+                <a:cs typeface="Helvetica Neue"/>
+              </a:rPr>
+              <a:t>CAREER CANVAS</a:t>
+            </a:r>
+          </a:p>
+        </p:txBody>
+      </p:sp>
+      <p:sp>
+        <p:nvSpPr>
           <p:cNvPr id="7" name="">
             <a:extLst xmlns:a="http://schemas.openxmlformats.org/drawingml/2006/main">
               <a:ext uri="{FF2B5EF4-FFF2-40B4-BE49-F238E27FC236}">
-                <a16:creationId xmlns:a16="http://schemas.microsoft.com/office/drawing/2014/main" id="{BB4F13C4-F0A3-431D-9126-9DBE95BD2B17}"/>
+                <a16:creationId xmlns:a16="http://schemas.microsoft.com/office/drawing/2014/main" id="{6721BB38-8542-4AB3-A153-799D2F921E92}"/>
+              </a:ext>
+            </a:extLst>
+          </p:cNvPr>
+          <p:cNvSpPr>
+            <a:spLocks xmlns:a="http://schemas.openxmlformats.org/drawingml/2006/main" noGrp="1"/>
+          </p:cNvSpPr>
+          <p:nvPr/>
+        </p:nvSpPr>
+        <p:spPr>
+          <a:xfrm xmlns:a="http://schemas.openxmlformats.org/drawingml/2006/main">
+            <a:off x="685800" y="914400"/>
+            <a:ext cx="685800" cy="76200"/>
+          </a:xfrm>
+          <a:prstGeom xmlns:a="http://schemas.openxmlformats.org/drawingml/2006/main" prst="roundRect">
+            <a:avLst>
+              <a:gd name="adj" fmla="val 50000"/>
+            </a:avLst>
+          </a:prstGeom>
+          <a:solidFill xmlns:a="http://schemas.openxmlformats.org/drawingml/2006/main">
+            <a:srgbClr val="1C2E4A"/>
+          </a:solidFill>
+          <a:ln xmlns:a="http://schemas.openxmlformats.org/drawingml/2006/main" w="0">
+            <a:noFill/>
+          </a:ln>
+        </p:spPr>
+      </p:sp>
+      <p:sp>
+        <p:nvSpPr>
+          <p:cNvPr id="8" name="">
+            <a:extLst xmlns:a="http://schemas.openxmlformats.org/drawingml/2006/main">
+              <a:ext uri="{FF2B5EF4-FFF2-40B4-BE49-F238E27FC236}">
+                <a16:creationId xmlns:a16="http://schemas.microsoft.com/office/drawing/2014/main" id="{3B3E226A-6F43-4EE0-8CA1-7318817B9B17}"/>
               </a:ext>
             </a:extLst>
           </p:cNvPr>
@@ -2201,7 +2233,7 @@
         <p:spPr>
           <a:xfrm xmlns:a="http://schemas.openxmlformats.org/drawingml/2006/main">
             <a:off x="685800" y="1447800"/>
-            <a:ext cx="4762500" cy="1771650"/>
+            <a:ext cx="4953000" cy="1809750"/>
           </a:xfrm>
           <a:prstGeom xmlns:a="http://schemas.openxmlformats.org/drawingml/2006/main" prst="rect">
             <a:avLst/>
@@ -2218,19 +2250,19 @@
           <a:lstStyle xmlns:a="http://schemas.openxmlformats.org/drawingml/2006/main"/>
           <a:p xmlns:a="http://schemas.openxmlformats.org/drawingml/2006/main">
             <a:pPr algn="l">
-              <a:defRPr sz="4050" b="1">
-                <a:solidFill>
-                  <a:srgbClr val="092454"/>
-                </a:solidFill>
-                <a:latin typeface="Helvetica Neue"/>
-                <a:ea typeface="Helvetica Neue"/>
-                <a:cs typeface="Helvetica Neue"/>
-              </a:defRPr>
-            </a:pPr>
-            <a:r>
-              <a:rPr sz="4050" b="1">
-                <a:solidFill>
-                  <a:srgbClr val="092454"/>
+              <a:defRPr sz="3900" b="1">
+                <a:solidFill>
+                  <a:srgbClr val="1C2E4A"/>
+                </a:solidFill>
+                <a:latin typeface="Helvetica Neue"/>
+                <a:ea typeface="Helvetica Neue"/>
+                <a:cs typeface="Helvetica Neue"/>
+              </a:defRPr>
+            </a:pPr>
+            <a:r>
+              <a:rPr sz="3900" b="1">
+                <a:solidFill>
+                  <a:srgbClr val="1C2E4A"/>
                 </a:solidFill>
                 <a:latin typeface="Helvetica Neue"/>
                 <a:ea typeface="Helvetica Neue"/>
@@ -2241,19 +2273,19 @@
           </a:p>
           <a:p xmlns:a="http://schemas.openxmlformats.org/drawingml/2006/main">
             <a:pPr algn="l">
-              <a:defRPr sz="4050" b="1">
-                <a:solidFill>
-                  <a:srgbClr val="092454"/>
-                </a:solidFill>
-                <a:latin typeface="Helvetica Neue"/>
-                <a:ea typeface="Helvetica Neue"/>
-                <a:cs typeface="Helvetica Neue"/>
-              </a:defRPr>
-            </a:pPr>
-            <a:r>
-              <a:rPr sz="4050" b="1">
-                <a:solidFill>
-                  <a:srgbClr val="092454"/>
+              <a:defRPr sz="3900" b="1">
+                <a:solidFill>
+                  <a:srgbClr val="1C2E4A"/>
+                </a:solidFill>
+                <a:latin typeface="Helvetica Neue"/>
+                <a:ea typeface="Helvetica Neue"/>
+                <a:cs typeface="Helvetica Neue"/>
+              </a:defRPr>
+            </a:pPr>
+            <a:r>
+              <a:rPr sz="3900" b="1">
+                <a:solidFill>
+                  <a:srgbClr val="1C2E4A"/>
                 </a:solidFill>
                 <a:latin typeface="Helvetica Neue"/>
                 <a:ea typeface="Helvetica Neue"/>
@@ -2266,22 +2298,22 @@
       </p:sp>
       <p:sp>
         <p:nvSpPr>
-          <p:cNvPr id="8" name="">
-            <a:extLst xmlns:a="http://schemas.openxmlformats.org/drawingml/2006/main">
-              <a:ext uri="{FF2B5EF4-FFF2-40B4-BE49-F238E27FC236}">
-                <a16:creationId xmlns:a16="http://schemas.microsoft.com/office/drawing/2014/main" id="{DE08FC07-1A8B-45EB-BAEF-C05F61B8ADCC}"/>
-              </a:ext>
-            </a:extLst>
-          </p:cNvPr>
-          <p:cNvSpPr>
-            <a:spLocks xmlns:a="http://schemas.openxmlformats.org/drawingml/2006/main" noGrp="1"/>
-          </p:cNvSpPr>
-          <p:nvPr/>
-        </p:nvSpPr>
-        <p:spPr>
-          <a:xfrm xmlns:a="http://schemas.openxmlformats.org/drawingml/2006/main">
-            <a:off x="685800" y="3429000"/>
-            <a:ext cx="4476750" cy="1047750"/>
+          <p:cNvPr id="9" name="">
+            <a:extLst xmlns:a="http://schemas.openxmlformats.org/drawingml/2006/main">
+              <a:ext uri="{FF2B5EF4-FFF2-40B4-BE49-F238E27FC236}">
+                <a16:creationId xmlns:a16="http://schemas.microsoft.com/office/drawing/2014/main" id="{31293617-2B2B-4E4C-8730-E028F96CA9A5}"/>
+              </a:ext>
+            </a:extLst>
+          </p:cNvPr>
+          <p:cNvSpPr>
+            <a:spLocks xmlns:a="http://schemas.openxmlformats.org/drawingml/2006/main" noGrp="1"/>
+          </p:cNvSpPr>
+          <p:nvPr/>
+        </p:nvSpPr>
+        <p:spPr>
+          <a:xfrm xmlns:a="http://schemas.openxmlformats.org/drawingml/2006/main">
+            <a:off x="685800" y="3467100"/>
+            <a:ext cx="4762500" cy="1143000"/>
           </a:xfrm>
           <a:prstGeom xmlns:a="http://schemas.openxmlformats.org/drawingml/2006/main" prst="rect">
             <a:avLst/>
@@ -2298,19 +2330,19 @@
           <a:lstStyle xmlns:a="http://schemas.openxmlformats.org/drawingml/2006/main"/>
           <a:p xmlns:a="http://schemas.openxmlformats.org/drawingml/2006/main">
             <a:pPr algn="l">
-              <a:defRPr sz="1650" b="0">
-                <a:solidFill>
-                  <a:srgbClr val="61718A"/>
-                </a:solidFill>
-                <a:latin typeface="Helvetica Neue"/>
-                <a:ea typeface="Helvetica Neue"/>
-                <a:cs typeface="Helvetica Neue"/>
-              </a:defRPr>
-            </a:pPr>
-            <a:r>
-              <a:rPr sz="1650" b="0">
-                <a:solidFill>
-                  <a:srgbClr val="61718A"/>
+              <a:defRPr sz="1575" b="0">
+                <a:solidFill>
+                  <a:srgbClr val="52677D"/>
+                </a:solidFill>
+                <a:latin typeface="Helvetica Neue"/>
+                <a:ea typeface="Helvetica Neue"/>
+                <a:cs typeface="Helvetica Neue"/>
+              </a:defRPr>
+            </a:pPr>
+            <a:r>
+              <a:rPr sz="1575" b="0">
+                <a:solidFill>
+                  <a:srgbClr val="52677D"/>
                 </a:solidFill>
                 <a:latin typeface="Helvetica Neue"/>
                 <a:ea typeface="Helvetica Neue"/>
@@ -2323,21 +2355,21 @@
       </p:sp>
       <p:sp>
         <p:nvSpPr>
-          <p:cNvPr id="9" name="">
-            <a:extLst xmlns:a="http://schemas.openxmlformats.org/drawingml/2006/main">
-              <a:ext uri="{FF2B5EF4-FFF2-40B4-BE49-F238E27FC236}">
-                <a16:creationId xmlns:a16="http://schemas.microsoft.com/office/drawing/2014/main" id="{29E1ADBE-2614-4252-A637-15F055466E6B}"/>
-              </a:ext>
-            </a:extLst>
-          </p:cNvPr>
-          <p:cNvSpPr>
-            <a:spLocks xmlns:a="http://schemas.openxmlformats.org/drawingml/2006/main" noGrp="1"/>
-          </p:cNvSpPr>
-          <p:nvPr/>
-        </p:nvSpPr>
-        <p:spPr>
-          <a:xfrm xmlns:a="http://schemas.openxmlformats.org/drawingml/2006/main">
-            <a:off x="685800" y="5429250"/>
+          <p:cNvPr id="10" name="">
+            <a:extLst xmlns:a="http://schemas.openxmlformats.org/drawingml/2006/main">
+              <a:ext uri="{FF2B5EF4-FFF2-40B4-BE49-F238E27FC236}">
+                <a16:creationId xmlns:a16="http://schemas.microsoft.com/office/drawing/2014/main" id="{533E8FE3-2D8D-42DB-9793-BFC8D30E7842}"/>
+              </a:ext>
+            </a:extLst>
+          </p:cNvPr>
+          <p:cNvSpPr>
+            <a:spLocks xmlns:a="http://schemas.openxmlformats.org/drawingml/2006/main" noGrp="1"/>
+          </p:cNvSpPr>
+          <p:nvPr/>
+        </p:nvSpPr>
+        <p:spPr>
+          <a:xfrm xmlns:a="http://schemas.openxmlformats.org/drawingml/2006/main">
+            <a:off x="685800" y="5391150"/>
             <a:ext cx="2095500" cy="285750"/>
           </a:xfrm>
           <a:prstGeom xmlns:a="http://schemas.openxmlformats.org/drawingml/2006/main" prst="rect">
@@ -2355,19 +2387,19 @@
           <a:lstStyle xmlns:a="http://schemas.openxmlformats.org/drawingml/2006/main"/>
           <a:p xmlns:a="http://schemas.openxmlformats.org/drawingml/2006/main">
             <a:pPr algn="l">
-              <a:defRPr sz="1350" b="1">
-                <a:solidFill>
-                  <a:srgbClr val="092454"/>
-                </a:solidFill>
-                <a:latin typeface="Helvetica Neue"/>
-                <a:ea typeface="Helvetica Neue"/>
-                <a:cs typeface="Helvetica Neue"/>
-              </a:defRPr>
-            </a:pPr>
-            <a:r>
-              <a:rPr sz="1350" b="1">
-                <a:solidFill>
-                  <a:srgbClr val="092454"/>
+              <a:defRPr sz="1275" b="1">
+                <a:solidFill>
+                  <a:srgbClr val="1C2E4A"/>
+                </a:solidFill>
+                <a:latin typeface="Helvetica Neue"/>
+                <a:ea typeface="Helvetica Neue"/>
+                <a:cs typeface="Helvetica Neue"/>
+              </a:defRPr>
+            </a:pPr>
+            <a:r>
+              <a:rPr sz="1275" b="1">
+                <a:solidFill>
+                  <a:srgbClr val="1C2E4A"/>
                 </a:solidFill>
                 <a:latin typeface="Helvetica Neue"/>
                 <a:ea typeface="Helvetica Neue"/>
@@ -2380,22 +2412,22 @@
       </p:sp>
       <p:sp>
         <p:nvSpPr>
-          <p:cNvPr id="10" name="">
-            <a:extLst xmlns:a="http://schemas.openxmlformats.org/drawingml/2006/main">
-              <a:ext uri="{FF2B5EF4-FFF2-40B4-BE49-F238E27FC236}">
-                <a16:creationId xmlns:a16="http://schemas.microsoft.com/office/drawing/2014/main" id="{0BFD8B20-B1D4-4280-AB5A-6E9A05DD91EF}"/>
-              </a:ext>
-            </a:extLst>
-          </p:cNvPr>
-          <p:cNvSpPr>
-            <a:spLocks xmlns:a="http://schemas.openxmlformats.org/drawingml/2006/main" noGrp="1"/>
-          </p:cNvSpPr>
-          <p:nvPr/>
-        </p:nvSpPr>
-        <p:spPr>
-          <a:xfrm xmlns:a="http://schemas.openxmlformats.org/drawingml/2006/main">
-            <a:off x="685800" y="5810250"/>
-            <a:ext cx="3333750" cy="476250"/>
+          <p:cNvPr id="11" name="">
+            <a:extLst xmlns:a="http://schemas.openxmlformats.org/drawingml/2006/main">
+              <a:ext uri="{FF2B5EF4-FFF2-40B4-BE49-F238E27FC236}">
+                <a16:creationId xmlns:a16="http://schemas.microsoft.com/office/drawing/2014/main" id="{F432D714-7A22-4D5E-8E7E-591DD8772B10}"/>
+              </a:ext>
+            </a:extLst>
+          </p:cNvPr>
+          <p:cNvSpPr>
+            <a:spLocks xmlns:a="http://schemas.openxmlformats.org/drawingml/2006/main" noGrp="1"/>
+          </p:cNvSpPr>
+          <p:nvPr/>
+        </p:nvSpPr>
+        <p:spPr>
+          <a:xfrm xmlns:a="http://schemas.openxmlformats.org/drawingml/2006/main">
+            <a:off x="685800" y="5772150"/>
+            <a:ext cx="3619500" cy="476250"/>
           </a:xfrm>
           <a:prstGeom xmlns:a="http://schemas.openxmlformats.org/drawingml/2006/main" prst="rect">
             <a:avLst/>
@@ -2412,19 +2444,19 @@
           <a:lstStyle xmlns:a="http://schemas.openxmlformats.org/drawingml/2006/main"/>
           <a:p xmlns:a="http://schemas.openxmlformats.org/drawingml/2006/main">
             <a:pPr algn="l">
-              <a:defRPr sz="1050" b="0">
-                <a:solidFill>
-                  <a:srgbClr val="61718A"/>
-                </a:solidFill>
-                <a:latin typeface="Helvetica Neue"/>
-                <a:ea typeface="Helvetica Neue"/>
-                <a:cs typeface="Helvetica Neue"/>
-              </a:defRPr>
-            </a:pPr>
-            <a:r>
-              <a:rPr sz="1050" b="0">
-                <a:solidFill>
-                  <a:srgbClr val="61718A"/>
+              <a:defRPr sz="975" b="0">
+                <a:solidFill>
+                  <a:srgbClr val="52677D"/>
+                </a:solidFill>
+                <a:latin typeface="Helvetica Neue"/>
+                <a:ea typeface="Helvetica Neue"/>
+                <a:cs typeface="Helvetica Neue"/>
+              </a:defRPr>
+            </a:pPr>
+            <a:r>
+              <a:rPr sz="975" b="0">
+                <a:solidFill>
+                  <a:srgbClr val="52677D"/>
                 </a:solidFill>
                 <a:latin typeface="Helvetica Neue"/>
                 <a:ea typeface="Helvetica Neue"/>
@@ -2435,19 +2467,19 @@
           </a:p>
           <a:p xmlns:a="http://schemas.openxmlformats.org/drawingml/2006/main">
             <a:pPr algn="l">
-              <a:defRPr sz="1050" b="0">
-                <a:solidFill>
-                  <a:srgbClr val="61718A"/>
-                </a:solidFill>
-                <a:latin typeface="Helvetica Neue"/>
-                <a:ea typeface="Helvetica Neue"/>
-                <a:cs typeface="Helvetica Neue"/>
-              </a:defRPr>
-            </a:pPr>
-            <a:r>
-              <a:rPr sz="1050" b="0">
-                <a:solidFill>
-                  <a:srgbClr val="61718A"/>
+              <a:defRPr sz="975" b="0">
+                <a:solidFill>
+                  <a:srgbClr val="52677D"/>
+                </a:solidFill>
+                <a:latin typeface="Helvetica Neue"/>
+                <a:ea typeface="Helvetica Neue"/>
+                <a:cs typeface="Helvetica Neue"/>
+              </a:defRPr>
+            </a:pPr>
+            <a:r>
+              <a:rPr sz="975" b="0">
+                <a:solidFill>
+                  <a:srgbClr val="52677D"/>
                 </a:solidFill>
                 <a:latin typeface="Helvetica Neue"/>
                 <a:ea typeface="Helvetica Neue"/>
@@ -2461,7 +2493,7 @@
     </p:spTree>
     <p:extLst>
       <p:ext uri="{BB962C8B-B14F-4D97-AF65-F5344CB8AC3E}">
-        <p14:creationId xmlns:p14="http://schemas.microsoft.com/office/powerpoint/2010/main" val="2072832604"/>
+        <p14:creationId xmlns:p14="http://schemas.microsoft.com/office/powerpoint/2010/main" val="2057978080"/>
       </p:ext>
     </p:extLst>
   </p:cSld>
@@ -2492,7 +2524,7 @@
           <p:cNvPr id="15" name="">
             <a:extLst xmlns:a="http://schemas.openxmlformats.org/drawingml/2006/main">
               <a:ext uri="{FF2B5EF4-FFF2-40B4-BE49-F238E27FC236}">
-                <a16:creationId xmlns:a16="http://schemas.microsoft.com/office/drawing/2014/main" id="{C8CEADBA-8BBB-4D56-88EC-25279229A5AE}"/>
+                <a16:creationId xmlns:a16="http://schemas.microsoft.com/office/drawing/2014/main" id="{BD7AC43D-4B92-4572-A76B-B76C0A0031C6}"/>
               </a:ext>
             </a:extLst>
           </p:cNvPr>
@@ -2523,7 +2555,7 @@
             <a:pPr algn="l">
               <a:defRPr sz="1125" b="1">
                 <a:solidFill>
-                  <a:srgbClr val="2563EB"/>
+                  <a:srgbClr val="52677D"/>
                 </a:solidFill>
                 <a:latin typeface="Helvetica Neue"/>
                 <a:ea typeface="Helvetica Neue"/>
@@ -2533,7 +2565,7 @@
             <a:r>
               <a:rPr sz="1125" b="1">
                 <a:solidFill>
-                  <a:srgbClr val="2563EB"/>
+                  <a:srgbClr val="52677D"/>
                 </a:solidFill>
                 <a:latin typeface="Helvetica Neue"/>
                 <a:ea typeface="Helvetica Neue"/>
@@ -2549,7 +2581,7 @@
           <p:cNvPr id="2" name="">
             <a:extLst xmlns:a="http://schemas.openxmlformats.org/drawingml/2006/main">
               <a:ext uri="{FF2B5EF4-FFF2-40B4-BE49-F238E27FC236}">
-                <a16:creationId xmlns:a16="http://schemas.microsoft.com/office/drawing/2014/main" id="{DD8EAD0C-5486-4505-9B23-3C80C8A9C92B}"/>
+                <a16:creationId xmlns:a16="http://schemas.microsoft.com/office/drawing/2014/main" id="{590F564F-88C6-4262-A184-C200B9529498}"/>
               </a:ext>
             </a:extLst>
           </p:cNvPr>
@@ -2580,7 +2612,7 @@
             <a:pPr algn="l">
               <a:defRPr sz="2250" b="1">
                 <a:solidFill>
-                  <a:srgbClr val="092454"/>
+                  <a:srgbClr val="1C2E4A"/>
                 </a:solidFill>
                 <a:latin typeface="Helvetica Neue"/>
                 <a:ea typeface="Helvetica Neue"/>
@@ -2590,7 +2622,7 @@
             <a:r>
               <a:rPr sz="2250" b="1">
                 <a:solidFill>
-                  <a:srgbClr val="092454"/>
+                  <a:srgbClr val="1C2E4A"/>
                 </a:solidFill>
                 <a:latin typeface="Helvetica Neue"/>
                 <a:ea typeface="Helvetica Neue"/>
@@ -2606,7 +2638,7 @@
           <p:cNvPr id="3" name="">
             <a:extLst xmlns:a="http://schemas.openxmlformats.org/drawingml/2006/main">
               <a:ext uri="{FF2B5EF4-FFF2-40B4-BE49-F238E27FC236}">
-                <a16:creationId xmlns:a16="http://schemas.microsoft.com/office/drawing/2014/main" id="{B698FB9D-0B3D-4080-B11B-BFE211125E08}"/>
+                <a16:creationId xmlns:a16="http://schemas.microsoft.com/office/drawing/2014/main" id="{9BA8C130-3862-423A-98C4-FB984E1D655A}"/>
               </a:ext>
             </a:extLst>
           </p:cNvPr>
@@ -2626,7 +2658,7 @@
             </a:avLst>
           </a:prstGeom>
           <a:solidFill xmlns:a="http://schemas.openxmlformats.org/drawingml/2006/main">
-            <a:srgbClr val="EEF7FF"/>
+            <a:srgbClr val="D1CFC9"/>
           </a:solidFill>
           <a:ln xmlns:a="http://schemas.openxmlformats.org/drawingml/2006/main" w="0">
             <a:noFill/>
@@ -2638,7 +2670,7 @@
           <p:cNvPr id="4" name="">
             <a:extLst xmlns:a="http://schemas.openxmlformats.org/drawingml/2006/main">
               <a:ext uri="{FF2B5EF4-FFF2-40B4-BE49-F238E27FC236}">
-                <a16:creationId xmlns:a16="http://schemas.microsoft.com/office/drawing/2014/main" id="{D3E51005-90FD-48E5-B68D-2179CB067922}"/>
+                <a16:creationId xmlns:a16="http://schemas.microsoft.com/office/drawing/2014/main" id="{9BADE5D7-AB8A-49BE-A1EB-79A9096AD794}"/>
               </a:ext>
             </a:extLst>
           </p:cNvPr>
@@ -2669,7 +2701,7 @@
             <a:pPr algn="l">
               <a:defRPr sz="1125" b="1">
                 <a:solidFill>
-                  <a:srgbClr val="2563EB"/>
+                  <a:srgbClr val="52677D"/>
                 </a:solidFill>
                 <a:latin typeface="Helvetica Neue"/>
                 <a:ea typeface="Helvetica Neue"/>
@@ -2679,7 +2711,7 @@
             <a:r>
               <a:rPr sz="1125" b="1">
                 <a:solidFill>
-                  <a:srgbClr val="2563EB"/>
+                  <a:srgbClr val="52677D"/>
                 </a:solidFill>
                 <a:latin typeface="Helvetica Neue"/>
                 <a:ea typeface="Helvetica Neue"/>
@@ -2695,7 +2727,7 @@
           <p:cNvPr id="5" name="">
             <a:extLst xmlns:a="http://schemas.openxmlformats.org/drawingml/2006/main">
               <a:ext uri="{FF2B5EF4-FFF2-40B4-BE49-F238E27FC236}">
-                <a16:creationId xmlns:a16="http://schemas.microsoft.com/office/drawing/2014/main" id="{1E5567ED-BA2E-4FA1-8F20-104DFA1F3053}"/>
+                <a16:creationId xmlns:a16="http://schemas.microsoft.com/office/drawing/2014/main" id="{AD27D7D6-B7DA-4372-A6C2-4587E002FF9F}"/>
               </a:ext>
             </a:extLst>
           </p:cNvPr>
@@ -2726,7 +2758,7 @@
             <a:pPr algn="l">
               <a:defRPr sz="1800" b="1">
                 <a:solidFill>
-                  <a:srgbClr val="092454"/>
+                  <a:srgbClr val="1C2E4A"/>
                 </a:solidFill>
                 <a:latin typeface="Helvetica Neue"/>
                 <a:ea typeface="Helvetica Neue"/>
@@ -2736,7 +2768,7 @@
             <a:r>
               <a:rPr sz="1800" b="1">
                 <a:solidFill>
-                  <a:srgbClr val="092454"/>
+                  <a:srgbClr val="1C2E4A"/>
                 </a:solidFill>
                 <a:latin typeface="Helvetica Neue"/>
                 <a:ea typeface="Helvetica Neue"/>
@@ -2752,7 +2784,7 @@
           <p:cNvPr id="6" name="">
             <a:extLst xmlns:a="http://schemas.openxmlformats.org/drawingml/2006/main">
               <a:ext uri="{FF2B5EF4-FFF2-40B4-BE49-F238E27FC236}">
-                <a16:creationId xmlns:a16="http://schemas.microsoft.com/office/drawing/2014/main" id="{305941F8-8204-4CB9-92AF-F031816FB950}"/>
+                <a16:creationId xmlns:a16="http://schemas.microsoft.com/office/drawing/2014/main" id="{F850AAE8-5077-4D6E-B293-0145EFA5E6D4}"/>
               </a:ext>
             </a:extLst>
           </p:cNvPr>
@@ -2783,7 +2815,7 @@
             <a:pPr algn="l">
               <a:defRPr sz="1800" b="1">
                 <a:solidFill>
-                  <a:srgbClr val="092454"/>
+                  <a:srgbClr val="1C2E4A"/>
                 </a:solidFill>
                 <a:latin typeface="Helvetica Neue"/>
                 <a:ea typeface="Helvetica Neue"/>
@@ -2793,7 +2825,7 @@
             <a:r>
               <a:rPr sz="1800" b="1">
                 <a:solidFill>
-                  <a:srgbClr val="092454"/>
+                  <a:srgbClr val="1C2E4A"/>
                 </a:solidFill>
                 <a:latin typeface="Helvetica Neue"/>
                 <a:ea typeface="Helvetica Neue"/>
@@ -2809,7 +2841,7 @@
           <p:cNvPr id="7" name="">
             <a:extLst xmlns:a="http://schemas.openxmlformats.org/drawingml/2006/main">
               <a:ext uri="{FF2B5EF4-FFF2-40B4-BE49-F238E27FC236}">
-                <a16:creationId xmlns:a16="http://schemas.microsoft.com/office/drawing/2014/main" id="{E641F88D-0B74-4580-9AFD-31257706D67E}"/>
+                <a16:creationId xmlns:a16="http://schemas.microsoft.com/office/drawing/2014/main" id="{2BAC90E7-E470-4C77-A6DD-7DE1163D6E33}"/>
               </a:ext>
             </a:extLst>
           </p:cNvPr>
@@ -2840,7 +2872,7 @@
             <a:pPr algn="l">
               <a:defRPr sz="1800" b="1">
                 <a:solidFill>
-                  <a:srgbClr val="092454"/>
+                  <a:srgbClr val="1C2E4A"/>
                 </a:solidFill>
                 <a:latin typeface="Helvetica Neue"/>
                 <a:ea typeface="Helvetica Neue"/>
@@ -2850,7 +2882,7 @@
             <a:r>
               <a:rPr sz="1800" b="1">
                 <a:solidFill>
-                  <a:srgbClr val="092454"/>
+                  <a:srgbClr val="1C2E4A"/>
                 </a:solidFill>
                 <a:latin typeface="Helvetica Neue"/>
                 <a:ea typeface="Helvetica Neue"/>
@@ -2866,7 +2898,7 @@
           <p:cNvPr id="8" name="">
             <a:extLst xmlns:a="http://schemas.openxmlformats.org/drawingml/2006/main">
               <a:ext uri="{FF2B5EF4-FFF2-40B4-BE49-F238E27FC236}">
-                <a16:creationId xmlns:a16="http://schemas.microsoft.com/office/drawing/2014/main" id="{BC779575-2A24-4109-86D5-6E0A4354F0D1}"/>
+                <a16:creationId xmlns:a16="http://schemas.microsoft.com/office/drawing/2014/main" id="{1FEFB0DD-D88C-4795-BA5D-EDE057A7B5CC}"/>
               </a:ext>
             </a:extLst>
           </p:cNvPr>
@@ -2886,7 +2918,7 @@
             </a:avLst>
           </a:prstGeom>
           <a:solidFill xmlns:a="http://schemas.openxmlformats.org/drawingml/2006/main">
-            <a:srgbClr val="FFD43B"/>
+            <a:srgbClr val="D1CFC9"/>
           </a:solidFill>
           <a:ln xmlns:a="http://schemas.openxmlformats.org/drawingml/2006/main" w="0">
             <a:noFill/>
@@ -2898,7 +2930,7 @@
           <p:cNvPr id="9" name="">
             <a:extLst xmlns:a="http://schemas.openxmlformats.org/drawingml/2006/main">
               <a:ext uri="{FF2B5EF4-FFF2-40B4-BE49-F238E27FC236}">
-                <a16:creationId xmlns:a16="http://schemas.microsoft.com/office/drawing/2014/main" id="{3A5A520B-C0F4-4B50-BC38-34B9FC9BC9A2}"/>
+                <a16:creationId xmlns:a16="http://schemas.microsoft.com/office/drawing/2014/main" id="{A6205B5C-107E-418B-BFA6-768EE7ED0F53}"/>
               </a:ext>
             </a:extLst>
           </p:cNvPr>
@@ -2929,7 +2961,7 @@
             <a:pPr algn="l">
               <a:defRPr sz="1125" b="1">
                 <a:solidFill>
-                  <a:srgbClr val="092454"/>
+                  <a:srgbClr val="1C2E4A"/>
                 </a:solidFill>
                 <a:latin typeface="Helvetica Neue"/>
                 <a:ea typeface="Helvetica Neue"/>
@@ -2939,7 +2971,7 @@
             <a:r>
               <a:rPr sz="1125" b="1">
                 <a:solidFill>
-                  <a:srgbClr val="092454"/>
+                  <a:srgbClr val="1C2E4A"/>
                 </a:solidFill>
                 <a:latin typeface="Helvetica Neue"/>
                 <a:ea typeface="Helvetica Neue"/>
@@ -2955,7 +2987,7 @@
           <p:cNvPr id="10" name="">
             <a:extLst xmlns:a="http://schemas.openxmlformats.org/drawingml/2006/main">
               <a:ext uri="{FF2B5EF4-FFF2-40B4-BE49-F238E27FC236}">
-                <a16:creationId xmlns:a16="http://schemas.microsoft.com/office/drawing/2014/main" id="{14226193-3017-4080-8CCE-C8651E14FB95}"/>
+                <a16:creationId xmlns:a16="http://schemas.microsoft.com/office/drawing/2014/main" id="{1FD2BE57-A970-4D52-B5DC-865A90ABCE12}"/>
               </a:ext>
             </a:extLst>
           </p:cNvPr>
@@ -2986,7 +3018,7 @@
             <a:pPr algn="l">
               <a:defRPr sz="2400" b="1">
                 <a:solidFill>
-                  <a:srgbClr val="092454"/>
+                  <a:srgbClr val="1C2E4A"/>
                 </a:solidFill>
                 <a:latin typeface="Helvetica Neue"/>
                 <a:ea typeface="Helvetica Neue"/>
@@ -2996,7 +3028,7 @@
             <a:r>
               <a:rPr sz="2400" b="1">
                 <a:solidFill>
-                  <a:srgbClr val="092454"/>
+                  <a:srgbClr val="1C2E4A"/>
                 </a:solidFill>
                 <a:latin typeface="Helvetica Neue"/>
                 <a:ea typeface="Helvetica Neue"/>
@@ -3012,7 +3044,7 @@
           <p:cNvPr id="11" name="">
             <a:extLst xmlns:a="http://schemas.openxmlformats.org/drawingml/2006/main">
               <a:ext uri="{FF2B5EF4-FFF2-40B4-BE49-F238E27FC236}">
-                <a16:creationId xmlns:a16="http://schemas.microsoft.com/office/drawing/2014/main" id="{03A6784A-6A5B-4DDF-A7D3-72DBB50EEEF3}"/>
+                <a16:creationId xmlns:a16="http://schemas.microsoft.com/office/drawing/2014/main" id="{59E42BC3-C832-4E30-9469-74EDC259DCFB}"/>
               </a:ext>
             </a:extLst>
           </p:cNvPr>
@@ -3043,7 +3075,7 @@
             <a:pPr algn="l">
               <a:defRPr sz="1650" b="0">
                 <a:solidFill>
-                  <a:srgbClr val="092454"/>
+                  <a:srgbClr val="1C2E4A"/>
                 </a:solidFill>
                 <a:latin typeface="Helvetica Neue"/>
                 <a:ea typeface="Helvetica Neue"/>
@@ -3053,7 +3085,7 @@
             <a:r>
               <a:rPr sz="1650" b="0">
                 <a:solidFill>
-                  <a:srgbClr val="092454"/>
+                  <a:srgbClr val="1C2E4A"/>
                 </a:solidFill>
                 <a:latin typeface="Helvetica Neue"/>
                 <a:ea typeface="Helvetica Neue"/>
@@ -3069,7 +3101,7 @@
           <p:cNvPr id="12" name="">
             <a:extLst xmlns:a="http://schemas.openxmlformats.org/drawingml/2006/main">
               <a:ext uri="{FF2B5EF4-FFF2-40B4-BE49-F238E27FC236}">
-                <a16:creationId xmlns:a16="http://schemas.microsoft.com/office/drawing/2014/main" id="{A57C267B-D0A6-4BC9-ACE4-5ACD0F76D925}"/>
+                <a16:creationId xmlns:a16="http://schemas.microsoft.com/office/drawing/2014/main" id="{20F5EE27-D9D3-421E-AF86-278029668881}"/>
               </a:ext>
             </a:extLst>
           </p:cNvPr>
@@ -3087,7 +3119,7 @@
             <a:avLst/>
           </a:prstGeom>
           <a:solidFill xmlns:a="http://schemas.openxmlformats.org/drawingml/2006/main">
-            <a:srgbClr val="D8E5F2"/>
+            <a:srgbClr val="BDC4D4"/>
           </a:solidFill>
           <a:ln xmlns:a="http://schemas.openxmlformats.org/drawingml/2006/main" w="0">
             <a:noFill/>
@@ -3099,7 +3131,7 @@
           <p:cNvPr id="13" name="">
             <a:extLst xmlns:a="http://schemas.openxmlformats.org/drawingml/2006/main">
               <a:ext uri="{FF2B5EF4-FFF2-40B4-BE49-F238E27FC236}">
-                <a16:creationId xmlns:a16="http://schemas.microsoft.com/office/drawing/2014/main" id="{551AF022-C3A6-47D6-B63F-E5198C3327F1}"/>
+                <a16:creationId xmlns:a16="http://schemas.microsoft.com/office/drawing/2014/main" id="{E44B2073-57BB-4128-8430-D80896C86E8D}"/>
               </a:ext>
             </a:extLst>
           </p:cNvPr>
@@ -3130,7 +3162,7 @@
             <a:pPr algn="l">
               <a:defRPr sz="750" b="0">
                 <a:solidFill>
-                  <a:srgbClr val="61718A"/>
+                  <a:srgbClr val="52677D"/>
                 </a:solidFill>
                 <a:latin typeface="Helvetica Neue"/>
                 <a:ea typeface="Helvetica Neue"/>
@@ -3140,7 +3172,7 @@
             <a:r>
               <a:rPr sz="750" b="0">
                 <a:solidFill>
-                  <a:srgbClr val="61718A"/>
+                  <a:srgbClr val="52677D"/>
                 </a:solidFill>
                 <a:latin typeface="Helvetica Neue"/>
                 <a:ea typeface="Helvetica Neue"/>
@@ -3156,7 +3188,7 @@
           <p:cNvPr id="14" name="">
             <a:extLst xmlns:a="http://schemas.openxmlformats.org/drawingml/2006/main">
               <a:ext uri="{FF2B5EF4-FFF2-40B4-BE49-F238E27FC236}">
-                <a16:creationId xmlns:a16="http://schemas.microsoft.com/office/drawing/2014/main" id="{CAE28B90-34A8-4807-A8D3-C8725E03E45F}"/>
+                <a16:creationId xmlns:a16="http://schemas.microsoft.com/office/drawing/2014/main" id="{B4D1859B-79F9-41D5-8320-681083FE685B}"/>
               </a:ext>
             </a:extLst>
           </p:cNvPr>
@@ -3187,7 +3219,7 @@
             <a:pPr algn="r">
               <a:defRPr sz="825" b="1">
                 <a:solidFill>
-                  <a:srgbClr val="2563EB"/>
+                  <a:srgbClr val="52677D"/>
                 </a:solidFill>
                 <a:latin typeface="Helvetica Neue"/>
                 <a:ea typeface="Helvetica Neue"/>
@@ -3197,7 +3229,7 @@
             <a:r>
               <a:rPr sz="825" b="1">
                 <a:solidFill>
-                  <a:srgbClr val="2563EB"/>
+                  <a:srgbClr val="52677D"/>
                 </a:solidFill>
                 <a:latin typeface="Helvetica Neue"/>
                 <a:ea typeface="Helvetica Neue"/>
@@ -3211,7 +3243,7 @@
     </p:spTree>
     <p:extLst>
       <p:ext uri="{BB962C8B-B14F-4D97-AF65-F5344CB8AC3E}">
-        <p14:creationId xmlns:p14="http://schemas.microsoft.com/office/powerpoint/2010/main" val="1988647991"/>
+        <p14:creationId xmlns:p14="http://schemas.microsoft.com/office/powerpoint/2010/main" val="415103428"/>
       </p:ext>
     </p:extLst>
   </p:cSld>
@@ -3224,7 +3256,7 @@
     <p:bg>
       <p:bgPr>
         <a:solidFill xmlns:a="http://schemas.openxmlformats.org/drawingml/2006/main">
-          <a:srgbClr val="EEF7FF"/>
+          <a:srgbClr val="D1CFC9"/>
         </a:solidFill>
       </p:bgPr>
     </p:bg>
@@ -3242,7 +3274,7 @@
           <p:cNvPr id="25" name="">
             <a:extLst xmlns:a="http://schemas.openxmlformats.org/drawingml/2006/main">
               <a:ext uri="{FF2B5EF4-FFF2-40B4-BE49-F238E27FC236}">
-                <a16:creationId xmlns:a16="http://schemas.microsoft.com/office/drawing/2014/main" id="{F61DD29E-8A96-406D-87EE-08C6C2D0F54C}"/>
+                <a16:creationId xmlns:a16="http://schemas.microsoft.com/office/drawing/2014/main" id="{76C574B7-B4F5-4EA4-97A3-A139C4AC4051}"/>
               </a:ext>
             </a:extLst>
           </p:cNvPr>
@@ -3273,7 +3305,7 @@
             <a:pPr algn="l">
               <a:defRPr sz="1125" b="1">
                 <a:solidFill>
-                  <a:srgbClr val="2563EB"/>
+                  <a:srgbClr val="52677D"/>
                 </a:solidFill>
                 <a:latin typeface="Helvetica Neue"/>
                 <a:ea typeface="Helvetica Neue"/>
@@ -3283,7 +3315,7 @@
             <a:r>
               <a:rPr sz="1125" b="1">
                 <a:solidFill>
-                  <a:srgbClr val="2563EB"/>
+                  <a:srgbClr val="52677D"/>
                 </a:solidFill>
                 <a:latin typeface="Helvetica Neue"/>
                 <a:ea typeface="Helvetica Neue"/>
@@ -3299,7 +3331,7 @@
           <p:cNvPr id="2" name="">
             <a:extLst xmlns:a="http://schemas.openxmlformats.org/drawingml/2006/main">
               <a:ext uri="{FF2B5EF4-FFF2-40B4-BE49-F238E27FC236}">
-                <a16:creationId xmlns:a16="http://schemas.microsoft.com/office/drawing/2014/main" id="{B5065F14-1B29-442C-AB29-A9A41F891617}"/>
+                <a16:creationId xmlns:a16="http://schemas.microsoft.com/office/drawing/2014/main" id="{1AE735C0-3D41-42F2-9B87-2E5DCDB9CF1B}"/>
               </a:ext>
             </a:extLst>
           </p:cNvPr>
@@ -3330,7 +3362,7 @@
             <a:pPr algn="l">
               <a:defRPr sz="2850" b="1">
                 <a:solidFill>
-                  <a:srgbClr val="092454"/>
+                  <a:srgbClr val="1C2E4A"/>
                 </a:solidFill>
                 <a:latin typeface="Helvetica Neue"/>
                 <a:ea typeface="Helvetica Neue"/>
@@ -3340,7 +3372,7 @@
             <a:r>
               <a:rPr sz="2850" b="1">
                 <a:solidFill>
-                  <a:srgbClr val="092454"/>
+                  <a:srgbClr val="1C2E4A"/>
                 </a:solidFill>
                 <a:latin typeface="Helvetica Neue"/>
                 <a:ea typeface="Helvetica Neue"/>
@@ -3356,7 +3388,7 @@
           <p:cNvPr id="3" name="">
             <a:extLst xmlns:a="http://schemas.openxmlformats.org/drawingml/2006/main">
               <a:ext uri="{FF2B5EF4-FFF2-40B4-BE49-F238E27FC236}">
-                <a16:creationId xmlns:a16="http://schemas.microsoft.com/office/drawing/2014/main" id="{63FC75A6-6B2A-40CF-B231-F9AA663670E9}"/>
+                <a16:creationId xmlns:a16="http://schemas.microsoft.com/office/drawing/2014/main" id="{5056F8F3-A8BA-4DDB-9440-6C038E4D2946}"/>
               </a:ext>
             </a:extLst>
           </p:cNvPr>
@@ -3387,7 +3419,7 @@
             <a:pPr algn="l">
               <a:defRPr sz="1425" b="0">
                 <a:solidFill>
-                  <a:srgbClr val="61718A"/>
+                  <a:srgbClr val="52677D"/>
                 </a:solidFill>
                 <a:latin typeface="Helvetica Neue"/>
                 <a:ea typeface="Helvetica Neue"/>
@@ -3397,7 +3429,7 @@
             <a:r>
               <a:rPr sz="1425" b="0">
                 <a:solidFill>
-                  <a:srgbClr val="61718A"/>
+                  <a:srgbClr val="52677D"/>
                 </a:solidFill>
                 <a:latin typeface="Helvetica Neue"/>
                 <a:ea typeface="Helvetica Neue"/>
@@ -3413,7 +3445,7 @@
           <p:cNvPr id="4" name="">
             <a:extLst xmlns:a="http://schemas.openxmlformats.org/drawingml/2006/main">
               <a:ext uri="{FF2B5EF4-FFF2-40B4-BE49-F238E27FC236}">
-                <a16:creationId xmlns:a16="http://schemas.microsoft.com/office/drawing/2014/main" id="{555AFBA5-1EB5-49B8-A578-83656FC00D5C}"/>
+                <a16:creationId xmlns:a16="http://schemas.microsoft.com/office/drawing/2014/main" id="{28BAAE69-9BFE-44ED-9FFF-077C8A64FD8C}"/>
               </a:ext>
             </a:extLst>
           </p:cNvPr>
@@ -3444,7 +3476,7 @@
             <a:pPr algn="l">
               <a:defRPr sz="1200" b="1">
                 <a:solidFill>
-                  <a:srgbClr val="2563EB"/>
+                  <a:srgbClr val="52677D"/>
                 </a:solidFill>
                 <a:latin typeface="Helvetica Neue"/>
                 <a:ea typeface="Helvetica Neue"/>
@@ -3454,7 +3486,7 @@
             <a:r>
               <a:rPr sz="1200" b="1">
                 <a:solidFill>
-                  <a:srgbClr val="2563EB"/>
+                  <a:srgbClr val="52677D"/>
                 </a:solidFill>
                 <a:latin typeface="Helvetica Neue"/>
                 <a:ea typeface="Helvetica Neue"/>
@@ -3470,7 +3502,7 @@
           <p:cNvPr id="5" name="">
             <a:extLst xmlns:a="http://schemas.openxmlformats.org/drawingml/2006/main">
               <a:ext uri="{FF2B5EF4-FFF2-40B4-BE49-F238E27FC236}">
-                <a16:creationId xmlns:a16="http://schemas.microsoft.com/office/drawing/2014/main" id="{3229FCFB-EF10-40F0-94D2-0AB494C4FEB9}"/>
+                <a16:creationId xmlns:a16="http://schemas.microsoft.com/office/drawing/2014/main" id="{B34718C7-7E50-4CC3-9B95-4585262AE645}"/>
               </a:ext>
             </a:extLst>
           </p:cNvPr>
@@ -3501,7 +3533,7 @@
             <a:pPr algn="l">
               <a:defRPr sz="1275" b="1">
                 <a:solidFill>
-                  <a:srgbClr val="092454"/>
+                  <a:srgbClr val="1C2E4A"/>
                 </a:solidFill>
                 <a:latin typeface="Helvetica Neue"/>
                 <a:ea typeface="Helvetica Neue"/>
@@ -3511,7 +3543,7 @@
             <a:r>
               <a:rPr sz="1275" b="1">
                 <a:solidFill>
-                  <a:srgbClr val="092454"/>
+                  <a:srgbClr val="1C2E4A"/>
                 </a:solidFill>
                 <a:latin typeface="Helvetica Neue"/>
                 <a:ea typeface="Helvetica Neue"/>
@@ -3527,7 +3559,7 @@
           <p:cNvPr id="6" name="">
             <a:extLst xmlns:a="http://schemas.openxmlformats.org/drawingml/2006/main">
               <a:ext uri="{FF2B5EF4-FFF2-40B4-BE49-F238E27FC236}">
-                <a16:creationId xmlns:a16="http://schemas.microsoft.com/office/drawing/2014/main" id="{CADD3F26-AC90-4569-9198-7B67049D971E}"/>
+                <a16:creationId xmlns:a16="http://schemas.microsoft.com/office/drawing/2014/main" id="{61C60A08-A7E8-4C64-8A85-557CBEED7938}"/>
               </a:ext>
             </a:extLst>
           </p:cNvPr>
@@ -3558,7 +3590,7 @@
             <a:pPr algn="l">
               <a:defRPr sz="900" b="0">
                 <a:solidFill>
-                  <a:srgbClr val="61718A"/>
+                  <a:srgbClr val="52677D"/>
                 </a:solidFill>
                 <a:latin typeface="Helvetica Neue"/>
                 <a:ea typeface="Helvetica Neue"/>
@@ -3568,7 +3600,7 @@
             <a:r>
               <a:rPr sz="900" b="0">
                 <a:solidFill>
-                  <a:srgbClr val="61718A"/>
+                  <a:srgbClr val="52677D"/>
                 </a:solidFill>
                 <a:latin typeface="Helvetica Neue"/>
                 <a:ea typeface="Helvetica Neue"/>
@@ -3584,7 +3616,7 @@
           <p:cNvPr id="7" name="">
             <a:extLst xmlns:a="http://schemas.openxmlformats.org/drawingml/2006/main">
               <a:ext uri="{FF2B5EF4-FFF2-40B4-BE49-F238E27FC236}">
-                <a16:creationId xmlns:a16="http://schemas.microsoft.com/office/drawing/2014/main" id="{27C0471D-7C00-4BD1-A559-57C442954F3A}"/>
+                <a16:creationId xmlns:a16="http://schemas.microsoft.com/office/drawing/2014/main" id="{1C86C0B2-87F3-4CCE-8A51-9E1805FB6723}"/>
               </a:ext>
             </a:extLst>
           </p:cNvPr>
@@ -3615,7 +3647,7 @@
             <a:pPr algn="l">
               <a:defRPr sz="1200" b="1">
                 <a:solidFill>
-                  <a:srgbClr val="2563EB"/>
+                  <a:srgbClr val="52677D"/>
                 </a:solidFill>
                 <a:latin typeface="Helvetica Neue"/>
                 <a:ea typeface="Helvetica Neue"/>
@@ -3625,7 +3657,7 @@
             <a:r>
               <a:rPr sz="1200" b="1">
                 <a:solidFill>
-                  <a:srgbClr val="2563EB"/>
+                  <a:srgbClr val="52677D"/>
                 </a:solidFill>
                 <a:latin typeface="Helvetica Neue"/>
                 <a:ea typeface="Helvetica Neue"/>
@@ -3641,7 +3673,7 @@
           <p:cNvPr id="8" name="">
             <a:extLst xmlns:a="http://schemas.openxmlformats.org/drawingml/2006/main">
               <a:ext uri="{FF2B5EF4-FFF2-40B4-BE49-F238E27FC236}">
-                <a16:creationId xmlns:a16="http://schemas.microsoft.com/office/drawing/2014/main" id="{6EFB4DA7-CE99-4A69-9291-32316E2AC67B}"/>
+                <a16:creationId xmlns:a16="http://schemas.microsoft.com/office/drawing/2014/main" id="{EB798C41-1489-47F2-8FB9-D46438421A77}"/>
               </a:ext>
             </a:extLst>
           </p:cNvPr>
@@ -3672,7 +3704,7 @@
             <a:pPr algn="l">
               <a:defRPr sz="1275" b="1">
                 <a:solidFill>
-                  <a:srgbClr val="092454"/>
+                  <a:srgbClr val="1C2E4A"/>
                 </a:solidFill>
                 <a:latin typeface="Helvetica Neue"/>
                 <a:ea typeface="Helvetica Neue"/>
@@ -3682,7 +3714,7 @@
             <a:r>
               <a:rPr sz="1275" b="1">
                 <a:solidFill>
-                  <a:srgbClr val="092454"/>
+                  <a:srgbClr val="1C2E4A"/>
                 </a:solidFill>
                 <a:latin typeface="Helvetica Neue"/>
                 <a:ea typeface="Helvetica Neue"/>
@@ -3698,7 +3730,7 @@
           <p:cNvPr id="9" name="">
             <a:extLst xmlns:a="http://schemas.openxmlformats.org/drawingml/2006/main">
               <a:ext uri="{FF2B5EF4-FFF2-40B4-BE49-F238E27FC236}">
-                <a16:creationId xmlns:a16="http://schemas.microsoft.com/office/drawing/2014/main" id="{8502AD49-1B8D-42C9-ABBA-0DE56B095A0B}"/>
+                <a16:creationId xmlns:a16="http://schemas.microsoft.com/office/drawing/2014/main" id="{60CE9F58-0865-410B-9AF0-264B133F35A9}"/>
               </a:ext>
             </a:extLst>
           </p:cNvPr>
@@ -3729,7 +3761,7 @@
             <a:pPr algn="l">
               <a:defRPr sz="900" b="0">
                 <a:solidFill>
-                  <a:srgbClr val="61718A"/>
+                  <a:srgbClr val="52677D"/>
                 </a:solidFill>
                 <a:latin typeface="Helvetica Neue"/>
                 <a:ea typeface="Helvetica Neue"/>
@@ -3739,7 +3771,7 @@
             <a:r>
               <a:rPr sz="900" b="0">
                 <a:solidFill>
-                  <a:srgbClr val="61718A"/>
+                  <a:srgbClr val="52677D"/>
                 </a:solidFill>
                 <a:latin typeface="Helvetica Neue"/>
                 <a:ea typeface="Helvetica Neue"/>
@@ -3755,7 +3787,7 @@
           <p:cNvPr id="10" name="">
             <a:extLst xmlns:a="http://schemas.openxmlformats.org/drawingml/2006/main">
               <a:ext uri="{FF2B5EF4-FFF2-40B4-BE49-F238E27FC236}">
-                <a16:creationId xmlns:a16="http://schemas.microsoft.com/office/drawing/2014/main" id="{45AE82CB-4B44-4870-97F6-84F3EB90FAD2}"/>
+                <a16:creationId xmlns:a16="http://schemas.microsoft.com/office/drawing/2014/main" id="{DBD50EEA-9C5C-4908-980F-C20E3CAAE278}"/>
               </a:ext>
             </a:extLst>
           </p:cNvPr>
@@ -3786,7 +3818,7 @@
             <a:pPr algn="l">
               <a:defRPr sz="1200" b="1">
                 <a:solidFill>
-                  <a:srgbClr val="2563EB"/>
+                  <a:srgbClr val="52677D"/>
                 </a:solidFill>
                 <a:latin typeface="Helvetica Neue"/>
                 <a:ea typeface="Helvetica Neue"/>
@@ -3796,7 +3828,7 @@
             <a:r>
               <a:rPr sz="1200" b="1">
                 <a:solidFill>
-                  <a:srgbClr val="2563EB"/>
+                  <a:srgbClr val="52677D"/>
                 </a:solidFill>
                 <a:latin typeface="Helvetica Neue"/>
                 <a:ea typeface="Helvetica Neue"/>
@@ -3812,7 +3844,7 @@
           <p:cNvPr id="11" name="">
             <a:extLst xmlns:a="http://schemas.openxmlformats.org/drawingml/2006/main">
               <a:ext uri="{FF2B5EF4-FFF2-40B4-BE49-F238E27FC236}">
-                <a16:creationId xmlns:a16="http://schemas.microsoft.com/office/drawing/2014/main" id="{352894CC-6E88-43BC-954A-3E9CAD3751FF}"/>
+                <a16:creationId xmlns:a16="http://schemas.microsoft.com/office/drawing/2014/main" id="{3AB68D47-08EB-48C8-97E4-8E890BDF4A3C}"/>
               </a:ext>
             </a:extLst>
           </p:cNvPr>
@@ -3843,7 +3875,7 @@
             <a:pPr algn="l">
               <a:defRPr sz="1275" b="1">
                 <a:solidFill>
-                  <a:srgbClr val="092454"/>
+                  <a:srgbClr val="1C2E4A"/>
                 </a:solidFill>
                 <a:latin typeface="Helvetica Neue"/>
                 <a:ea typeface="Helvetica Neue"/>
@@ -3853,7 +3885,7 @@
             <a:r>
               <a:rPr sz="1275" b="1">
                 <a:solidFill>
-                  <a:srgbClr val="092454"/>
+                  <a:srgbClr val="1C2E4A"/>
                 </a:solidFill>
                 <a:latin typeface="Helvetica Neue"/>
                 <a:ea typeface="Helvetica Neue"/>
@@ -3869,7 +3901,7 @@
           <p:cNvPr id="12" name="">
             <a:extLst xmlns:a="http://schemas.openxmlformats.org/drawingml/2006/main">
               <a:ext uri="{FF2B5EF4-FFF2-40B4-BE49-F238E27FC236}">
-                <a16:creationId xmlns:a16="http://schemas.microsoft.com/office/drawing/2014/main" id="{24B1A7A1-D9D1-45E5-969A-0892410D6276}"/>
+                <a16:creationId xmlns:a16="http://schemas.microsoft.com/office/drawing/2014/main" id="{3F96BA27-7440-4513-A44A-651AE000E250}"/>
               </a:ext>
             </a:extLst>
           </p:cNvPr>
@@ -3900,7 +3932,7 @@
             <a:pPr algn="l">
               <a:defRPr sz="900" b="0">
                 <a:solidFill>
-                  <a:srgbClr val="61718A"/>
+                  <a:srgbClr val="52677D"/>
                 </a:solidFill>
                 <a:latin typeface="Helvetica Neue"/>
                 <a:ea typeface="Helvetica Neue"/>
@@ -3910,7 +3942,7 @@
             <a:r>
               <a:rPr sz="900" b="0">
                 <a:solidFill>
-                  <a:srgbClr val="61718A"/>
+                  <a:srgbClr val="52677D"/>
                 </a:solidFill>
                 <a:latin typeface="Helvetica Neue"/>
                 <a:ea typeface="Helvetica Neue"/>
@@ -3926,7 +3958,7 @@
           <p:cNvPr id="13" name="">
             <a:extLst xmlns:a="http://schemas.openxmlformats.org/drawingml/2006/main">
               <a:ext uri="{FF2B5EF4-FFF2-40B4-BE49-F238E27FC236}">
-                <a16:creationId xmlns:a16="http://schemas.microsoft.com/office/drawing/2014/main" id="{C6E123BF-A895-4781-B515-17D04F9607E9}"/>
+                <a16:creationId xmlns:a16="http://schemas.microsoft.com/office/drawing/2014/main" id="{94DFD35D-EB73-498F-8A30-AE5142816B53}"/>
               </a:ext>
             </a:extLst>
           </p:cNvPr>
@@ -3957,7 +3989,7 @@
             <a:pPr algn="l">
               <a:defRPr sz="1200" b="1">
                 <a:solidFill>
-                  <a:srgbClr val="2563EB"/>
+                  <a:srgbClr val="52677D"/>
                 </a:solidFill>
                 <a:latin typeface="Helvetica Neue"/>
                 <a:ea typeface="Helvetica Neue"/>
@@ -3967,7 +3999,7 @@
             <a:r>
               <a:rPr sz="1200" b="1">
                 <a:solidFill>
-                  <a:srgbClr val="2563EB"/>
+                  <a:srgbClr val="52677D"/>
                 </a:solidFill>
                 <a:latin typeface="Helvetica Neue"/>
                 <a:ea typeface="Helvetica Neue"/>
@@ -3983,7 +4015,7 @@
           <p:cNvPr id="14" name="">
             <a:extLst xmlns:a="http://schemas.openxmlformats.org/drawingml/2006/main">
               <a:ext uri="{FF2B5EF4-FFF2-40B4-BE49-F238E27FC236}">
-                <a16:creationId xmlns:a16="http://schemas.microsoft.com/office/drawing/2014/main" id="{53EED800-FF65-42AB-BB94-20E09DC20DE5}"/>
+                <a16:creationId xmlns:a16="http://schemas.microsoft.com/office/drawing/2014/main" id="{05AC0DAB-F4A4-4698-8E6B-6F326A031B9C}"/>
               </a:ext>
             </a:extLst>
           </p:cNvPr>
@@ -4014,7 +4046,7 @@
             <a:pPr algn="l">
               <a:defRPr sz="1275" b="1">
                 <a:solidFill>
-                  <a:srgbClr val="092454"/>
+                  <a:srgbClr val="1C2E4A"/>
                 </a:solidFill>
                 <a:latin typeface="Helvetica Neue"/>
                 <a:ea typeface="Helvetica Neue"/>
@@ -4024,7 +4056,7 @@
             <a:r>
               <a:rPr sz="1275" b="1">
                 <a:solidFill>
-                  <a:srgbClr val="092454"/>
+                  <a:srgbClr val="1C2E4A"/>
                 </a:solidFill>
                 <a:latin typeface="Helvetica Neue"/>
                 <a:ea typeface="Helvetica Neue"/>
@@ -4040,7 +4072,7 @@
           <p:cNvPr id="15" name="">
             <a:extLst xmlns:a="http://schemas.openxmlformats.org/drawingml/2006/main">
               <a:ext uri="{FF2B5EF4-FFF2-40B4-BE49-F238E27FC236}">
-                <a16:creationId xmlns:a16="http://schemas.microsoft.com/office/drawing/2014/main" id="{0BD3491B-6FF6-4883-9E93-2218C6D7DB60}"/>
+                <a16:creationId xmlns:a16="http://schemas.microsoft.com/office/drawing/2014/main" id="{99ACDF85-3932-486C-8A2E-15BD65C93B1C}"/>
               </a:ext>
             </a:extLst>
           </p:cNvPr>
@@ -4071,7 +4103,7 @@
             <a:pPr algn="l">
               <a:defRPr sz="900" b="0">
                 <a:solidFill>
-                  <a:srgbClr val="61718A"/>
+                  <a:srgbClr val="52677D"/>
                 </a:solidFill>
                 <a:latin typeface="Helvetica Neue"/>
                 <a:ea typeface="Helvetica Neue"/>
@@ -4081,7 +4113,7 @@
             <a:r>
               <a:rPr sz="900" b="0">
                 <a:solidFill>
-                  <a:srgbClr val="61718A"/>
+                  <a:srgbClr val="52677D"/>
                 </a:solidFill>
                 <a:latin typeface="Helvetica Neue"/>
                 <a:ea typeface="Helvetica Neue"/>
@@ -4097,7 +4129,7 @@
           <p:cNvPr id="16" name="">
             <a:extLst xmlns:a="http://schemas.openxmlformats.org/drawingml/2006/main">
               <a:ext uri="{FF2B5EF4-FFF2-40B4-BE49-F238E27FC236}">
-                <a16:creationId xmlns:a16="http://schemas.microsoft.com/office/drawing/2014/main" id="{6BCB3AA5-F921-4746-87C9-09A97F0F4308}"/>
+                <a16:creationId xmlns:a16="http://schemas.microsoft.com/office/drawing/2014/main" id="{E5AF5481-1D5D-4884-9E26-A3D67F88A24C}"/>
               </a:ext>
             </a:extLst>
           </p:cNvPr>
@@ -4128,7 +4160,7 @@
             <a:pPr algn="l">
               <a:defRPr sz="1200" b="1">
                 <a:solidFill>
-                  <a:srgbClr val="2563EB"/>
+                  <a:srgbClr val="52677D"/>
                 </a:solidFill>
                 <a:latin typeface="Helvetica Neue"/>
                 <a:ea typeface="Helvetica Neue"/>
@@ -4138,7 +4170,7 @@
             <a:r>
               <a:rPr sz="1200" b="1">
                 <a:solidFill>
-                  <a:srgbClr val="2563EB"/>
+                  <a:srgbClr val="52677D"/>
                 </a:solidFill>
                 <a:latin typeface="Helvetica Neue"/>
                 <a:ea typeface="Helvetica Neue"/>
@@ -4154,7 +4186,7 @@
           <p:cNvPr id="17" name="">
             <a:extLst xmlns:a="http://schemas.openxmlformats.org/drawingml/2006/main">
               <a:ext uri="{FF2B5EF4-FFF2-40B4-BE49-F238E27FC236}">
-                <a16:creationId xmlns:a16="http://schemas.microsoft.com/office/drawing/2014/main" id="{96B3903A-9B8A-4B20-8BAF-438A51D98D1D}"/>
+                <a16:creationId xmlns:a16="http://schemas.microsoft.com/office/drawing/2014/main" id="{826DFD6A-52E5-431A-A922-ED698F1332FD}"/>
               </a:ext>
             </a:extLst>
           </p:cNvPr>
@@ -4185,7 +4217,7 @@
             <a:pPr algn="l">
               <a:defRPr sz="1275" b="1">
                 <a:solidFill>
-                  <a:srgbClr val="092454"/>
+                  <a:srgbClr val="1C2E4A"/>
                 </a:solidFill>
                 <a:latin typeface="Helvetica Neue"/>
                 <a:ea typeface="Helvetica Neue"/>
@@ -4195,7 +4227,7 @@
             <a:r>
               <a:rPr sz="1275" b="1">
                 <a:solidFill>
-                  <a:srgbClr val="092454"/>
+                  <a:srgbClr val="1C2E4A"/>
                 </a:solidFill>
                 <a:latin typeface="Helvetica Neue"/>
                 <a:ea typeface="Helvetica Neue"/>
@@ -4211,7 +4243,7 @@
           <p:cNvPr id="18" name="">
             <a:extLst xmlns:a="http://schemas.openxmlformats.org/drawingml/2006/main">
               <a:ext uri="{FF2B5EF4-FFF2-40B4-BE49-F238E27FC236}">
-                <a16:creationId xmlns:a16="http://schemas.microsoft.com/office/drawing/2014/main" id="{229FD838-EB5F-4096-8C66-07C7BA6DF9D4}"/>
+                <a16:creationId xmlns:a16="http://schemas.microsoft.com/office/drawing/2014/main" id="{6DB8F44F-661F-4F43-A852-2010B4E37097}"/>
               </a:ext>
             </a:extLst>
           </p:cNvPr>
@@ -4242,7 +4274,7 @@
             <a:pPr algn="l">
               <a:defRPr sz="900" b="0">
                 <a:solidFill>
-                  <a:srgbClr val="61718A"/>
+                  <a:srgbClr val="52677D"/>
                 </a:solidFill>
                 <a:latin typeface="Helvetica Neue"/>
                 <a:ea typeface="Helvetica Neue"/>
@@ -4252,7 +4284,7 @@
             <a:r>
               <a:rPr sz="900" b="0">
                 <a:solidFill>
-                  <a:srgbClr val="61718A"/>
+                  <a:srgbClr val="52677D"/>
                 </a:solidFill>
                 <a:latin typeface="Helvetica Neue"/>
                 <a:ea typeface="Helvetica Neue"/>
@@ -4268,7 +4300,7 @@
           <p:cNvPr id="19" name="">
             <a:extLst xmlns:a="http://schemas.openxmlformats.org/drawingml/2006/main">
               <a:ext uri="{FF2B5EF4-FFF2-40B4-BE49-F238E27FC236}">
-                <a16:creationId xmlns:a16="http://schemas.microsoft.com/office/drawing/2014/main" id="{3814E911-B391-4140-9E0F-E28C9A48D30E}"/>
+                <a16:creationId xmlns:a16="http://schemas.microsoft.com/office/drawing/2014/main" id="{5BBD5B47-BD84-46B4-9337-39B8D04E2843}"/>
               </a:ext>
             </a:extLst>
           </p:cNvPr>
@@ -4299,7 +4331,7 @@
             <a:pPr algn="l">
               <a:defRPr sz="1200" b="1">
                 <a:solidFill>
-                  <a:srgbClr val="2563EB"/>
+                  <a:srgbClr val="52677D"/>
                 </a:solidFill>
                 <a:latin typeface="Helvetica Neue"/>
                 <a:ea typeface="Helvetica Neue"/>
@@ -4309,7 +4341,7 @@
             <a:r>
               <a:rPr sz="1200" b="1">
                 <a:solidFill>
-                  <a:srgbClr val="2563EB"/>
+                  <a:srgbClr val="52677D"/>
                 </a:solidFill>
                 <a:latin typeface="Helvetica Neue"/>
                 <a:ea typeface="Helvetica Neue"/>
@@ -4325,7 +4357,7 @@
           <p:cNvPr id="20" name="">
             <a:extLst xmlns:a="http://schemas.openxmlformats.org/drawingml/2006/main">
               <a:ext uri="{FF2B5EF4-FFF2-40B4-BE49-F238E27FC236}">
-                <a16:creationId xmlns:a16="http://schemas.microsoft.com/office/drawing/2014/main" id="{8E1FAFD7-CCDA-44A3-B87C-D3BB09B9E0BF}"/>
+                <a16:creationId xmlns:a16="http://schemas.microsoft.com/office/drawing/2014/main" id="{45CC3AD4-8554-4416-B67E-F7793C5F2BF0}"/>
               </a:ext>
             </a:extLst>
           </p:cNvPr>
@@ -4356,7 +4388,7 @@
             <a:pPr algn="l">
               <a:defRPr sz="1275" b="1">
                 <a:solidFill>
-                  <a:srgbClr val="092454"/>
+                  <a:srgbClr val="1C2E4A"/>
                 </a:solidFill>
                 <a:latin typeface="Helvetica Neue"/>
                 <a:ea typeface="Helvetica Neue"/>
@@ -4366,7 +4398,7 @@
             <a:r>
               <a:rPr sz="1275" b="1">
                 <a:solidFill>
-                  <a:srgbClr val="092454"/>
+                  <a:srgbClr val="1C2E4A"/>
                 </a:solidFill>
                 <a:latin typeface="Helvetica Neue"/>
                 <a:ea typeface="Helvetica Neue"/>
@@ -4382,7 +4414,7 @@
           <p:cNvPr id="21" name="">
             <a:extLst xmlns:a="http://schemas.openxmlformats.org/drawingml/2006/main">
               <a:ext uri="{FF2B5EF4-FFF2-40B4-BE49-F238E27FC236}">
-                <a16:creationId xmlns:a16="http://schemas.microsoft.com/office/drawing/2014/main" id="{270F8701-7171-4954-AE1E-47EB64F35C5C}"/>
+                <a16:creationId xmlns:a16="http://schemas.microsoft.com/office/drawing/2014/main" id="{9B1E0AD1-E9F5-415D-A8A9-24883446F49E}"/>
               </a:ext>
             </a:extLst>
           </p:cNvPr>
@@ -4413,7 +4445,7 @@
             <a:pPr algn="l">
               <a:defRPr sz="900" b="0">
                 <a:solidFill>
-                  <a:srgbClr val="61718A"/>
+                  <a:srgbClr val="52677D"/>
                 </a:solidFill>
                 <a:latin typeface="Helvetica Neue"/>
                 <a:ea typeface="Helvetica Neue"/>
@@ -4423,7 +4455,7 @@
             <a:r>
               <a:rPr sz="900" b="0">
                 <a:solidFill>
-                  <a:srgbClr val="61718A"/>
+                  <a:srgbClr val="52677D"/>
                 </a:solidFill>
                 <a:latin typeface="Helvetica Neue"/>
                 <a:ea typeface="Helvetica Neue"/>
@@ -4439,7 +4471,7 @@
           <p:cNvPr id="22" name="">
             <a:extLst xmlns:a="http://schemas.openxmlformats.org/drawingml/2006/main">
               <a:ext uri="{FF2B5EF4-FFF2-40B4-BE49-F238E27FC236}">
-                <a16:creationId xmlns:a16="http://schemas.microsoft.com/office/drawing/2014/main" id="{CC6D8F24-CCFA-41C7-8205-429901AC6B09}"/>
+                <a16:creationId xmlns:a16="http://schemas.microsoft.com/office/drawing/2014/main" id="{4394ABB2-1B8B-4D95-9188-6DF022A93A01}"/>
               </a:ext>
             </a:extLst>
           </p:cNvPr>
@@ -4457,7 +4489,7 @@
             <a:avLst/>
           </a:prstGeom>
           <a:solidFill xmlns:a="http://schemas.openxmlformats.org/drawingml/2006/main">
-            <a:srgbClr val="D8E5F2"/>
+            <a:srgbClr val="BDC4D4"/>
           </a:solidFill>
           <a:ln xmlns:a="http://schemas.openxmlformats.org/drawingml/2006/main" w="0">
             <a:noFill/>
@@ -4469,7 +4501,7 @@
           <p:cNvPr id="23" name="">
             <a:extLst xmlns:a="http://schemas.openxmlformats.org/drawingml/2006/main">
               <a:ext uri="{FF2B5EF4-FFF2-40B4-BE49-F238E27FC236}">
-                <a16:creationId xmlns:a16="http://schemas.microsoft.com/office/drawing/2014/main" id="{1F17EC67-B10F-44FB-A3FD-7C265DB3DE57}"/>
+                <a16:creationId xmlns:a16="http://schemas.microsoft.com/office/drawing/2014/main" id="{E69296CF-C6D2-43EE-99EF-3E6F9A13B2E7}"/>
               </a:ext>
             </a:extLst>
           </p:cNvPr>
@@ -4500,7 +4532,7 @@
             <a:pPr algn="l">
               <a:defRPr sz="750" b="0">
                 <a:solidFill>
-                  <a:srgbClr val="61718A"/>
+                  <a:srgbClr val="52677D"/>
                 </a:solidFill>
                 <a:latin typeface="Helvetica Neue"/>
                 <a:ea typeface="Helvetica Neue"/>
@@ -4510,7 +4542,7 @@
             <a:r>
               <a:rPr sz="750" b="0">
                 <a:solidFill>
-                  <a:srgbClr val="61718A"/>
+                  <a:srgbClr val="52677D"/>
                 </a:solidFill>
                 <a:latin typeface="Helvetica Neue"/>
                 <a:ea typeface="Helvetica Neue"/>
@@ -4526,7 +4558,7 @@
           <p:cNvPr id="24" name="">
             <a:extLst xmlns:a="http://schemas.openxmlformats.org/drawingml/2006/main">
               <a:ext uri="{FF2B5EF4-FFF2-40B4-BE49-F238E27FC236}">
-                <a16:creationId xmlns:a16="http://schemas.microsoft.com/office/drawing/2014/main" id="{140B34D9-D1FD-4C91-AD82-EAA00044DD97}"/>
+                <a16:creationId xmlns:a16="http://schemas.microsoft.com/office/drawing/2014/main" id="{FFCB9B37-10DD-48EE-86CB-65C4CE6C5B0A}"/>
               </a:ext>
             </a:extLst>
           </p:cNvPr>
@@ -4557,7 +4589,7 @@
             <a:pPr algn="r">
               <a:defRPr sz="825" b="1">
                 <a:solidFill>
-                  <a:srgbClr val="2563EB"/>
+                  <a:srgbClr val="52677D"/>
                 </a:solidFill>
                 <a:latin typeface="Helvetica Neue"/>
                 <a:ea typeface="Helvetica Neue"/>
@@ -4567,7 +4599,7 @@
             <a:r>
               <a:rPr sz="825" b="1">
                 <a:solidFill>
-                  <a:srgbClr val="2563EB"/>
+                  <a:srgbClr val="52677D"/>
                 </a:solidFill>
                 <a:latin typeface="Helvetica Neue"/>
                 <a:ea typeface="Helvetica Neue"/>
@@ -4581,7 +4613,7 @@
     </p:spTree>
     <p:extLst>
       <p:ext uri="{BB962C8B-B14F-4D97-AF65-F5344CB8AC3E}">
-        <p14:creationId xmlns:p14="http://schemas.microsoft.com/office/powerpoint/2010/main" val="659211079"/>
+        <p14:creationId xmlns:p14="http://schemas.microsoft.com/office/powerpoint/2010/main" val="1280632239"/>
       </p:ext>
     </p:extLst>
   </p:cSld>
@@ -4594,7 +4626,7 @@
     <p:bg>
       <p:bgPr>
         <a:solidFill xmlns:a="http://schemas.openxmlformats.org/drawingml/2006/main">
-          <a:srgbClr val="061A3A"/>
+          <a:srgbClr val="0F1A2B"/>
         </a:solidFill>
       </p:bgPr>
     </p:bg>
@@ -4612,7 +4644,7 @@
           <p:cNvPr id="10" name="">
             <a:extLst xmlns:a="http://schemas.openxmlformats.org/drawingml/2006/main">
               <a:ext uri="{FF2B5EF4-FFF2-40B4-BE49-F238E27FC236}">
-                <a16:creationId xmlns:a16="http://schemas.microsoft.com/office/drawing/2014/main" id="{96DFEAA4-23C5-44FF-A38A-B8E090F29EF3}"/>
+                <a16:creationId xmlns:a16="http://schemas.microsoft.com/office/drawing/2014/main" id="{EF3C6E4F-C0CE-474E-9DE8-168BAC08E052}"/>
               </a:ext>
             </a:extLst>
           </p:cNvPr>
@@ -4643,7 +4675,7 @@
             <a:pPr algn="l">
               <a:defRPr sz="1125" b="1">
                 <a:solidFill>
-                  <a:srgbClr val="FFD43B"/>
+                  <a:srgbClr val="D1CFC9"/>
                 </a:solidFill>
                 <a:latin typeface="Helvetica Neue"/>
                 <a:ea typeface="Helvetica Neue"/>
@@ -4653,7 +4685,7 @@
             <a:r>
               <a:rPr sz="1125" b="1">
                 <a:solidFill>
-                  <a:srgbClr val="FFD43B"/>
+                  <a:srgbClr val="D1CFC9"/>
                 </a:solidFill>
                 <a:latin typeface="Helvetica Neue"/>
                 <a:ea typeface="Helvetica Neue"/>
@@ -4669,7 +4701,7 @@
           <p:cNvPr id="2" name="">
             <a:extLst xmlns:a="http://schemas.openxmlformats.org/drawingml/2006/main">
               <a:ext uri="{FF2B5EF4-FFF2-40B4-BE49-F238E27FC236}">
-                <a16:creationId xmlns:a16="http://schemas.microsoft.com/office/drawing/2014/main" id="{80826B72-5750-4E8E-B115-67C8E2741B1E}"/>
+                <a16:creationId xmlns:a16="http://schemas.microsoft.com/office/drawing/2014/main" id="{417A4715-D103-4BF0-A160-085370DF7083}"/>
               </a:ext>
             </a:extLst>
           </p:cNvPr>
@@ -4726,7 +4758,7 @@
           <p:cNvPr id="3" name="">
             <a:extLst xmlns:a="http://schemas.openxmlformats.org/drawingml/2006/main">
               <a:ext uri="{FF2B5EF4-FFF2-40B4-BE49-F238E27FC236}">
-                <a16:creationId xmlns:a16="http://schemas.microsoft.com/office/drawing/2014/main" id="{784F09CA-68B0-4C61-9B23-BC5599D7DED1}"/>
+                <a16:creationId xmlns:a16="http://schemas.microsoft.com/office/drawing/2014/main" id="{C047D124-4997-4523-B36C-69A3B9691B3B}"/>
               </a:ext>
             </a:extLst>
           </p:cNvPr>
@@ -4757,7 +4789,7 @@
             <a:pPr algn="l">
               <a:defRPr sz="8700" b="1">
                 <a:solidFill>
-                  <a:srgbClr val="FFD43B"/>
+                  <a:srgbClr val="D1CFC9"/>
                 </a:solidFill>
                 <a:latin typeface="Helvetica Neue"/>
                 <a:ea typeface="Helvetica Neue"/>
@@ -4767,7 +4799,7 @@
             <a:r>
               <a:rPr sz="8700" b="1">
                 <a:solidFill>
-                  <a:srgbClr val="FFD43B"/>
+                  <a:srgbClr val="D1CFC9"/>
                 </a:solidFill>
                 <a:latin typeface="Helvetica Neue"/>
                 <a:ea typeface="Helvetica Neue"/>
@@ -4783,7 +4815,7 @@
           <p:cNvPr id="4" name="">
             <a:extLst xmlns:a="http://schemas.openxmlformats.org/drawingml/2006/main">
               <a:ext uri="{FF2B5EF4-FFF2-40B4-BE49-F238E27FC236}">
-                <a16:creationId xmlns:a16="http://schemas.microsoft.com/office/drawing/2014/main" id="{A82B99E0-0B6A-4369-B230-A6301601079B}"/>
+                <a16:creationId xmlns:a16="http://schemas.microsoft.com/office/drawing/2014/main" id="{7CF6F748-F608-4B95-A805-55183B20AEBF}"/>
               </a:ext>
             </a:extLst>
           </p:cNvPr>
@@ -4840,7 +4872,7 @@
           <p:cNvPr id="5" name="">
             <a:extLst xmlns:a="http://schemas.openxmlformats.org/drawingml/2006/main">
               <a:ext uri="{FF2B5EF4-FFF2-40B4-BE49-F238E27FC236}">
-                <a16:creationId xmlns:a16="http://schemas.microsoft.com/office/drawing/2014/main" id="{A9436713-6D4B-4DC6-A4B5-3F3EABE784B4}"/>
+                <a16:creationId xmlns:a16="http://schemas.microsoft.com/office/drawing/2014/main" id="{CA132DD4-D678-4ADC-887A-FBA0899DCA0E}"/>
               </a:ext>
             </a:extLst>
           </p:cNvPr>
@@ -4858,7 +4890,7 @@
             <a:avLst/>
           </a:prstGeom>
           <a:solidFill xmlns:a="http://schemas.openxmlformats.org/drawingml/2006/main">
-            <a:srgbClr val="31507E"/>
+            <a:srgbClr val="52677D"/>
           </a:solidFill>
           <a:ln xmlns:a="http://schemas.openxmlformats.org/drawingml/2006/main" w="0">
             <a:noFill/>
@@ -4870,7 +4902,7 @@
           <p:cNvPr id="6" name="">
             <a:extLst xmlns:a="http://schemas.openxmlformats.org/drawingml/2006/main">
               <a:ext uri="{FF2B5EF4-FFF2-40B4-BE49-F238E27FC236}">
-                <a16:creationId xmlns:a16="http://schemas.microsoft.com/office/drawing/2014/main" id="{E3329601-8E06-4E81-8886-792C38D72ED6}"/>
+                <a16:creationId xmlns:a16="http://schemas.microsoft.com/office/drawing/2014/main" id="{25EB11C4-F0C0-4127-BBA0-7BF68AB0B346}"/>
               </a:ext>
             </a:extLst>
           </p:cNvPr>
@@ -4901,7 +4933,7 @@
             <a:pPr algn="l">
               <a:defRPr sz="1800" b="0">
                 <a:solidFill>
-                  <a:srgbClr val="BFE6FF"/>
+                  <a:srgbClr val="BDC4D4"/>
                 </a:solidFill>
                 <a:latin typeface="Helvetica Neue"/>
                 <a:ea typeface="Helvetica Neue"/>
@@ -4911,7 +4943,7 @@
             <a:r>
               <a:rPr sz="1800" b="0">
                 <a:solidFill>
-                  <a:srgbClr val="BFE6FF"/>
+                  <a:srgbClr val="BDC4D4"/>
                 </a:solidFill>
                 <a:latin typeface="Helvetica Neue"/>
                 <a:ea typeface="Helvetica Neue"/>
@@ -4927,7 +4959,7 @@
           <p:cNvPr id="7" name="">
             <a:extLst xmlns:a="http://schemas.openxmlformats.org/drawingml/2006/main">
               <a:ext uri="{FF2B5EF4-FFF2-40B4-BE49-F238E27FC236}">
-                <a16:creationId xmlns:a16="http://schemas.microsoft.com/office/drawing/2014/main" id="{D2F8D260-9916-4BF7-A395-79E4C707E876}"/>
+                <a16:creationId xmlns:a16="http://schemas.microsoft.com/office/drawing/2014/main" id="{37318A2A-BB78-4B2A-801F-929520B8D203}"/>
               </a:ext>
             </a:extLst>
           </p:cNvPr>
@@ -4945,7 +4977,7 @@
             <a:avLst/>
           </a:prstGeom>
           <a:solidFill xmlns:a="http://schemas.openxmlformats.org/drawingml/2006/main">
-            <a:srgbClr val="31507E"/>
+            <a:srgbClr val="52677D"/>
           </a:solidFill>
           <a:ln xmlns:a="http://schemas.openxmlformats.org/drawingml/2006/main" w="0">
             <a:noFill/>
@@ -4957,7 +4989,7 @@
           <p:cNvPr id="8" name="">
             <a:extLst xmlns:a="http://schemas.openxmlformats.org/drawingml/2006/main">
               <a:ext uri="{FF2B5EF4-FFF2-40B4-BE49-F238E27FC236}">
-                <a16:creationId xmlns:a16="http://schemas.microsoft.com/office/drawing/2014/main" id="{58C3A566-592C-4A75-B31C-EF21568203A1}"/>
+                <a16:creationId xmlns:a16="http://schemas.microsoft.com/office/drawing/2014/main" id="{F65C3C3B-561E-42F7-AF9C-6592F0054BD5}"/>
               </a:ext>
             </a:extLst>
           </p:cNvPr>
@@ -4988,7 +5020,7 @@
             <a:pPr algn="l">
               <a:defRPr sz="750" b="0">
                 <a:solidFill>
-                  <a:srgbClr val="BFE6FF"/>
+                  <a:srgbClr val="BDC4D4"/>
                 </a:solidFill>
                 <a:latin typeface="Helvetica Neue"/>
                 <a:ea typeface="Helvetica Neue"/>
@@ -4998,7 +5030,7 @@
             <a:r>
               <a:rPr sz="750" b="0">
                 <a:solidFill>
-                  <a:srgbClr val="BFE6FF"/>
+                  <a:srgbClr val="BDC4D4"/>
                 </a:solidFill>
                 <a:latin typeface="Helvetica Neue"/>
                 <a:ea typeface="Helvetica Neue"/>
@@ -5014,7 +5046,7 @@
           <p:cNvPr id="9" name="">
             <a:extLst xmlns:a="http://schemas.openxmlformats.org/drawingml/2006/main">
               <a:ext uri="{FF2B5EF4-FFF2-40B4-BE49-F238E27FC236}">
-                <a16:creationId xmlns:a16="http://schemas.microsoft.com/office/drawing/2014/main" id="{82331CFD-BF6C-4559-9DCC-B4841D78847B}"/>
+                <a16:creationId xmlns:a16="http://schemas.microsoft.com/office/drawing/2014/main" id="{9D3DF488-3588-495E-9354-51DEF9E33858}"/>
               </a:ext>
             </a:extLst>
           </p:cNvPr>
@@ -5045,7 +5077,7 @@
             <a:pPr algn="r">
               <a:defRPr sz="825" b="1">
                 <a:solidFill>
-                  <a:srgbClr val="FFD43B"/>
+                  <a:srgbClr val="D1CFC9"/>
                 </a:solidFill>
                 <a:latin typeface="Helvetica Neue"/>
                 <a:ea typeface="Helvetica Neue"/>
@@ -5055,7 +5087,7 @@
             <a:r>
               <a:rPr sz="825" b="1">
                 <a:solidFill>
-                  <a:srgbClr val="FFD43B"/>
+                  <a:srgbClr val="D1CFC9"/>
                 </a:solidFill>
                 <a:latin typeface="Helvetica Neue"/>
                 <a:ea typeface="Helvetica Neue"/>
@@ -5069,7 +5101,7 @@
     </p:spTree>
     <p:extLst>
       <p:ext uri="{BB962C8B-B14F-4D97-AF65-F5344CB8AC3E}">
-        <p14:creationId xmlns:p14="http://schemas.microsoft.com/office/powerpoint/2010/main" val="2026384803"/>
+        <p14:creationId xmlns:p14="http://schemas.microsoft.com/office/powerpoint/2010/main" val="1836703329"/>
       </p:ext>
     </p:extLst>
   </p:cSld>
@@ -5100,7 +5132,7 @@
           <p:cNvPr id="24" name="">
             <a:extLst xmlns:a="http://schemas.openxmlformats.org/drawingml/2006/main">
               <a:ext uri="{FF2B5EF4-FFF2-40B4-BE49-F238E27FC236}">
-                <a16:creationId xmlns:a16="http://schemas.microsoft.com/office/drawing/2014/main" id="{58B6BFEA-3393-48BF-A91A-CA2F4C0CFF8A}"/>
+                <a16:creationId xmlns:a16="http://schemas.microsoft.com/office/drawing/2014/main" id="{7C9529D3-A2E9-49FF-967B-E5564BFB3A99}"/>
               </a:ext>
             </a:extLst>
           </p:cNvPr>
@@ -5131,7 +5163,7 @@
             <a:pPr algn="l">
               <a:defRPr sz="1125" b="1">
                 <a:solidFill>
-                  <a:srgbClr val="2563EB"/>
+                  <a:srgbClr val="52677D"/>
                 </a:solidFill>
                 <a:latin typeface="Helvetica Neue"/>
                 <a:ea typeface="Helvetica Neue"/>
@@ -5141,7 +5173,7 @@
             <a:r>
               <a:rPr sz="1125" b="1">
                 <a:solidFill>
-                  <a:srgbClr val="2563EB"/>
+                  <a:srgbClr val="52677D"/>
                 </a:solidFill>
                 <a:latin typeface="Helvetica Neue"/>
                 <a:ea typeface="Helvetica Neue"/>
@@ -5157,7 +5189,7 @@
           <p:cNvPr id="2" name="">
             <a:extLst xmlns:a="http://schemas.openxmlformats.org/drawingml/2006/main">
               <a:ext uri="{FF2B5EF4-FFF2-40B4-BE49-F238E27FC236}">
-                <a16:creationId xmlns:a16="http://schemas.microsoft.com/office/drawing/2014/main" id="{ECD64E7B-EA27-45F0-9B76-A111AA77AE27}"/>
+                <a16:creationId xmlns:a16="http://schemas.microsoft.com/office/drawing/2014/main" id="{459CD30F-BBAB-4531-BE4D-2B51C727D512}"/>
               </a:ext>
             </a:extLst>
           </p:cNvPr>
@@ -5188,7 +5220,7 @@
             <a:pPr algn="l">
               <a:defRPr sz="2850" b="1">
                 <a:solidFill>
-                  <a:srgbClr val="092454"/>
+                  <a:srgbClr val="1C2E4A"/>
                 </a:solidFill>
                 <a:latin typeface="Helvetica Neue"/>
                 <a:ea typeface="Helvetica Neue"/>
@@ -5198,7 +5230,7 @@
             <a:r>
               <a:rPr sz="2850" b="1">
                 <a:solidFill>
-                  <a:srgbClr val="092454"/>
+                  <a:srgbClr val="1C2E4A"/>
                 </a:solidFill>
                 <a:latin typeface="Helvetica Neue"/>
                 <a:ea typeface="Helvetica Neue"/>
@@ -5214,7 +5246,7 @@
           <p:cNvPr id="3" name="">
             <a:extLst xmlns:a="http://schemas.openxmlformats.org/drawingml/2006/main">
               <a:ext uri="{FF2B5EF4-FFF2-40B4-BE49-F238E27FC236}">
-                <a16:creationId xmlns:a16="http://schemas.microsoft.com/office/drawing/2014/main" id="{8DE53EBB-23C6-46E3-97F4-FF8A4834BB78}"/>
+                <a16:creationId xmlns:a16="http://schemas.microsoft.com/office/drawing/2014/main" id="{3A631A63-C8E8-41CD-B71E-76AEE0A02EB8}"/>
               </a:ext>
             </a:extLst>
           </p:cNvPr>
@@ -5245,7 +5277,7 @@
             <a:pPr algn="l">
               <a:defRPr sz="1425" b="0">
                 <a:solidFill>
-                  <a:srgbClr val="61718A"/>
+                  <a:srgbClr val="52677D"/>
                 </a:solidFill>
                 <a:latin typeface="Helvetica Neue"/>
                 <a:ea typeface="Helvetica Neue"/>
@@ -5255,7 +5287,7 @@
             <a:r>
               <a:rPr sz="1425" b="0">
                 <a:solidFill>
-                  <a:srgbClr val="61718A"/>
+                  <a:srgbClr val="52677D"/>
                 </a:solidFill>
                 <a:latin typeface="Helvetica Neue"/>
                 <a:ea typeface="Helvetica Neue"/>
@@ -5271,7 +5303,7 @@
           <p:cNvPr id="4" name="">
             <a:extLst xmlns:a="http://schemas.openxmlformats.org/drawingml/2006/main">
               <a:ext uri="{FF2B5EF4-FFF2-40B4-BE49-F238E27FC236}">
-                <a16:creationId xmlns:a16="http://schemas.microsoft.com/office/drawing/2014/main" id="{1CBEF733-A45C-4CAB-ACB2-0D9F41CBFA38}"/>
+                <a16:creationId xmlns:a16="http://schemas.microsoft.com/office/drawing/2014/main" id="{E152E85F-BF4F-42FC-8C97-4FB99A52023D}"/>
               </a:ext>
             </a:extLst>
           </p:cNvPr>
@@ -5291,7 +5323,7 @@
             </a:avLst>
           </a:prstGeom>
           <a:solidFill xmlns:a="http://schemas.openxmlformats.org/drawingml/2006/main">
-            <a:srgbClr val="D8E5F2"/>
+            <a:srgbClr val="BDC4D4"/>
           </a:solidFill>
           <a:ln xmlns:a="http://schemas.openxmlformats.org/drawingml/2006/main" w="0">
             <a:noFill/>
@@ -5303,7 +5335,7 @@
           <p:cNvPr id="5" name="">
             <a:extLst xmlns:a="http://schemas.openxmlformats.org/drawingml/2006/main">
               <a:ext uri="{FF2B5EF4-FFF2-40B4-BE49-F238E27FC236}">
-                <a16:creationId xmlns:a16="http://schemas.microsoft.com/office/drawing/2014/main" id="{DBFD5B0F-33DB-4021-9937-0670DE5923D7}"/>
+                <a16:creationId xmlns:a16="http://schemas.microsoft.com/office/drawing/2014/main" id="{5727E7B9-9D2D-4B55-92E6-88959C3F12D7}"/>
               </a:ext>
             </a:extLst>
           </p:cNvPr>
@@ -5321,7 +5353,7 @@
             <a:avLst/>
           </a:prstGeom>
           <a:solidFill xmlns:a="http://schemas.openxmlformats.org/drawingml/2006/main">
-            <a:srgbClr val="2563EB"/>
+            <a:srgbClr val="52677D"/>
           </a:solidFill>
           <a:ln xmlns:a="http://schemas.openxmlformats.org/drawingml/2006/main" w="0">
             <a:noFill/>
@@ -5333,7 +5365,7 @@
           <p:cNvPr id="6" name="">
             <a:extLst xmlns:a="http://schemas.openxmlformats.org/drawingml/2006/main">
               <a:ext uri="{FF2B5EF4-FFF2-40B4-BE49-F238E27FC236}">
-                <a16:creationId xmlns:a16="http://schemas.microsoft.com/office/drawing/2014/main" id="{73148CD1-1D0B-4AA5-B4C2-7E4F3AFE14B7}"/>
+                <a16:creationId xmlns:a16="http://schemas.microsoft.com/office/drawing/2014/main" id="{D2B3F2D3-B82D-49F4-AA67-E2A9B4F07926}"/>
               </a:ext>
             </a:extLst>
           </p:cNvPr>
@@ -5390,7 +5422,7 @@
           <p:cNvPr id="7" name="">
             <a:extLst xmlns:a="http://schemas.openxmlformats.org/drawingml/2006/main">
               <a:ext uri="{FF2B5EF4-FFF2-40B4-BE49-F238E27FC236}">
-                <a16:creationId xmlns:a16="http://schemas.microsoft.com/office/drawing/2014/main" id="{E2D70DF8-CE30-4F31-B352-038209B7CF1C}"/>
+                <a16:creationId xmlns:a16="http://schemas.microsoft.com/office/drawing/2014/main" id="{50F17EB4-D7A4-45C3-A4AD-B6D1F9A765FD}"/>
               </a:ext>
             </a:extLst>
           </p:cNvPr>
@@ -5421,7 +5453,7 @@
             <a:pPr algn="ctr">
               <a:defRPr sz="1350" b="1">
                 <a:solidFill>
-                  <a:srgbClr val="2563EB"/>
+                  <a:srgbClr val="52677D"/>
                 </a:solidFill>
                 <a:latin typeface="Helvetica Neue"/>
                 <a:ea typeface="Helvetica Neue"/>
@@ -5431,7 +5463,7 @@
             <a:r>
               <a:rPr sz="1350" b="1">
                 <a:solidFill>
-                  <a:srgbClr val="2563EB"/>
+                  <a:srgbClr val="52677D"/>
                 </a:solidFill>
                 <a:latin typeface="Helvetica Neue"/>
                 <a:ea typeface="Helvetica Neue"/>
@@ -5447,7 +5479,7 @@
           <p:cNvPr id="8" name="">
             <a:extLst xmlns:a="http://schemas.openxmlformats.org/drawingml/2006/main">
               <a:ext uri="{FF2B5EF4-FFF2-40B4-BE49-F238E27FC236}">
-                <a16:creationId xmlns:a16="http://schemas.microsoft.com/office/drawing/2014/main" id="{85592991-702C-4370-890B-CAAB1DCFA482}"/>
+                <a16:creationId xmlns:a16="http://schemas.microsoft.com/office/drawing/2014/main" id="{978E2FE0-EA0A-425B-B92D-DA9423756683}"/>
               </a:ext>
             </a:extLst>
           </p:cNvPr>
@@ -5478,7 +5510,7 @@
             <a:pPr algn="ctr">
               <a:defRPr sz="1275" b="0">
                 <a:solidFill>
-                  <a:srgbClr val="61718A"/>
+                  <a:srgbClr val="52677D"/>
                 </a:solidFill>
                 <a:latin typeface="Helvetica Neue"/>
                 <a:ea typeface="Helvetica Neue"/>
@@ -5488,7 +5520,7 @@
             <a:r>
               <a:rPr sz="1275" b="0">
                 <a:solidFill>
-                  <a:srgbClr val="61718A"/>
+                  <a:srgbClr val="52677D"/>
                 </a:solidFill>
                 <a:latin typeface="Helvetica Neue"/>
                 <a:ea typeface="Helvetica Neue"/>
@@ -5504,7 +5536,7 @@
           <p:cNvPr id="9" name="">
             <a:extLst xmlns:a="http://schemas.openxmlformats.org/drawingml/2006/main">
               <a:ext uri="{FF2B5EF4-FFF2-40B4-BE49-F238E27FC236}">
-                <a16:creationId xmlns:a16="http://schemas.microsoft.com/office/drawing/2014/main" id="{FEFC5C02-34A4-49FA-8880-2EB58A698324}"/>
+                <a16:creationId xmlns:a16="http://schemas.microsoft.com/office/drawing/2014/main" id="{ABE31B73-424C-4420-9850-75DED89166AC}"/>
               </a:ext>
             </a:extLst>
           </p:cNvPr>
@@ -5522,7 +5554,7 @@
             <a:avLst/>
           </a:prstGeom>
           <a:solidFill xmlns:a="http://schemas.openxmlformats.org/drawingml/2006/main">
-            <a:srgbClr val="FF7C70"/>
+            <a:srgbClr val="52677D"/>
           </a:solidFill>
           <a:ln xmlns:a="http://schemas.openxmlformats.org/drawingml/2006/main" w="0">
             <a:noFill/>
@@ -5534,7 +5566,7 @@
           <p:cNvPr id="10" name="">
             <a:extLst xmlns:a="http://schemas.openxmlformats.org/drawingml/2006/main">
               <a:ext uri="{FF2B5EF4-FFF2-40B4-BE49-F238E27FC236}">
-                <a16:creationId xmlns:a16="http://schemas.microsoft.com/office/drawing/2014/main" id="{9353D825-CDC6-4885-A440-037184B696B4}"/>
+                <a16:creationId xmlns:a16="http://schemas.microsoft.com/office/drawing/2014/main" id="{B9554DC0-A941-4488-99EF-453277180527}"/>
               </a:ext>
             </a:extLst>
           </p:cNvPr>
@@ -5591,7 +5623,7 @@
           <p:cNvPr id="11" name="">
             <a:extLst xmlns:a="http://schemas.openxmlformats.org/drawingml/2006/main">
               <a:ext uri="{FF2B5EF4-FFF2-40B4-BE49-F238E27FC236}">
-                <a16:creationId xmlns:a16="http://schemas.microsoft.com/office/drawing/2014/main" id="{3DBFB780-B988-4E4C-AF9D-6927B1833284}"/>
+                <a16:creationId xmlns:a16="http://schemas.microsoft.com/office/drawing/2014/main" id="{2CC4B07B-6365-42D3-81CD-C09322ED060A}"/>
               </a:ext>
             </a:extLst>
           </p:cNvPr>
@@ -5622,7 +5654,7 @@
             <a:pPr algn="ctr">
               <a:defRPr sz="1350" b="1">
                 <a:solidFill>
-                  <a:srgbClr val="FF7C70"/>
+                  <a:srgbClr val="52677D"/>
                 </a:solidFill>
                 <a:latin typeface="Helvetica Neue"/>
                 <a:ea typeface="Helvetica Neue"/>
@@ -5632,7 +5664,7 @@
             <a:r>
               <a:rPr sz="1350" b="1">
                 <a:solidFill>
-                  <a:srgbClr val="FF7C70"/>
+                  <a:srgbClr val="52677D"/>
                 </a:solidFill>
                 <a:latin typeface="Helvetica Neue"/>
                 <a:ea typeface="Helvetica Neue"/>
@@ -5648,7 +5680,7 @@
           <p:cNvPr id="12" name="">
             <a:extLst xmlns:a="http://schemas.openxmlformats.org/drawingml/2006/main">
               <a:ext uri="{FF2B5EF4-FFF2-40B4-BE49-F238E27FC236}">
-                <a16:creationId xmlns:a16="http://schemas.microsoft.com/office/drawing/2014/main" id="{01696152-8656-477F-A57D-D874878B1A4E}"/>
+                <a16:creationId xmlns:a16="http://schemas.microsoft.com/office/drawing/2014/main" id="{2670187D-BE67-488A-918C-B625708FF23A}"/>
               </a:ext>
             </a:extLst>
           </p:cNvPr>
@@ -5679,7 +5711,7 @@
             <a:pPr algn="ctr">
               <a:defRPr sz="1275" b="0">
                 <a:solidFill>
-                  <a:srgbClr val="61718A"/>
+                  <a:srgbClr val="52677D"/>
                 </a:solidFill>
                 <a:latin typeface="Helvetica Neue"/>
                 <a:ea typeface="Helvetica Neue"/>
@@ -5689,7 +5721,7 @@
             <a:r>
               <a:rPr sz="1275" b="0">
                 <a:solidFill>
-                  <a:srgbClr val="61718A"/>
+                  <a:srgbClr val="52677D"/>
                 </a:solidFill>
                 <a:latin typeface="Helvetica Neue"/>
                 <a:ea typeface="Helvetica Neue"/>
@@ -5705,7 +5737,7 @@
           <p:cNvPr id="13" name="">
             <a:extLst xmlns:a="http://schemas.openxmlformats.org/drawingml/2006/main">
               <a:ext uri="{FF2B5EF4-FFF2-40B4-BE49-F238E27FC236}">
-                <a16:creationId xmlns:a16="http://schemas.microsoft.com/office/drawing/2014/main" id="{3E42AF84-C02C-43EF-852C-A0DF8B7D2E96}"/>
+                <a16:creationId xmlns:a16="http://schemas.microsoft.com/office/drawing/2014/main" id="{5C1E8165-72D4-46A4-9625-D14305095789}"/>
               </a:ext>
             </a:extLst>
           </p:cNvPr>
@@ -5723,7 +5755,7 @@
             <a:avLst/>
           </a:prstGeom>
           <a:solidFill xmlns:a="http://schemas.openxmlformats.org/drawingml/2006/main">
-            <a:srgbClr val="092454"/>
+            <a:srgbClr val="1C2E4A"/>
           </a:solidFill>
           <a:ln xmlns:a="http://schemas.openxmlformats.org/drawingml/2006/main" w="0">
             <a:noFill/>
@@ -5735,7 +5767,7 @@
           <p:cNvPr id="14" name="">
             <a:extLst xmlns:a="http://schemas.openxmlformats.org/drawingml/2006/main">
               <a:ext uri="{FF2B5EF4-FFF2-40B4-BE49-F238E27FC236}">
-                <a16:creationId xmlns:a16="http://schemas.microsoft.com/office/drawing/2014/main" id="{7157A186-148A-41F3-AE40-C37B66822533}"/>
+                <a16:creationId xmlns:a16="http://schemas.microsoft.com/office/drawing/2014/main" id="{CD8B5AB5-DFCC-42D4-BD28-2E177DB4923B}"/>
               </a:ext>
             </a:extLst>
           </p:cNvPr>
@@ -5792,7 +5824,7 @@
           <p:cNvPr id="15" name="">
             <a:extLst xmlns:a="http://schemas.openxmlformats.org/drawingml/2006/main">
               <a:ext uri="{FF2B5EF4-FFF2-40B4-BE49-F238E27FC236}">
-                <a16:creationId xmlns:a16="http://schemas.microsoft.com/office/drawing/2014/main" id="{918B5DA7-3CA7-4AE6-A142-E246ACB3E45F}"/>
+                <a16:creationId xmlns:a16="http://schemas.microsoft.com/office/drawing/2014/main" id="{845EB013-7555-47ED-82BA-7CD54115B1AC}"/>
               </a:ext>
             </a:extLst>
           </p:cNvPr>
@@ -5823,7 +5855,7 @@
             <a:pPr algn="ctr">
               <a:defRPr sz="1350" b="1">
                 <a:solidFill>
-                  <a:srgbClr val="092454"/>
+                  <a:srgbClr val="1C2E4A"/>
                 </a:solidFill>
                 <a:latin typeface="Helvetica Neue"/>
                 <a:ea typeface="Helvetica Neue"/>
@@ -5833,7 +5865,7 @@
             <a:r>
               <a:rPr sz="1350" b="1">
                 <a:solidFill>
-                  <a:srgbClr val="092454"/>
+                  <a:srgbClr val="1C2E4A"/>
                 </a:solidFill>
                 <a:latin typeface="Helvetica Neue"/>
                 <a:ea typeface="Helvetica Neue"/>
@@ -5849,7 +5881,7 @@
           <p:cNvPr id="16" name="">
             <a:extLst xmlns:a="http://schemas.openxmlformats.org/drawingml/2006/main">
               <a:ext uri="{FF2B5EF4-FFF2-40B4-BE49-F238E27FC236}">
-                <a16:creationId xmlns:a16="http://schemas.microsoft.com/office/drawing/2014/main" id="{6E1B5DDE-B348-439B-9490-4AEF3A4B6144}"/>
+                <a16:creationId xmlns:a16="http://schemas.microsoft.com/office/drawing/2014/main" id="{6A64A4AA-E49F-4174-8536-BCF784709D6D}"/>
               </a:ext>
             </a:extLst>
           </p:cNvPr>
@@ -5880,7 +5912,7 @@
             <a:pPr algn="ctr">
               <a:defRPr sz="1275" b="0">
                 <a:solidFill>
-                  <a:srgbClr val="61718A"/>
+                  <a:srgbClr val="52677D"/>
                 </a:solidFill>
                 <a:latin typeface="Helvetica Neue"/>
                 <a:ea typeface="Helvetica Neue"/>
@@ -5890,7 +5922,7 @@
             <a:r>
               <a:rPr sz="1275" b="0">
                 <a:solidFill>
-                  <a:srgbClr val="61718A"/>
+                  <a:srgbClr val="52677D"/>
                 </a:solidFill>
                 <a:latin typeface="Helvetica Neue"/>
                 <a:ea typeface="Helvetica Neue"/>
@@ -5906,7 +5938,7 @@
           <p:cNvPr id="17" name="">
             <a:extLst xmlns:a="http://schemas.openxmlformats.org/drawingml/2006/main">
               <a:ext uri="{FF2B5EF4-FFF2-40B4-BE49-F238E27FC236}">
-                <a16:creationId xmlns:a16="http://schemas.microsoft.com/office/drawing/2014/main" id="{3F354AA0-18A8-45C0-829D-C2CE20153033}"/>
+                <a16:creationId xmlns:a16="http://schemas.microsoft.com/office/drawing/2014/main" id="{12EDE1C8-F15D-4A24-9A86-B5490210E042}"/>
               </a:ext>
             </a:extLst>
           </p:cNvPr>
@@ -5924,7 +5956,7 @@
             <a:avLst/>
           </a:prstGeom>
           <a:solidFill xmlns:a="http://schemas.openxmlformats.org/drawingml/2006/main">
-            <a:srgbClr val="00A7A0"/>
+            <a:srgbClr val="52677D"/>
           </a:solidFill>
           <a:ln xmlns:a="http://schemas.openxmlformats.org/drawingml/2006/main" w="0">
             <a:noFill/>
@@ -5936,7 +5968,7 @@
           <p:cNvPr id="18" name="">
             <a:extLst xmlns:a="http://schemas.openxmlformats.org/drawingml/2006/main">
               <a:ext uri="{FF2B5EF4-FFF2-40B4-BE49-F238E27FC236}">
-                <a16:creationId xmlns:a16="http://schemas.microsoft.com/office/drawing/2014/main" id="{FD3B6720-64D8-472A-A082-23A7265DC01A}"/>
+                <a16:creationId xmlns:a16="http://schemas.microsoft.com/office/drawing/2014/main" id="{2E3FD7BD-5AFF-4DBC-B662-143853A8FF1D}"/>
               </a:ext>
             </a:extLst>
           </p:cNvPr>
@@ -5993,7 +6025,7 @@
           <p:cNvPr id="19" name="">
             <a:extLst xmlns:a="http://schemas.openxmlformats.org/drawingml/2006/main">
               <a:ext uri="{FF2B5EF4-FFF2-40B4-BE49-F238E27FC236}">
-                <a16:creationId xmlns:a16="http://schemas.microsoft.com/office/drawing/2014/main" id="{B92E5188-2C46-49FF-96C9-984E5688C104}"/>
+                <a16:creationId xmlns:a16="http://schemas.microsoft.com/office/drawing/2014/main" id="{B23027F2-6200-44BB-9419-E133A386DB53}"/>
               </a:ext>
             </a:extLst>
           </p:cNvPr>
@@ -6024,7 +6056,7 @@
             <a:pPr algn="ctr">
               <a:defRPr sz="1350" b="1">
                 <a:solidFill>
-                  <a:srgbClr val="00A7A0"/>
+                  <a:srgbClr val="52677D"/>
                 </a:solidFill>
                 <a:latin typeface="Helvetica Neue"/>
                 <a:ea typeface="Helvetica Neue"/>
@@ -6034,7 +6066,7 @@
             <a:r>
               <a:rPr sz="1350" b="1">
                 <a:solidFill>
-                  <a:srgbClr val="00A7A0"/>
+                  <a:srgbClr val="52677D"/>
                 </a:solidFill>
                 <a:latin typeface="Helvetica Neue"/>
                 <a:ea typeface="Helvetica Neue"/>
@@ -6050,7 +6082,7 @@
           <p:cNvPr id="20" name="">
             <a:extLst xmlns:a="http://schemas.openxmlformats.org/drawingml/2006/main">
               <a:ext uri="{FF2B5EF4-FFF2-40B4-BE49-F238E27FC236}">
-                <a16:creationId xmlns:a16="http://schemas.microsoft.com/office/drawing/2014/main" id="{ADFB589C-DE41-4F73-9734-460C79431831}"/>
+                <a16:creationId xmlns:a16="http://schemas.microsoft.com/office/drawing/2014/main" id="{C6B1CEE8-B605-483F-AA8D-525329CE5ABB}"/>
               </a:ext>
             </a:extLst>
           </p:cNvPr>
@@ -6081,7 +6113,7 @@
             <a:pPr algn="ctr">
               <a:defRPr sz="1275" b="0">
                 <a:solidFill>
-                  <a:srgbClr val="61718A"/>
+                  <a:srgbClr val="52677D"/>
                 </a:solidFill>
                 <a:latin typeface="Helvetica Neue"/>
                 <a:ea typeface="Helvetica Neue"/>
@@ -6091,7 +6123,7 @@
             <a:r>
               <a:rPr sz="1275" b="0">
                 <a:solidFill>
-                  <a:srgbClr val="61718A"/>
+                  <a:srgbClr val="52677D"/>
                 </a:solidFill>
                 <a:latin typeface="Helvetica Neue"/>
                 <a:ea typeface="Helvetica Neue"/>
@@ -6107,7 +6139,7 @@
           <p:cNvPr id="21" name="">
             <a:extLst xmlns:a="http://schemas.openxmlformats.org/drawingml/2006/main">
               <a:ext uri="{FF2B5EF4-FFF2-40B4-BE49-F238E27FC236}">
-                <a16:creationId xmlns:a16="http://schemas.microsoft.com/office/drawing/2014/main" id="{504FF5A3-9801-40C0-A11F-D91D97C3961D}"/>
+                <a16:creationId xmlns:a16="http://schemas.microsoft.com/office/drawing/2014/main" id="{A60589D5-494F-4691-A90C-B74E5C603AC5}"/>
               </a:ext>
             </a:extLst>
           </p:cNvPr>
@@ -6125,7 +6157,7 @@
             <a:avLst/>
           </a:prstGeom>
           <a:solidFill xmlns:a="http://schemas.openxmlformats.org/drawingml/2006/main">
-            <a:srgbClr val="D8E5F2"/>
+            <a:srgbClr val="BDC4D4"/>
           </a:solidFill>
           <a:ln xmlns:a="http://schemas.openxmlformats.org/drawingml/2006/main" w="0">
             <a:noFill/>
@@ -6137,7 +6169,7 @@
           <p:cNvPr id="22" name="">
             <a:extLst xmlns:a="http://schemas.openxmlformats.org/drawingml/2006/main">
               <a:ext uri="{FF2B5EF4-FFF2-40B4-BE49-F238E27FC236}">
-                <a16:creationId xmlns:a16="http://schemas.microsoft.com/office/drawing/2014/main" id="{8E5F4B94-5341-4155-85C4-182BE6788CEF}"/>
+                <a16:creationId xmlns:a16="http://schemas.microsoft.com/office/drawing/2014/main" id="{25034C87-FFE4-4DA0-BBBF-6DF182188322}"/>
               </a:ext>
             </a:extLst>
           </p:cNvPr>
@@ -6168,7 +6200,7 @@
             <a:pPr algn="l">
               <a:defRPr sz="750" b="0">
                 <a:solidFill>
-                  <a:srgbClr val="61718A"/>
+                  <a:srgbClr val="52677D"/>
                 </a:solidFill>
                 <a:latin typeface="Helvetica Neue"/>
                 <a:ea typeface="Helvetica Neue"/>
@@ -6178,7 +6210,7 @@
             <a:r>
               <a:rPr sz="750" b="0">
                 <a:solidFill>
-                  <a:srgbClr val="61718A"/>
+                  <a:srgbClr val="52677D"/>
                 </a:solidFill>
                 <a:latin typeface="Helvetica Neue"/>
                 <a:ea typeface="Helvetica Neue"/>
@@ -6194,7 +6226,7 @@
           <p:cNvPr id="23" name="">
             <a:extLst xmlns:a="http://schemas.openxmlformats.org/drawingml/2006/main">
               <a:ext uri="{FF2B5EF4-FFF2-40B4-BE49-F238E27FC236}">
-                <a16:creationId xmlns:a16="http://schemas.microsoft.com/office/drawing/2014/main" id="{F7044386-06B1-419D-8F9E-DA9409101656}"/>
+                <a16:creationId xmlns:a16="http://schemas.microsoft.com/office/drawing/2014/main" id="{90213DB8-3B23-401F-8297-9C80D17F10ED}"/>
               </a:ext>
             </a:extLst>
           </p:cNvPr>
@@ -6225,7 +6257,7 @@
             <a:pPr algn="r">
               <a:defRPr sz="825" b="1">
                 <a:solidFill>
-                  <a:srgbClr val="2563EB"/>
+                  <a:srgbClr val="52677D"/>
                 </a:solidFill>
                 <a:latin typeface="Helvetica Neue"/>
                 <a:ea typeface="Helvetica Neue"/>
@@ -6235,7 +6267,7 @@
             <a:r>
               <a:rPr sz="825" b="1">
                 <a:solidFill>
-                  <a:srgbClr val="2563EB"/>
+                  <a:srgbClr val="52677D"/>
                 </a:solidFill>
                 <a:latin typeface="Helvetica Neue"/>
                 <a:ea typeface="Helvetica Neue"/>
@@ -6249,7 +6281,7 @@
     </p:spTree>
     <p:extLst>
       <p:ext uri="{BB962C8B-B14F-4D97-AF65-F5344CB8AC3E}">
-        <p14:creationId xmlns:p14="http://schemas.microsoft.com/office/powerpoint/2010/main" val="281890980"/>
+        <p14:creationId xmlns:p14="http://schemas.microsoft.com/office/powerpoint/2010/main" val="411977804"/>
       </p:ext>
     </p:extLst>
   </p:cSld>
@@ -6280,7 +6312,7 @@
           <p:cNvPr id="24" name="">
             <a:extLst xmlns:a="http://schemas.openxmlformats.org/drawingml/2006/main">
               <a:ext uri="{FF2B5EF4-FFF2-40B4-BE49-F238E27FC236}">
-                <a16:creationId xmlns:a16="http://schemas.microsoft.com/office/drawing/2014/main" id="{9122CC45-C410-4B2E-85DD-3A6F833C10C3}"/>
+                <a16:creationId xmlns:a16="http://schemas.microsoft.com/office/drawing/2014/main" id="{92284EC8-12F1-4C70-AA1B-5B5CEB85DED6}"/>
               </a:ext>
             </a:extLst>
           </p:cNvPr>
@@ -6298,7 +6330,7 @@
             <a:avLst/>
           </a:prstGeom>
           <a:solidFill xmlns:a="http://schemas.openxmlformats.org/drawingml/2006/main">
-            <a:srgbClr val="2563EB"/>
+            <a:srgbClr val="1C2E4A"/>
           </a:solidFill>
           <a:ln xmlns:a="http://schemas.openxmlformats.org/drawingml/2006/main" w="0">
             <a:noFill/>
@@ -6310,7 +6342,7 @@
           <p:cNvPr id="2" name="">
             <a:extLst xmlns:a="http://schemas.openxmlformats.org/drawingml/2006/main">
               <a:ext uri="{FF2B5EF4-FFF2-40B4-BE49-F238E27FC236}">
-                <a16:creationId xmlns:a16="http://schemas.microsoft.com/office/drawing/2014/main" id="{9266815B-7292-4FD5-9EA8-F479D044E70B}"/>
+                <a16:creationId xmlns:a16="http://schemas.microsoft.com/office/drawing/2014/main" id="{0C78402F-0C0B-4B6A-97A3-4D82E33888B5}"/>
               </a:ext>
             </a:extLst>
           </p:cNvPr>
@@ -6341,7 +6373,7 @@
             <a:pPr algn="l">
               <a:defRPr sz="1125" b="1">
                 <a:solidFill>
-                  <a:srgbClr val="2563EB"/>
+                  <a:srgbClr val="52677D"/>
                 </a:solidFill>
                 <a:latin typeface="Helvetica Neue"/>
                 <a:ea typeface="Helvetica Neue"/>
@@ -6351,7 +6383,7 @@
             <a:r>
               <a:rPr sz="1125" b="1">
                 <a:solidFill>
-                  <a:srgbClr val="2563EB"/>
+                  <a:srgbClr val="52677D"/>
                 </a:solidFill>
                 <a:latin typeface="Helvetica Neue"/>
                 <a:ea typeface="Helvetica Neue"/>
@@ -6367,7 +6399,7 @@
           <p:cNvPr id="3" name="">
             <a:extLst xmlns:a="http://schemas.openxmlformats.org/drawingml/2006/main">
               <a:ext uri="{FF2B5EF4-FFF2-40B4-BE49-F238E27FC236}">
-                <a16:creationId xmlns:a16="http://schemas.microsoft.com/office/drawing/2014/main" id="{04D542A3-41B2-4A2F-9930-EC0FCACD0084}"/>
+                <a16:creationId xmlns:a16="http://schemas.microsoft.com/office/drawing/2014/main" id="{232255E0-5FD9-4A8A-8DCC-1763494E613D}"/>
               </a:ext>
             </a:extLst>
           </p:cNvPr>
@@ -6387,7 +6419,7 @@
             </a:avLst>
           </a:prstGeom>
           <a:solidFill xmlns:a="http://schemas.openxmlformats.org/drawingml/2006/main">
-            <a:srgbClr val="FFD43B"/>
+            <a:srgbClr val="D1CFC9"/>
           </a:solidFill>
           <a:ln xmlns:a="http://schemas.openxmlformats.org/drawingml/2006/main" w="0">
             <a:noFill/>
@@ -6399,7 +6431,7 @@
           <p:cNvPr id="4" name="">
             <a:extLst xmlns:a="http://schemas.openxmlformats.org/drawingml/2006/main">
               <a:ext uri="{FF2B5EF4-FFF2-40B4-BE49-F238E27FC236}">
-                <a16:creationId xmlns:a16="http://schemas.microsoft.com/office/drawing/2014/main" id="{BDA97D66-ACBB-4479-B080-1AA9B33E32CA}"/>
+                <a16:creationId xmlns:a16="http://schemas.microsoft.com/office/drawing/2014/main" id="{1D66FD09-D76C-4CD0-8F58-D3EEF169F828}"/>
               </a:ext>
             </a:extLst>
           </p:cNvPr>
@@ -6430,7 +6462,7 @@
             <a:pPr algn="ctr">
               <a:defRPr sz="1275" b="1">
                 <a:solidFill>
-                  <a:srgbClr val="092454"/>
+                  <a:srgbClr val="1C2E4A"/>
                 </a:solidFill>
                 <a:latin typeface="Helvetica Neue"/>
                 <a:ea typeface="Helvetica Neue"/>
@@ -6440,7 +6472,7 @@
             <a:r>
               <a:rPr sz="1275" b="1">
                 <a:solidFill>
-                  <a:srgbClr val="092454"/>
+                  <a:srgbClr val="1C2E4A"/>
                 </a:solidFill>
                 <a:latin typeface="Helvetica Neue"/>
                 <a:ea typeface="Helvetica Neue"/>
@@ -6456,7 +6488,7 @@
           <p:cNvPr id="5" name="">
             <a:extLst xmlns:a="http://schemas.openxmlformats.org/drawingml/2006/main">
               <a:ext uri="{FF2B5EF4-FFF2-40B4-BE49-F238E27FC236}">
-                <a16:creationId xmlns:a16="http://schemas.microsoft.com/office/drawing/2014/main" id="{D351930B-799E-4292-A7DA-D592F02E5625}"/>
+                <a16:creationId xmlns:a16="http://schemas.microsoft.com/office/drawing/2014/main" id="{45928C54-18C6-43A4-8ADD-CE112F75907F}"/>
               </a:ext>
             </a:extLst>
           </p:cNvPr>
@@ -6487,7 +6519,7 @@
             <a:pPr algn="l">
               <a:defRPr sz="2550" b="1">
                 <a:solidFill>
-                  <a:srgbClr val="092454"/>
+                  <a:srgbClr val="1C2E4A"/>
                 </a:solidFill>
                 <a:latin typeface="Helvetica Neue"/>
                 <a:ea typeface="Helvetica Neue"/>
@@ -6497,7 +6529,7 @@
             <a:r>
               <a:rPr sz="2550" b="1">
                 <a:solidFill>
-                  <a:srgbClr val="092454"/>
+                  <a:srgbClr val="1C2E4A"/>
                 </a:solidFill>
                 <a:latin typeface="Helvetica Neue"/>
                 <a:ea typeface="Helvetica Neue"/>
@@ -6513,7 +6545,7 @@
           <p:cNvPr id="6" name="">
             <a:extLst xmlns:a="http://schemas.openxmlformats.org/drawingml/2006/main">
               <a:ext uri="{FF2B5EF4-FFF2-40B4-BE49-F238E27FC236}">
-                <a16:creationId xmlns:a16="http://schemas.microsoft.com/office/drawing/2014/main" id="{5A18B416-DD72-4F38-B482-3DC9215F62FB}"/>
+                <a16:creationId xmlns:a16="http://schemas.microsoft.com/office/drawing/2014/main" id="{04882EF1-BD71-45EE-8C95-8D0B9CC28CC4}"/>
               </a:ext>
             </a:extLst>
           </p:cNvPr>
@@ -6533,7 +6565,7 @@
             </a:avLst>
           </a:prstGeom>
           <a:solidFill xmlns:a="http://schemas.openxmlformats.org/drawingml/2006/main">
-            <a:srgbClr val="EEF7FF"/>
+            <a:srgbClr val="D1CFC9"/>
           </a:solidFill>
           <a:ln xmlns:a="http://schemas.openxmlformats.org/drawingml/2006/main" w="0">
             <a:noFill/>
@@ -6545,7 +6577,7 @@
           <p:cNvPr id="7" name="">
             <a:extLst xmlns:a="http://schemas.openxmlformats.org/drawingml/2006/main">
               <a:ext uri="{FF2B5EF4-FFF2-40B4-BE49-F238E27FC236}">
-                <a16:creationId xmlns:a16="http://schemas.microsoft.com/office/drawing/2014/main" id="{785EA097-E14A-43FA-B29A-FBA0495B352D}"/>
+                <a16:creationId xmlns:a16="http://schemas.microsoft.com/office/drawing/2014/main" id="{756F99F8-1F24-4DD2-8154-E6646E8A0CFC}"/>
               </a:ext>
             </a:extLst>
           </p:cNvPr>
@@ -6576,7 +6608,7 @@
             <a:pPr algn="ctr">
               <a:defRPr sz="1350" b="1">
                 <a:solidFill>
-                  <a:srgbClr val="2563EB"/>
+                  <a:srgbClr val="52677D"/>
                 </a:solidFill>
                 <a:latin typeface="Helvetica Neue"/>
                 <a:ea typeface="Helvetica Neue"/>
@@ -6586,7 +6618,7 @@
             <a:r>
               <a:rPr sz="1350" b="1">
                 <a:solidFill>
-                  <a:srgbClr val="2563EB"/>
+                  <a:srgbClr val="52677D"/>
                 </a:solidFill>
                 <a:latin typeface="Helvetica Neue"/>
                 <a:ea typeface="Helvetica Neue"/>
@@ -6602,7 +6634,7 @@
           <p:cNvPr id="8" name="">
             <a:extLst xmlns:a="http://schemas.openxmlformats.org/drawingml/2006/main">
               <a:ext uri="{FF2B5EF4-FFF2-40B4-BE49-F238E27FC236}">
-                <a16:creationId xmlns:a16="http://schemas.microsoft.com/office/drawing/2014/main" id="{69308079-F4D7-4167-81CE-E6F53D6B32F4}"/>
+                <a16:creationId xmlns:a16="http://schemas.microsoft.com/office/drawing/2014/main" id="{DA89E35E-64A6-452F-9E65-E4FB682019E3}"/>
               </a:ext>
             </a:extLst>
           </p:cNvPr>
@@ -6633,7 +6665,7 @@
             <a:pPr algn="l">
               <a:defRPr sz="1575" b="0">
                 <a:solidFill>
-                  <a:srgbClr val="10213D"/>
+                  <a:srgbClr val="0F1A2B"/>
                 </a:solidFill>
                 <a:latin typeface="Helvetica Neue"/>
                 <a:ea typeface="Helvetica Neue"/>
@@ -6643,7 +6675,7 @@
             <a:r>
               <a:rPr sz="1575" b="0">
                 <a:solidFill>
-                  <a:srgbClr val="10213D"/>
+                  <a:srgbClr val="0F1A2B"/>
                 </a:solidFill>
                 <a:latin typeface="Helvetica Neue"/>
                 <a:ea typeface="Helvetica Neue"/>
@@ -6659,7 +6691,7 @@
           <p:cNvPr id="9" name="">
             <a:extLst xmlns:a="http://schemas.openxmlformats.org/drawingml/2006/main">
               <a:ext uri="{FF2B5EF4-FFF2-40B4-BE49-F238E27FC236}">
-                <a16:creationId xmlns:a16="http://schemas.microsoft.com/office/drawing/2014/main" id="{AFFA1634-F2F2-425C-ACE6-8A990B814936}"/>
+                <a16:creationId xmlns:a16="http://schemas.microsoft.com/office/drawing/2014/main" id="{6D4FB19C-F1D1-49EF-98DB-538A238657BD}"/>
               </a:ext>
             </a:extLst>
           </p:cNvPr>
@@ -6679,7 +6711,7 @@
             </a:avLst>
           </a:prstGeom>
           <a:solidFill xmlns:a="http://schemas.openxmlformats.org/drawingml/2006/main">
-            <a:srgbClr val="EEF7FF"/>
+            <a:srgbClr val="D1CFC9"/>
           </a:solidFill>
           <a:ln xmlns:a="http://schemas.openxmlformats.org/drawingml/2006/main" w="0">
             <a:noFill/>
@@ -6691,7 +6723,7 @@
           <p:cNvPr id="10" name="">
             <a:extLst xmlns:a="http://schemas.openxmlformats.org/drawingml/2006/main">
               <a:ext uri="{FF2B5EF4-FFF2-40B4-BE49-F238E27FC236}">
-                <a16:creationId xmlns:a16="http://schemas.microsoft.com/office/drawing/2014/main" id="{E74E0BF2-B96C-4466-8F69-7E2294F5215E}"/>
+                <a16:creationId xmlns:a16="http://schemas.microsoft.com/office/drawing/2014/main" id="{D5168467-CFC8-4CF0-B97F-E3F7B7DA6D64}"/>
               </a:ext>
             </a:extLst>
           </p:cNvPr>
@@ -6722,7 +6754,7 @@
             <a:pPr algn="ctr">
               <a:defRPr sz="1350" b="1">
                 <a:solidFill>
-                  <a:srgbClr val="2563EB"/>
+                  <a:srgbClr val="52677D"/>
                 </a:solidFill>
                 <a:latin typeface="Helvetica Neue"/>
                 <a:ea typeface="Helvetica Neue"/>
@@ -6732,7 +6764,7 @@
             <a:r>
               <a:rPr sz="1350" b="1">
                 <a:solidFill>
-                  <a:srgbClr val="2563EB"/>
+                  <a:srgbClr val="52677D"/>
                 </a:solidFill>
                 <a:latin typeface="Helvetica Neue"/>
                 <a:ea typeface="Helvetica Neue"/>
@@ -6748,7 +6780,7 @@
           <p:cNvPr id="11" name="">
             <a:extLst xmlns:a="http://schemas.openxmlformats.org/drawingml/2006/main">
               <a:ext uri="{FF2B5EF4-FFF2-40B4-BE49-F238E27FC236}">
-                <a16:creationId xmlns:a16="http://schemas.microsoft.com/office/drawing/2014/main" id="{57B3AE1D-1C85-4BE6-8E05-746BAECD93B3}"/>
+                <a16:creationId xmlns:a16="http://schemas.microsoft.com/office/drawing/2014/main" id="{39C13BC5-6152-4235-98AF-8350AE33F599}"/>
               </a:ext>
             </a:extLst>
           </p:cNvPr>
@@ -6779,7 +6811,7 @@
             <a:pPr algn="l">
               <a:defRPr sz="1575" b="0">
                 <a:solidFill>
-                  <a:srgbClr val="10213D"/>
+                  <a:srgbClr val="0F1A2B"/>
                 </a:solidFill>
                 <a:latin typeface="Helvetica Neue"/>
                 <a:ea typeface="Helvetica Neue"/>
@@ -6789,7 +6821,7 @@
             <a:r>
               <a:rPr sz="1575" b="0">
                 <a:solidFill>
-                  <a:srgbClr val="10213D"/>
+                  <a:srgbClr val="0F1A2B"/>
                 </a:solidFill>
                 <a:latin typeface="Helvetica Neue"/>
                 <a:ea typeface="Helvetica Neue"/>
@@ -6805,7 +6837,7 @@
           <p:cNvPr id="12" name="">
             <a:extLst xmlns:a="http://schemas.openxmlformats.org/drawingml/2006/main">
               <a:ext uri="{FF2B5EF4-FFF2-40B4-BE49-F238E27FC236}">
-                <a16:creationId xmlns:a16="http://schemas.microsoft.com/office/drawing/2014/main" id="{EA1A4282-5EFE-40BE-A8D4-EC519D390584}"/>
+                <a16:creationId xmlns:a16="http://schemas.microsoft.com/office/drawing/2014/main" id="{07867AC2-7942-40B4-9480-8683B38D9824}"/>
               </a:ext>
             </a:extLst>
           </p:cNvPr>
@@ -6825,7 +6857,7 @@
             </a:avLst>
           </a:prstGeom>
           <a:solidFill xmlns:a="http://schemas.openxmlformats.org/drawingml/2006/main">
-            <a:srgbClr val="EEF7FF"/>
+            <a:srgbClr val="D1CFC9"/>
           </a:solidFill>
           <a:ln xmlns:a="http://schemas.openxmlformats.org/drawingml/2006/main" w="0">
             <a:noFill/>
@@ -6837,7 +6869,7 @@
           <p:cNvPr id="13" name="">
             <a:extLst xmlns:a="http://schemas.openxmlformats.org/drawingml/2006/main">
               <a:ext uri="{FF2B5EF4-FFF2-40B4-BE49-F238E27FC236}">
-                <a16:creationId xmlns:a16="http://schemas.microsoft.com/office/drawing/2014/main" id="{3C85E4BA-B7DF-4026-A07E-43ADBB042F96}"/>
+                <a16:creationId xmlns:a16="http://schemas.microsoft.com/office/drawing/2014/main" id="{2187A35C-B557-4358-BB95-0360BD0F429A}"/>
               </a:ext>
             </a:extLst>
           </p:cNvPr>
@@ -6868,7 +6900,7 @@
             <a:pPr algn="ctr">
               <a:defRPr sz="1350" b="1">
                 <a:solidFill>
-                  <a:srgbClr val="2563EB"/>
+                  <a:srgbClr val="52677D"/>
                 </a:solidFill>
                 <a:latin typeface="Helvetica Neue"/>
                 <a:ea typeface="Helvetica Neue"/>
@@ -6878,7 +6910,7 @@
             <a:r>
               <a:rPr sz="1350" b="1">
                 <a:solidFill>
-                  <a:srgbClr val="2563EB"/>
+                  <a:srgbClr val="52677D"/>
                 </a:solidFill>
                 <a:latin typeface="Helvetica Neue"/>
                 <a:ea typeface="Helvetica Neue"/>
@@ -6894,7 +6926,7 @@
           <p:cNvPr id="14" name="">
             <a:extLst xmlns:a="http://schemas.openxmlformats.org/drawingml/2006/main">
               <a:ext uri="{FF2B5EF4-FFF2-40B4-BE49-F238E27FC236}">
-                <a16:creationId xmlns:a16="http://schemas.microsoft.com/office/drawing/2014/main" id="{14C3C257-53FA-461E-AD2C-C6D142DE4D26}"/>
+                <a16:creationId xmlns:a16="http://schemas.microsoft.com/office/drawing/2014/main" id="{A7F6FE83-27D8-4A66-89A3-0F7905ED88C3}"/>
               </a:ext>
             </a:extLst>
           </p:cNvPr>
@@ -6925,7 +6957,7 @@
             <a:pPr algn="l">
               <a:defRPr sz="1575" b="0">
                 <a:solidFill>
-                  <a:srgbClr val="10213D"/>
+                  <a:srgbClr val="0F1A2B"/>
                 </a:solidFill>
                 <a:latin typeface="Helvetica Neue"/>
                 <a:ea typeface="Helvetica Neue"/>
@@ -6935,7 +6967,7 @@
             <a:r>
               <a:rPr sz="1575" b="0">
                 <a:solidFill>
-                  <a:srgbClr val="10213D"/>
+                  <a:srgbClr val="0F1A2B"/>
                 </a:solidFill>
                 <a:latin typeface="Helvetica Neue"/>
                 <a:ea typeface="Helvetica Neue"/>
@@ -6951,7 +6983,7 @@
           <p:cNvPr id="15" name="">
             <a:extLst xmlns:a="http://schemas.openxmlformats.org/drawingml/2006/main">
               <a:ext uri="{FF2B5EF4-FFF2-40B4-BE49-F238E27FC236}">
-                <a16:creationId xmlns:a16="http://schemas.microsoft.com/office/drawing/2014/main" id="{1EE38307-1C49-4772-ACBF-A0FABA59DB4F}"/>
+                <a16:creationId xmlns:a16="http://schemas.microsoft.com/office/drawing/2014/main" id="{62C2B851-60E0-4586-BEDC-F0E1C985A6F6}"/>
               </a:ext>
             </a:extLst>
           </p:cNvPr>
@@ -6971,7 +7003,7 @@
             </a:avLst>
           </a:prstGeom>
           <a:solidFill xmlns:a="http://schemas.openxmlformats.org/drawingml/2006/main">
-            <a:srgbClr val="EEF7FF"/>
+            <a:srgbClr val="D1CFC9"/>
           </a:solidFill>
           <a:ln xmlns:a="http://schemas.openxmlformats.org/drawingml/2006/main" w="0">
             <a:noFill/>
@@ -6983,7 +7015,7 @@
           <p:cNvPr id="16" name="">
             <a:extLst xmlns:a="http://schemas.openxmlformats.org/drawingml/2006/main">
               <a:ext uri="{FF2B5EF4-FFF2-40B4-BE49-F238E27FC236}">
-                <a16:creationId xmlns:a16="http://schemas.microsoft.com/office/drawing/2014/main" id="{82D1CC63-16A0-44F0-A712-ED1A320583E5}"/>
+                <a16:creationId xmlns:a16="http://schemas.microsoft.com/office/drawing/2014/main" id="{749DCD32-5C25-4757-8516-C1AD56913145}"/>
               </a:ext>
             </a:extLst>
           </p:cNvPr>
@@ -7014,7 +7046,7 @@
             <a:pPr algn="l">
               <a:defRPr sz="1125" b="0">
                 <a:solidFill>
-                  <a:srgbClr val="092454"/>
+                  <a:srgbClr val="1C2E4A"/>
                 </a:solidFill>
                 <a:latin typeface="Helvetica Neue"/>
                 <a:ea typeface="Helvetica Neue"/>
@@ -7024,7 +7056,7 @@
             <a:r>
               <a:rPr sz="1125" b="0">
                 <a:solidFill>
-                  <a:srgbClr val="092454"/>
+                  <a:srgbClr val="1C2E4A"/>
                 </a:solidFill>
                 <a:latin typeface="Helvetica Neue"/>
                 <a:ea typeface="Helvetica Neue"/>
@@ -7040,7 +7072,7 @@
           <p:cNvPr id="17" name="">
             <a:extLst xmlns:a="http://schemas.openxmlformats.org/drawingml/2006/main">
               <a:ext uri="{FF2B5EF4-FFF2-40B4-BE49-F238E27FC236}">
-                <a16:creationId xmlns:a16="http://schemas.microsoft.com/office/drawing/2014/main" id="{3DB7C307-4275-4229-A326-56B40C6A988B}"/>
+                <a16:creationId xmlns:a16="http://schemas.microsoft.com/office/drawing/2014/main" id="{E6D1D4BE-3623-4A52-8607-C39BE8EDD25B}"/>
               </a:ext>
             </a:extLst>
           </p:cNvPr>
@@ -7060,7 +7092,7 @@
             </a:avLst>
           </a:prstGeom>
           <a:solidFill xmlns:a="http://schemas.openxmlformats.org/drawingml/2006/main">
-            <a:srgbClr val="092454"/>
+            <a:srgbClr val="1C2E4A"/>
           </a:solidFill>
           <a:ln xmlns:a="http://schemas.openxmlformats.org/drawingml/2006/main" w="0">
             <a:noFill/>
@@ -7072,7 +7104,7 @@
           <p:cNvPr id="18" name="">
             <a:extLst xmlns:a="http://schemas.openxmlformats.org/drawingml/2006/main">
               <a:ext uri="{FF2B5EF4-FFF2-40B4-BE49-F238E27FC236}">
-                <a16:creationId xmlns:a16="http://schemas.microsoft.com/office/drawing/2014/main" id="{30F5ADB4-F006-4624-8ED5-B7F313A16D2F}"/>
+                <a16:creationId xmlns:a16="http://schemas.microsoft.com/office/drawing/2014/main" id="{2D61ABF9-44AB-4A83-B73F-FE495B95E2CE}"/>
               </a:ext>
             </a:extLst>
           </p:cNvPr>
@@ -7103,7 +7135,7 @@
             <a:pPr algn="l">
               <a:defRPr sz="1050" b="1">
                 <a:solidFill>
-                  <a:srgbClr val="FFD43B"/>
+                  <a:srgbClr val="D1CFC9"/>
                 </a:solidFill>
                 <a:latin typeface="Helvetica Neue"/>
                 <a:ea typeface="Helvetica Neue"/>
@@ -7113,7 +7145,7 @@
             <a:r>
               <a:rPr sz="1050" b="1">
                 <a:solidFill>
-                  <a:srgbClr val="FFD43B"/>
+                  <a:srgbClr val="D1CFC9"/>
                 </a:solidFill>
                 <a:latin typeface="Helvetica Neue"/>
                 <a:ea typeface="Helvetica Neue"/>
@@ -7129,7 +7161,7 @@
           <p:cNvPr id="19" name="">
             <a:extLst xmlns:a="http://schemas.openxmlformats.org/drawingml/2006/main">
               <a:ext uri="{FF2B5EF4-FFF2-40B4-BE49-F238E27FC236}">
-                <a16:creationId xmlns:a16="http://schemas.microsoft.com/office/drawing/2014/main" id="{0A2EA6B0-B06A-4810-AE30-C5A128460C53}"/>
+                <a16:creationId xmlns:a16="http://schemas.microsoft.com/office/drawing/2014/main" id="{6055C87C-044A-4E04-9066-A9DCF2D39BAC}"/>
               </a:ext>
             </a:extLst>
           </p:cNvPr>
@@ -7186,7 +7218,7 @@
           <p:cNvPr id="20" name="">
             <a:extLst xmlns:a="http://schemas.openxmlformats.org/drawingml/2006/main">
               <a:ext uri="{FF2B5EF4-FFF2-40B4-BE49-F238E27FC236}">
-                <a16:creationId xmlns:a16="http://schemas.microsoft.com/office/drawing/2014/main" id="{BEC8682E-CAEE-4AFD-BC2D-80CD75189F5D}"/>
+                <a16:creationId xmlns:a16="http://schemas.microsoft.com/office/drawing/2014/main" id="{24E855AA-3027-437E-9A21-4DCE3FF8E794}"/>
               </a:ext>
             </a:extLst>
           </p:cNvPr>
@@ -7217,7 +7249,7 @@
             <a:pPr algn="l">
               <a:defRPr sz="1125" b="0">
                 <a:solidFill>
-                  <a:srgbClr val="BFE6FF"/>
+                  <a:srgbClr val="BDC4D4"/>
                 </a:solidFill>
                 <a:latin typeface="Helvetica Neue"/>
                 <a:ea typeface="Helvetica Neue"/>
@@ -7227,7 +7259,7 @@
             <a:r>
               <a:rPr sz="1125" b="0">
                 <a:solidFill>
-                  <a:srgbClr val="BFE6FF"/>
+                  <a:srgbClr val="BDC4D4"/>
                 </a:solidFill>
                 <a:latin typeface="Helvetica Neue"/>
                 <a:ea typeface="Helvetica Neue"/>
@@ -7243,7 +7275,7 @@
           <p:cNvPr id="21" name="">
             <a:extLst xmlns:a="http://schemas.openxmlformats.org/drawingml/2006/main">
               <a:ext uri="{FF2B5EF4-FFF2-40B4-BE49-F238E27FC236}">
-                <a16:creationId xmlns:a16="http://schemas.microsoft.com/office/drawing/2014/main" id="{574181ED-D243-45C0-B2A9-547080373118}"/>
+                <a16:creationId xmlns:a16="http://schemas.microsoft.com/office/drawing/2014/main" id="{474428F1-9390-443B-B6BB-3FB97D7B4D54}"/>
               </a:ext>
             </a:extLst>
           </p:cNvPr>
@@ -7261,7 +7293,7 @@
             <a:avLst/>
           </a:prstGeom>
           <a:solidFill xmlns:a="http://schemas.openxmlformats.org/drawingml/2006/main">
-            <a:srgbClr val="D8E5F2"/>
+            <a:srgbClr val="BDC4D4"/>
           </a:solidFill>
           <a:ln xmlns:a="http://schemas.openxmlformats.org/drawingml/2006/main" w="0">
             <a:noFill/>
@@ -7273,7 +7305,7 @@
           <p:cNvPr id="22" name="">
             <a:extLst xmlns:a="http://schemas.openxmlformats.org/drawingml/2006/main">
               <a:ext uri="{FF2B5EF4-FFF2-40B4-BE49-F238E27FC236}">
-                <a16:creationId xmlns:a16="http://schemas.microsoft.com/office/drawing/2014/main" id="{1DEA97DA-63C1-4904-B7E3-E1C38D69A587}"/>
+                <a16:creationId xmlns:a16="http://schemas.microsoft.com/office/drawing/2014/main" id="{10D0DC1E-94D0-40C6-96B6-9283B66801DF}"/>
               </a:ext>
             </a:extLst>
           </p:cNvPr>
@@ -7304,7 +7336,7 @@
             <a:pPr algn="l">
               <a:defRPr sz="750" b="0">
                 <a:solidFill>
-                  <a:srgbClr val="61718A"/>
+                  <a:srgbClr val="52677D"/>
                 </a:solidFill>
                 <a:latin typeface="Helvetica Neue"/>
                 <a:ea typeface="Helvetica Neue"/>
@@ -7314,7 +7346,7 @@
             <a:r>
               <a:rPr sz="750" b="0">
                 <a:solidFill>
-                  <a:srgbClr val="61718A"/>
+                  <a:srgbClr val="52677D"/>
                 </a:solidFill>
                 <a:latin typeface="Helvetica Neue"/>
                 <a:ea typeface="Helvetica Neue"/>
@@ -7330,7 +7362,7 @@
           <p:cNvPr id="23" name="">
             <a:extLst xmlns:a="http://schemas.openxmlformats.org/drawingml/2006/main">
               <a:ext uri="{FF2B5EF4-FFF2-40B4-BE49-F238E27FC236}">
-                <a16:creationId xmlns:a16="http://schemas.microsoft.com/office/drawing/2014/main" id="{A01B6321-1ADE-4767-9581-D7F2D3CB8B10}"/>
+                <a16:creationId xmlns:a16="http://schemas.microsoft.com/office/drawing/2014/main" id="{91AAAA40-AB72-43CD-AC30-00AC0FFBCA09}"/>
               </a:ext>
             </a:extLst>
           </p:cNvPr>
@@ -7361,7 +7393,7 @@
             <a:pPr algn="r">
               <a:defRPr sz="825" b="1">
                 <a:solidFill>
-                  <a:srgbClr val="2563EB"/>
+                  <a:srgbClr val="52677D"/>
                 </a:solidFill>
                 <a:latin typeface="Helvetica Neue"/>
                 <a:ea typeface="Helvetica Neue"/>
@@ -7371,7 +7403,7 @@
             <a:r>
               <a:rPr sz="825" b="1">
                 <a:solidFill>
-                  <a:srgbClr val="2563EB"/>
+                  <a:srgbClr val="52677D"/>
                 </a:solidFill>
                 <a:latin typeface="Helvetica Neue"/>
                 <a:ea typeface="Helvetica Neue"/>
@@ -7385,7 +7417,7 @@
     </p:spTree>
     <p:extLst>
       <p:ext uri="{BB962C8B-B14F-4D97-AF65-F5344CB8AC3E}">
-        <p14:creationId xmlns:p14="http://schemas.microsoft.com/office/powerpoint/2010/main" val="1035089957"/>
+        <p14:creationId xmlns:p14="http://schemas.microsoft.com/office/powerpoint/2010/main" val="2116784656"/>
       </p:ext>
     </p:extLst>
   </p:cSld>
@@ -7416,7 +7448,7 @@
           <p:cNvPr id="24" name="">
             <a:extLst xmlns:a="http://schemas.openxmlformats.org/drawingml/2006/main">
               <a:ext uri="{FF2B5EF4-FFF2-40B4-BE49-F238E27FC236}">
-                <a16:creationId xmlns:a16="http://schemas.microsoft.com/office/drawing/2014/main" id="{F89175D0-3DA5-4179-82B6-2FE1DB2AC4FB}"/>
+                <a16:creationId xmlns:a16="http://schemas.microsoft.com/office/drawing/2014/main" id="{2B3DEA73-F131-4C71-A0B7-3B9E6605A159}"/>
               </a:ext>
             </a:extLst>
           </p:cNvPr>
@@ -7434,7 +7466,7 @@
             <a:avLst/>
           </a:prstGeom>
           <a:solidFill xmlns:a="http://schemas.openxmlformats.org/drawingml/2006/main">
-            <a:srgbClr val="00A7A0"/>
+            <a:srgbClr val="1C2E4A"/>
           </a:solidFill>
           <a:ln xmlns:a="http://schemas.openxmlformats.org/drawingml/2006/main" w="0">
             <a:noFill/>
@@ -7446,7 +7478,7 @@
           <p:cNvPr id="2" name="">
             <a:extLst xmlns:a="http://schemas.openxmlformats.org/drawingml/2006/main">
               <a:ext uri="{FF2B5EF4-FFF2-40B4-BE49-F238E27FC236}">
-                <a16:creationId xmlns:a16="http://schemas.microsoft.com/office/drawing/2014/main" id="{4D314DAF-1929-48FD-85A0-A307274C4B87}"/>
+                <a16:creationId xmlns:a16="http://schemas.microsoft.com/office/drawing/2014/main" id="{943CCD45-A9A7-42C4-8FA2-DE5DF32AA78D}"/>
               </a:ext>
             </a:extLst>
           </p:cNvPr>
@@ -7477,7 +7509,7 @@
             <a:pPr algn="l">
               <a:defRPr sz="1125" b="1">
                 <a:solidFill>
-                  <a:srgbClr val="2563EB"/>
+                  <a:srgbClr val="52677D"/>
                 </a:solidFill>
                 <a:latin typeface="Helvetica Neue"/>
                 <a:ea typeface="Helvetica Neue"/>
@@ -7487,7 +7519,7 @@
             <a:r>
               <a:rPr sz="1125" b="1">
                 <a:solidFill>
-                  <a:srgbClr val="2563EB"/>
+                  <a:srgbClr val="52677D"/>
                 </a:solidFill>
                 <a:latin typeface="Helvetica Neue"/>
                 <a:ea typeface="Helvetica Neue"/>
@@ -7503,7 +7535,7 @@
           <p:cNvPr id="3" name="">
             <a:extLst xmlns:a="http://schemas.openxmlformats.org/drawingml/2006/main">
               <a:ext uri="{FF2B5EF4-FFF2-40B4-BE49-F238E27FC236}">
-                <a16:creationId xmlns:a16="http://schemas.microsoft.com/office/drawing/2014/main" id="{661D1A84-B8D0-40B7-A643-1362477B71D2}"/>
+                <a16:creationId xmlns:a16="http://schemas.microsoft.com/office/drawing/2014/main" id="{D11C8A11-0718-412D-9FB8-047A8D102B8C}"/>
               </a:ext>
             </a:extLst>
           </p:cNvPr>
@@ -7523,7 +7555,7 @@
             </a:avLst>
           </a:prstGeom>
           <a:solidFill xmlns:a="http://schemas.openxmlformats.org/drawingml/2006/main">
-            <a:srgbClr val="FFD43B"/>
+            <a:srgbClr val="D1CFC9"/>
           </a:solidFill>
           <a:ln xmlns:a="http://schemas.openxmlformats.org/drawingml/2006/main" w="0">
             <a:noFill/>
@@ -7535,7 +7567,7 @@
           <p:cNvPr id="4" name="">
             <a:extLst xmlns:a="http://schemas.openxmlformats.org/drawingml/2006/main">
               <a:ext uri="{FF2B5EF4-FFF2-40B4-BE49-F238E27FC236}">
-                <a16:creationId xmlns:a16="http://schemas.microsoft.com/office/drawing/2014/main" id="{2BEEAA71-F192-41B7-A439-979EB44BCEC6}"/>
+                <a16:creationId xmlns:a16="http://schemas.microsoft.com/office/drawing/2014/main" id="{8B30A238-9EE6-420F-BA87-BD7A6DD5925E}"/>
               </a:ext>
             </a:extLst>
           </p:cNvPr>
@@ -7566,7 +7598,7 @@
             <a:pPr algn="ctr">
               <a:defRPr sz="1275" b="1">
                 <a:solidFill>
-                  <a:srgbClr val="092454"/>
+                  <a:srgbClr val="1C2E4A"/>
                 </a:solidFill>
                 <a:latin typeface="Helvetica Neue"/>
                 <a:ea typeface="Helvetica Neue"/>
@@ -7576,7 +7608,7 @@
             <a:r>
               <a:rPr sz="1275" b="1">
                 <a:solidFill>
-                  <a:srgbClr val="092454"/>
+                  <a:srgbClr val="1C2E4A"/>
                 </a:solidFill>
                 <a:latin typeface="Helvetica Neue"/>
                 <a:ea typeface="Helvetica Neue"/>
@@ -7592,7 +7624,7 @@
           <p:cNvPr id="5" name="">
             <a:extLst xmlns:a="http://schemas.openxmlformats.org/drawingml/2006/main">
               <a:ext uri="{FF2B5EF4-FFF2-40B4-BE49-F238E27FC236}">
-                <a16:creationId xmlns:a16="http://schemas.microsoft.com/office/drawing/2014/main" id="{9276A414-027D-413A-AFB9-A46E195EFDF4}"/>
+                <a16:creationId xmlns:a16="http://schemas.microsoft.com/office/drawing/2014/main" id="{825B2CD8-35FF-4ABD-AA9D-06C64EC60663}"/>
               </a:ext>
             </a:extLst>
           </p:cNvPr>
@@ -7623,7 +7655,7 @@
             <a:pPr algn="l">
               <a:defRPr sz="2550" b="1">
                 <a:solidFill>
-                  <a:srgbClr val="092454"/>
+                  <a:srgbClr val="1C2E4A"/>
                 </a:solidFill>
                 <a:latin typeface="Helvetica Neue"/>
                 <a:ea typeface="Helvetica Neue"/>
@@ -7633,7 +7665,7 @@
             <a:r>
               <a:rPr sz="2550" b="1">
                 <a:solidFill>
-                  <a:srgbClr val="092454"/>
+                  <a:srgbClr val="1C2E4A"/>
                 </a:solidFill>
                 <a:latin typeface="Helvetica Neue"/>
                 <a:ea typeface="Helvetica Neue"/>
@@ -7649,7 +7681,7 @@
           <p:cNvPr id="6" name="">
             <a:extLst xmlns:a="http://schemas.openxmlformats.org/drawingml/2006/main">
               <a:ext uri="{FF2B5EF4-FFF2-40B4-BE49-F238E27FC236}">
-                <a16:creationId xmlns:a16="http://schemas.microsoft.com/office/drawing/2014/main" id="{A08186F9-C820-4F59-B381-5F965142DD8B}"/>
+                <a16:creationId xmlns:a16="http://schemas.microsoft.com/office/drawing/2014/main" id="{AE00BC79-597F-42CC-ABC6-CFC79DD694C8}"/>
               </a:ext>
             </a:extLst>
           </p:cNvPr>
@@ -7669,7 +7701,7 @@
             </a:avLst>
           </a:prstGeom>
           <a:solidFill xmlns:a="http://schemas.openxmlformats.org/drawingml/2006/main">
-            <a:srgbClr val="EEF7FF"/>
+            <a:srgbClr val="D1CFC9"/>
           </a:solidFill>
           <a:ln xmlns:a="http://schemas.openxmlformats.org/drawingml/2006/main" w="0">
             <a:noFill/>
@@ -7681,7 +7713,7 @@
           <p:cNvPr id="7" name="">
             <a:extLst xmlns:a="http://schemas.openxmlformats.org/drawingml/2006/main">
               <a:ext uri="{FF2B5EF4-FFF2-40B4-BE49-F238E27FC236}">
-                <a16:creationId xmlns:a16="http://schemas.microsoft.com/office/drawing/2014/main" id="{D3462391-23AB-4EEE-AD0E-9D4991149FD7}"/>
+                <a16:creationId xmlns:a16="http://schemas.microsoft.com/office/drawing/2014/main" id="{49014822-04DC-4F1C-8F17-B606AE17A0AB}"/>
               </a:ext>
             </a:extLst>
           </p:cNvPr>
@@ -7712,7 +7744,7 @@
             <a:pPr algn="ctr">
               <a:defRPr sz="1350" b="1">
                 <a:solidFill>
-                  <a:srgbClr val="2563EB"/>
+                  <a:srgbClr val="52677D"/>
                 </a:solidFill>
                 <a:latin typeface="Helvetica Neue"/>
                 <a:ea typeface="Helvetica Neue"/>
@@ -7722,7 +7754,7 @@
             <a:r>
               <a:rPr sz="1350" b="1">
                 <a:solidFill>
-                  <a:srgbClr val="2563EB"/>
+                  <a:srgbClr val="52677D"/>
                 </a:solidFill>
                 <a:latin typeface="Helvetica Neue"/>
                 <a:ea typeface="Helvetica Neue"/>
@@ -7738,7 +7770,7 @@
           <p:cNvPr id="8" name="">
             <a:extLst xmlns:a="http://schemas.openxmlformats.org/drawingml/2006/main">
               <a:ext uri="{FF2B5EF4-FFF2-40B4-BE49-F238E27FC236}">
-                <a16:creationId xmlns:a16="http://schemas.microsoft.com/office/drawing/2014/main" id="{2F52334A-7380-4E79-9E7F-E83E2FD02649}"/>
+                <a16:creationId xmlns:a16="http://schemas.microsoft.com/office/drawing/2014/main" id="{326742E2-0416-4DCE-8D32-EB565DB0EE6F}"/>
               </a:ext>
             </a:extLst>
           </p:cNvPr>
@@ -7769,7 +7801,7 @@
             <a:pPr algn="l">
               <a:defRPr sz="1575" b="0">
                 <a:solidFill>
-                  <a:srgbClr val="10213D"/>
+                  <a:srgbClr val="0F1A2B"/>
                 </a:solidFill>
                 <a:latin typeface="Helvetica Neue"/>
                 <a:ea typeface="Helvetica Neue"/>
@@ -7779,7 +7811,7 @@
             <a:r>
               <a:rPr sz="1575" b="0">
                 <a:solidFill>
-                  <a:srgbClr val="10213D"/>
+                  <a:srgbClr val="0F1A2B"/>
                 </a:solidFill>
                 <a:latin typeface="Helvetica Neue"/>
                 <a:ea typeface="Helvetica Neue"/>
@@ -7795,7 +7827,7 @@
           <p:cNvPr id="9" name="">
             <a:extLst xmlns:a="http://schemas.openxmlformats.org/drawingml/2006/main">
               <a:ext uri="{FF2B5EF4-FFF2-40B4-BE49-F238E27FC236}">
-                <a16:creationId xmlns:a16="http://schemas.microsoft.com/office/drawing/2014/main" id="{1E92F231-DA04-4FFE-B1FB-DACB34FE5314}"/>
+                <a16:creationId xmlns:a16="http://schemas.microsoft.com/office/drawing/2014/main" id="{4D5DF774-4B29-4705-BFDB-401CBB8C1DE1}"/>
               </a:ext>
             </a:extLst>
           </p:cNvPr>
@@ -7815,7 +7847,7 @@
             </a:avLst>
           </a:prstGeom>
           <a:solidFill xmlns:a="http://schemas.openxmlformats.org/drawingml/2006/main">
-            <a:srgbClr val="EEF7FF"/>
+            <a:srgbClr val="D1CFC9"/>
           </a:solidFill>
           <a:ln xmlns:a="http://schemas.openxmlformats.org/drawingml/2006/main" w="0">
             <a:noFill/>
@@ -7827,7 +7859,7 @@
           <p:cNvPr id="10" name="">
             <a:extLst xmlns:a="http://schemas.openxmlformats.org/drawingml/2006/main">
               <a:ext uri="{FF2B5EF4-FFF2-40B4-BE49-F238E27FC236}">
-                <a16:creationId xmlns:a16="http://schemas.microsoft.com/office/drawing/2014/main" id="{B4A9FE3A-D412-4505-99DC-B444FE4D4A45}"/>
+                <a16:creationId xmlns:a16="http://schemas.microsoft.com/office/drawing/2014/main" id="{1E880610-567C-4F54-BDC3-6A42EDB5AE20}"/>
               </a:ext>
             </a:extLst>
           </p:cNvPr>
@@ -7858,7 +7890,7 @@
             <a:pPr algn="ctr">
               <a:defRPr sz="1350" b="1">
                 <a:solidFill>
-                  <a:srgbClr val="2563EB"/>
+                  <a:srgbClr val="52677D"/>
                 </a:solidFill>
                 <a:latin typeface="Helvetica Neue"/>
                 <a:ea typeface="Helvetica Neue"/>
@@ -7868,7 +7900,7 @@
             <a:r>
               <a:rPr sz="1350" b="1">
                 <a:solidFill>
-                  <a:srgbClr val="2563EB"/>
+                  <a:srgbClr val="52677D"/>
                 </a:solidFill>
                 <a:latin typeface="Helvetica Neue"/>
                 <a:ea typeface="Helvetica Neue"/>
@@ -7884,7 +7916,7 @@
           <p:cNvPr id="11" name="">
             <a:extLst xmlns:a="http://schemas.openxmlformats.org/drawingml/2006/main">
               <a:ext uri="{FF2B5EF4-FFF2-40B4-BE49-F238E27FC236}">
-                <a16:creationId xmlns:a16="http://schemas.microsoft.com/office/drawing/2014/main" id="{C72F0E45-6B4D-4051-BCE6-F19EF7AC9C9E}"/>
+                <a16:creationId xmlns:a16="http://schemas.microsoft.com/office/drawing/2014/main" id="{95CF2F21-B144-4197-A461-CEB968105727}"/>
               </a:ext>
             </a:extLst>
           </p:cNvPr>
@@ -7915,7 +7947,7 @@
             <a:pPr algn="l">
               <a:defRPr sz="1575" b="0">
                 <a:solidFill>
-                  <a:srgbClr val="10213D"/>
+                  <a:srgbClr val="0F1A2B"/>
                 </a:solidFill>
                 <a:latin typeface="Helvetica Neue"/>
                 <a:ea typeface="Helvetica Neue"/>
@@ -7925,7 +7957,7 @@
             <a:r>
               <a:rPr sz="1575" b="0">
                 <a:solidFill>
-                  <a:srgbClr val="10213D"/>
+                  <a:srgbClr val="0F1A2B"/>
                 </a:solidFill>
                 <a:latin typeface="Helvetica Neue"/>
                 <a:ea typeface="Helvetica Neue"/>
@@ -7941,7 +7973,7 @@
           <p:cNvPr id="12" name="">
             <a:extLst xmlns:a="http://schemas.openxmlformats.org/drawingml/2006/main">
               <a:ext uri="{FF2B5EF4-FFF2-40B4-BE49-F238E27FC236}">
-                <a16:creationId xmlns:a16="http://schemas.microsoft.com/office/drawing/2014/main" id="{07A16A52-7F61-407B-ABC8-31FC13432D69}"/>
+                <a16:creationId xmlns:a16="http://schemas.microsoft.com/office/drawing/2014/main" id="{740F9207-7B37-4F50-A07F-78C49394BFF0}"/>
               </a:ext>
             </a:extLst>
           </p:cNvPr>
@@ -7961,7 +7993,7 @@
             </a:avLst>
           </a:prstGeom>
           <a:solidFill xmlns:a="http://schemas.openxmlformats.org/drawingml/2006/main">
-            <a:srgbClr val="EEF7FF"/>
+            <a:srgbClr val="D1CFC9"/>
           </a:solidFill>
           <a:ln xmlns:a="http://schemas.openxmlformats.org/drawingml/2006/main" w="0">
             <a:noFill/>
@@ -7973,7 +8005,7 @@
           <p:cNvPr id="13" name="">
             <a:extLst xmlns:a="http://schemas.openxmlformats.org/drawingml/2006/main">
               <a:ext uri="{FF2B5EF4-FFF2-40B4-BE49-F238E27FC236}">
-                <a16:creationId xmlns:a16="http://schemas.microsoft.com/office/drawing/2014/main" id="{544CDE84-179F-46F7-950E-9582EC104BB8}"/>
+                <a16:creationId xmlns:a16="http://schemas.microsoft.com/office/drawing/2014/main" id="{68BEA0C3-6573-4EF9-B307-ED2A57164470}"/>
               </a:ext>
             </a:extLst>
           </p:cNvPr>
@@ -8004,7 +8036,7 @@
             <a:pPr algn="ctr">
               <a:defRPr sz="1350" b="1">
                 <a:solidFill>
-                  <a:srgbClr val="2563EB"/>
+                  <a:srgbClr val="52677D"/>
                 </a:solidFill>
                 <a:latin typeface="Helvetica Neue"/>
                 <a:ea typeface="Helvetica Neue"/>
@@ -8014,7 +8046,7 @@
             <a:r>
               <a:rPr sz="1350" b="1">
                 <a:solidFill>
-                  <a:srgbClr val="2563EB"/>
+                  <a:srgbClr val="52677D"/>
                 </a:solidFill>
                 <a:latin typeface="Helvetica Neue"/>
                 <a:ea typeface="Helvetica Neue"/>
@@ -8030,7 +8062,7 @@
           <p:cNvPr id="14" name="">
             <a:extLst xmlns:a="http://schemas.openxmlformats.org/drawingml/2006/main">
               <a:ext uri="{FF2B5EF4-FFF2-40B4-BE49-F238E27FC236}">
-                <a16:creationId xmlns:a16="http://schemas.microsoft.com/office/drawing/2014/main" id="{2C087A14-D23A-41B7-A3D7-A239166C6256}"/>
+                <a16:creationId xmlns:a16="http://schemas.microsoft.com/office/drawing/2014/main" id="{34FE259D-CEE8-421C-B637-36A78A93082C}"/>
               </a:ext>
             </a:extLst>
           </p:cNvPr>
@@ -8061,7 +8093,7 @@
             <a:pPr algn="l">
               <a:defRPr sz="1575" b="0">
                 <a:solidFill>
-                  <a:srgbClr val="10213D"/>
+                  <a:srgbClr val="0F1A2B"/>
                 </a:solidFill>
                 <a:latin typeface="Helvetica Neue"/>
                 <a:ea typeface="Helvetica Neue"/>
@@ -8071,7 +8103,7 @@
             <a:r>
               <a:rPr sz="1575" b="0">
                 <a:solidFill>
-                  <a:srgbClr val="10213D"/>
+                  <a:srgbClr val="0F1A2B"/>
                 </a:solidFill>
                 <a:latin typeface="Helvetica Neue"/>
                 <a:ea typeface="Helvetica Neue"/>
@@ -8087,7 +8119,7 @@
           <p:cNvPr id="15" name="">
             <a:extLst xmlns:a="http://schemas.openxmlformats.org/drawingml/2006/main">
               <a:ext uri="{FF2B5EF4-FFF2-40B4-BE49-F238E27FC236}">
-                <a16:creationId xmlns:a16="http://schemas.microsoft.com/office/drawing/2014/main" id="{C7371924-0C97-4A7A-BC1E-A68AF401956E}"/>
+                <a16:creationId xmlns:a16="http://schemas.microsoft.com/office/drawing/2014/main" id="{653FE9A5-2544-4D89-83A1-A63606476F6C}"/>
               </a:ext>
             </a:extLst>
           </p:cNvPr>
@@ -8107,7 +8139,7 @@
             </a:avLst>
           </a:prstGeom>
           <a:solidFill xmlns:a="http://schemas.openxmlformats.org/drawingml/2006/main">
-            <a:srgbClr val="EEF7FF"/>
+            <a:srgbClr val="D1CFC9"/>
           </a:solidFill>
           <a:ln xmlns:a="http://schemas.openxmlformats.org/drawingml/2006/main" w="0">
             <a:noFill/>
@@ -8119,7 +8151,7 @@
           <p:cNvPr id="16" name="">
             <a:extLst xmlns:a="http://schemas.openxmlformats.org/drawingml/2006/main">
               <a:ext uri="{FF2B5EF4-FFF2-40B4-BE49-F238E27FC236}">
-                <a16:creationId xmlns:a16="http://schemas.microsoft.com/office/drawing/2014/main" id="{DB113F20-CE89-4759-B245-CF603200D7AD}"/>
+                <a16:creationId xmlns:a16="http://schemas.microsoft.com/office/drawing/2014/main" id="{86F986B1-CA0D-4EF4-BD50-C775E7230B2F}"/>
               </a:ext>
             </a:extLst>
           </p:cNvPr>
@@ -8150,7 +8182,7 @@
             <a:pPr algn="l">
               <a:defRPr sz="1125" b="0">
                 <a:solidFill>
-                  <a:srgbClr val="092454"/>
+                  <a:srgbClr val="1C2E4A"/>
                 </a:solidFill>
                 <a:latin typeface="Helvetica Neue"/>
                 <a:ea typeface="Helvetica Neue"/>
@@ -8160,7 +8192,7 @@
             <a:r>
               <a:rPr sz="1125" b="0">
                 <a:solidFill>
-                  <a:srgbClr val="092454"/>
+                  <a:srgbClr val="1C2E4A"/>
                 </a:solidFill>
                 <a:latin typeface="Helvetica Neue"/>
                 <a:ea typeface="Helvetica Neue"/>
@@ -8176,7 +8208,7 @@
           <p:cNvPr id="17" name="">
             <a:extLst xmlns:a="http://schemas.openxmlformats.org/drawingml/2006/main">
               <a:ext uri="{FF2B5EF4-FFF2-40B4-BE49-F238E27FC236}">
-                <a16:creationId xmlns:a16="http://schemas.microsoft.com/office/drawing/2014/main" id="{4C828E66-0381-42EC-B7CF-B86706FC5CEB}"/>
+                <a16:creationId xmlns:a16="http://schemas.microsoft.com/office/drawing/2014/main" id="{D65BEF07-F9F0-488B-BBAE-4B5407D42AB3}"/>
               </a:ext>
             </a:extLst>
           </p:cNvPr>
@@ -8196,7 +8228,7 @@
             </a:avLst>
           </a:prstGeom>
           <a:solidFill xmlns:a="http://schemas.openxmlformats.org/drawingml/2006/main">
-            <a:srgbClr val="092454"/>
+            <a:srgbClr val="1C2E4A"/>
           </a:solidFill>
           <a:ln xmlns:a="http://schemas.openxmlformats.org/drawingml/2006/main" w="0">
             <a:noFill/>
@@ -8208,7 +8240,7 @@
           <p:cNvPr id="18" name="">
             <a:extLst xmlns:a="http://schemas.openxmlformats.org/drawingml/2006/main">
               <a:ext uri="{FF2B5EF4-FFF2-40B4-BE49-F238E27FC236}">
-                <a16:creationId xmlns:a16="http://schemas.microsoft.com/office/drawing/2014/main" id="{558D69B6-EB8B-4CD5-9CC6-6E4032604FC4}"/>
+                <a16:creationId xmlns:a16="http://schemas.microsoft.com/office/drawing/2014/main" id="{DD40D04F-B49B-49C4-9B8C-C8088F0B68E8}"/>
               </a:ext>
             </a:extLst>
           </p:cNvPr>
@@ -8239,7 +8271,7 @@
             <a:pPr algn="l">
               <a:defRPr sz="1050" b="1">
                 <a:solidFill>
-                  <a:srgbClr val="FFD43B"/>
+                  <a:srgbClr val="D1CFC9"/>
                 </a:solidFill>
                 <a:latin typeface="Helvetica Neue"/>
                 <a:ea typeface="Helvetica Neue"/>
@@ -8249,7 +8281,7 @@
             <a:r>
               <a:rPr sz="1050" b="1">
                 <a:solidFill>
-                  <a:srgbClr val="FFD43B"/>
+                  <a:srgbClr val="D1CFC9"/>
                 </a:solidFill>
                 <a:latin typeface="Helvetica Neue"/>
                 <a:ea typeface="Helvetica Neue"/>
@@ -8265,7 +8297,7 @@
           <p:cNvPr id="19" name="">
             <a:extLst xmlns:a="http://schemas.openxmlformats.org/drawingml/2006/main">
               <a:ext uri="{FF2B5EF4-FFF2-40B4-BE49-F238E27FC236}">
-                <a16:creationId xmlns:a16="http://schemas.microsoft.com/office/drawing/2014/main" id="{A3D2A01D-08A8-4268-B25F-3639507D17F3}"/>
+                <a16:creationId xmlns:a16="http://schemas.microsoft.com/office/drawing/2014/main" id="{4EF49FB8-E40D-42FA-8AA3-66CBE1D2E4DB}"/>
               </a:ext>
             </a:extLst>
           </p:cNvPr>
@@ -8322,7 +8354,7 @@
           <p:cNvPr id="20" name="">
             <a:extLst xmlns:a="http://schemas.openxmlformats.org/drawingml/2006/main">
               <a:ext uri="{FF2B5EF4-FFF2-40B4-BE49-F238E27FC236}">
-                <a16:creationId xmlns:a16="http://schemas.microsoft.com/office/drawing/2014/main" id="{6D6EE617-FDEC-491A-AB2B-A89BF816A832}"/>
+                <a16:creationId xmlns:a16="http://schemas.microsoft.com/office/drawing/2014/main" id="{E3A2AE5D-0D6D-4D36-BA47-4E8473CD197A}"/>
               </a:ext>
             </a:extLst>
           </p:cNvPr>
@@ -8353,7 +8385,7 @@
             <a:pPr algn="l">
               <a:defRPr sz="1125" b="0">
                 <a:solidFill>
-                  <a:srgbClr val="BFE6FF"/>
+                  <a:srgbClr val="BDC4D4"/>
                 </a:solidFill>
                 <a:latin typeface="Helvetica Neue"/>
                 <a:ea typeface="Helvetica Neue"/>
@@ -8363,7 +8395,7 @@
             <a:r>
               <a:rPr sz="1125" b="0">
                 <a:solidFill>
-                  <a:srgbClr val="BFE6FF"/>
+                  <a:srgbClr val="BDC4D4"/>
                 </a:solidFill>
                 <a:latin typeface="Helvetica Neue"/>
                 <a:ea typeface="Helvetica Neue"/>
@@ -8379,7 +8411,7 @@
           <p:cNvPr id="21" name="">
             <a:extLst xmlns:a="http://schemas.openxmlformats.org/drawingml/2006/main">
               <a:ext uri="{FF2B5EF4-FFF2-40B4-BE49-F238E27FC236}">
-                <a16:creationId xmlns:a16="http://schemas.microsoft.com/office/drawing/2014/main" id="{65431001-EE13-41B4-BBAB-36769FFC45BC}"/>
+                <a16:creationId xmlns:a16="http://schemas.microsoft.com/office/drawing/2014/main" id="{9988EE3F-50F6-4663-A1AC-1CB78994CDAE}"/>
               </a:ext>
             </a:extLst>
           </p:cNvPr>
@@ -8397,7 +8429,7 @@
             <a:avLst/>
           </a:prstGeom>
           <a:solidFill xmlns:a="http://schemas.openxmlformats.org/drawingml/2006/main">
-            <a:srgbClr val="D8E5F2"/>
+            <a:srgbClr val="BDC4D4"/>
           </a:solidFill>
           <a:ln xmlns:a="http://schemas.openxmlformats.org/drawingml/2006/main" w="0">
             <a:noFill/>
@@ -8409,7 +8441,7 @@
           <p:cNvPr id="22" name="">
             <a:extLst xmlns:a="http://schemas.openxmlformats.org/drawingml/2006/main">
               <a:ext uri="{FF2B5EF4-FFF2-40B4-BE49-F238E27FC236}">
-                <a16:creationId xmlns:a16="http://schemas.microsoft.com/office/drawing/2014/main" id="{32BB61B2-03C5-4ED0-B792-D8ACDEBDF6F6}"/>
+                <a16:creationId xmlns:a16="http://schemas.microsoft.com/office/drawing/2014/main" id="{C0231830-89A3-4640-890A-BCE1197F70AB}"/>
               </a:ext>
             </a:extLst>
           </p:cNvPr>
@@ -8440,7 +8472,7 @@
             <a:pPr algn="l">
               <a:defRPr sz="750" b="0">
                 <a:solidFill>
-                  <a:srgbClr val="61718A"/>
+                  <a:srgbClr val="52677D"/>
                 </a:solidFill>
                 <a:latin typeface="Helvetica Neue"/>
                 <a:ea typeface="Helvetica Neue"/>
@@ -8450,7 +8482,7 @@
             <a:r>
               <a:rPr sz="750" b="0">
                 <a:solidFill>
-                  <a:srgbClr val="61718A"/>
+                  <a:srgbClr val="52677D"/>
                 </a:solidFill>
                 <a:latin typeface="Helvetica Neue"/>
                 <a:ea typeface="Helvetica Neue"/>
@@ -8466,7 +8498,7 @@
           <p:cNvPr id="23" name="">
             <a:extLst xmlns:a="http://schemas.openxmlformats.org/drawingml/2006/main">
               <a:ext uri="{FF2B5EF4-FFF2-40B4-BE49-F238E27FC236}">
-                <a16:creationId xmlns:a16="http://schemas.microsoft.com/office/drawing/2014/main" id="{CF738095-0A92-41A4-BFA8-87EB9F9C2200}"/>
+                <a16:creationId xmlns:a16="http://schemas.microsoft.com/office/drawing/2014/main" id="{099348B1-9876-4D51-8931-C2445528FE7C}"/>
               </a:ext>
             </a:extLst>
           </p:cNvPr>
@@ -8497,7 +8529,7 @@
             <a:pPr algn="r">
               <a:defRPr sz="825" b="1">
                 <a:solidFill>
-                  <a:srgbClr val="2563EB"/>
+                  <a:srgbClr val="52677D"/>
                 </a:solidFill>
                 <a:latin typeface="Helvetica Neue"/>
                 <a:ea typeface="Helvetica Neue"/>
@@ -8507,7 +8539,7 @@
             <a:r>
               <a:rPr sz="825" b="1">
                 <a:solidFill>
-                  <a:srgbClr val="2563EB"/>
+                  <a:srgbClr val="52677D"/>
                 </a:solidFill>
                 <a:latin typeface="Helvetica Neue"/>
                 <a:ea typeface="Helvetica Neue"/>
@@ -8521,7 +8553,7 @@
     </p:spTree>
     <p:extLst>
       <p:ext uri="{BB962C8B-B14F-4D97-AF65-F5344CB8AC3E}">
-        <p14:creationId xmlns:p14="http://schemas.microsoft.com/office/powerpoint/2010/main" val="1429727769"/>
+        <p14:creationId xmlns:p14="http://schemas.microsoft.com/office/powerpoint/2010/main" val="580202375"/>
       </p:ext>
     </p:extLst>
   </p:cSld>
@@ -8552,7 +8584,7 @@
           <p:cNvPr id="24" name="">
             <a:extLst xmlns:a="http://schemas.openxmlformats.org/drawingml/2006/main">
               <a:ext uri="{FF2B5EF4-FFF2-40B4-BE49-F238E27FC236}">
-                <a16:creationId xmlns:a16="http://schemas.microsoft.com/office/drawing/2014/main" id="{36AE46C9-3F2D-463A-91C1-B46BE164C3CB}"/>
+                <a16:creationId xmlns:a16="http://schemas.microsoft.com/office/drawing/2014/main" id="{6B85B596-2980-4D10-B0C4-16D386A6CCDA}"/>
               </a:ext>
             </a:extLst>
           </p:cNvPr>
@@ -8570,7 +8602,7 @@
             <a:avLst/>
           </a:prstGeom>
           <a:solidFill xmlns:a="http://schemas.openxmlformats.org/drawingml/2006/main">
-            <a:srgbClr val="FF7C70"/>
+            <a:srgbClr val="1C2E4A"/>
           </a:solidFill>
           <a:ln xmlns:a="http://schemas.openxmlformats.org/drawingml/2006/main" w="0">
             <a:noFill/>
@@ -8582,7 +8614,7 @@
           <p:cNvPr id="2" name="">
             <a:extLst xmlns:a="http://schemas.openxmlformats.org/drawingml/2006/main">
               <a:ext uri="{FF2B5EF4-FFF2-40B4-BE49-F238E27FC236}">
-                <a16:creationId xmlns:a16="http://schemas.microsoft.com/office/drawing/2014/main" id="{AB04070E-F87B-4818-AD38-83A9CDC5D652}"/>
+                <a16:creationId xmlns:a16="http://schemas.microsoft.com/office/drawing/2014/main" id="{3E75BE43-B648-4011-91D3-172E18BC9D1A}"/>
               </a:ext>
             </a:extLst>
           </p:cNvPr>
@@ -8613,7 +8645,7 @@
             <a:pPr algn="l">
               <a:defRPr sz="1125" b="1">
                 <a:solidFill>
-                  <a:srgbClr val="2563EB"/>
+                  <a:srgbClr val="52677D"/>
                 </a:solidFill>
                 <a:latin typeface="Helvetica Neue"/>
                 <a:ea typeface="Helvetica Neue"/>
@@ -8623,7 +8655,7 @@
             <a:r>
               <a:rPr sz="1125" b="1">
                 <a:solidFill>
-                  <a:srgbClr val="2563EB"/>
+                  <a:srgbClr val="52677D"/>
                 </a:solidFill>
                 <a:latin typeface="Helvetica Neue"/>
                 <a:ea typeface="Helvetica Neue"/>
@@ -8639,7 +8671,7 @@
           <p:cNvPr id="3" name="">
             <a:extLst xmlns:a="http://schemas.openxmlformats.org/drawingml/2006/main">
               <a:ext uri="{FF2B5EF4-FFF2-40B4-BE49-F238E27FC236}">
-                <a16:creationId xmlns:a16="http://schemas.microsoft.com/office/drawing/2014/main" id="{60F059A9-6A8B-4E26-B258-2C95AD99DCA9}"/>
+                <a16:creationId xmlns:a16="http://schemas.microsoft.com/office/drawing/2014/main" id="{13FBF252-ACA0-478E-8DF0-76CA52F8E8A9}"/>
               </a:ext>
             </a:extLst>
           </p:cNvPr>
@@ -8659,7 +8691,7 @@
             </a:avLst>
           </a:prstGeom>
           <a:solidFill xmlns:a="http://schemas.openxmlformats.org/drawingml/2006/main">
-            <a:srgbClr val="FFD43B"/>
+            <a:srgbClr val="D1CFC9"/>
           </a:solidFill>
           <a:ln xmlns:a="http://schemas.openxmlformats.org/drawingml/2006/main" w="0">
             <a:noFill/>
@@ -8671,7 +8703,7 @@
           <p:cNvPr id="4" name="">
             <a:extLst xmlns:a="http://schemas.openxmlformats.org/drawingml/2006/main">
               <a:ext uri="{FF2B5EF4-FFF2-40B4-BE49-F238E27FC236}">
-                <a16:creationId xmlns:a16="http://schemas.microsoft.com/office/drawing/2014/main" id="{CDE9232B-47DE-4588-9AAB-92E03711F599}"/>
+                <a16:creationId xmlns:a16="http://schemas.microsoft.com/office/drawing/2014/main" id="{741E5339-76F5-4C8B-83C0-99B4262A6B01}"/>
               </a:ext>
             </a:extLst>
           </p:cNvPr>
@@ -8702,7 +8734,7 @@
             <a:pPr algn="ctr">
               <a:defRPr sz="1275" b="1">
                 <a:solidFill>
-                  <a:srgbClr val="092454"/>
+                  <a:srgbClr val="1C2E4A"/>
                 </a:solidFill>
                 <a:latin typeface="Helvetica Neue"/>
                 <a:ea typeface="Helvetica Neue"/>
@@ -8712,7 +8744,7 @@
             <a:r>
               <a:rPr sz="1275" b="1">
                 <a:solidFill>
-                  <a:srgbClr val="092454"/>
+                  <a:srgbClr val="1C2E4A"/>
                 </a:solidFill>
                 <a:latin typeface="Helvetica Neue"/>
                 <a:ea typeface="Helvetica Neue"/>
@@ -8728,7 +8760,7 @@
           <p:cNvPr id="5" name="">
             <a:extLst xmlns:a="http://schemas.openxmlformats.org/drawingml/2006/main">
               <a:ext uri="{FF2B5EF4-FFF2-40B4-BE49-F238E27FC236}">
-                <a16:creationId xmlns:a16="http://schemas.microsoft.com/office/drawing/2014/main" id="{C4E6684D-599D-4DE8-AC81-2E4E5CAE029A}"/>
+                <a16:creationId xmlns:a16="http://schemas.microsoft.com/office/drawing/2014/main" id="{AD30AEAC-9167-4D8D-82AA-53C49362EAB5}"/>
               </a:ext>
             </a:extLst>
           </p:cNvPr>
@@ -8759,7 +8791,7 @@
             <a:pPr algn="l">
               <a:defRPr sz="2250" b="1">
                 <a:solidFill>
-                  <a:srgbClr val="092454"/>
+                  <a:srgbClr val="1C2E4A"/>
                 </a:solidFill>
                 <a:latin typeface="Helvetica Neue"/>
                 <a:ea typeface="Helvetica Neue"/>
@@ -8769,7 +8801,7 @@
             <a:r>
               <a:rPr sz="2250" b="1">
                 <a:solidFill>
-                  <a:srgbClr val="092454"/>
+                  <a:srgbClr val="1C2E4A"/>
                 </a:solidFill>
                 <a:latin typeface="Helvetica Neue"/>
                 <a:ea typeface="Helvetica Neue"/>
@@ -8785,7 +8817,7 @@
           <p:cNvPr id="6" name="">
             <a:extLst xmlns:a="http://schemas.openxmlformats.org/drawingml/2006/main">
               <a:ext uri="{FF2B5EF4-FFF2-40B4-BE49-F238E27FC236}">
-                <a16:creationId xmlns:a16="http://schemas.microsoft.com/office/drawing/2014/main" id="{B6CEB422-48B7-4D49-AEE3-12F5BD62E68F}"/>
+                <a16:creationId xmlns:a16="http://schemas.microsoft.com/office/drawing/2014/main" id="{F5FC6342-1203-42E4-8EF3-4A9719ADAD8D}"/>
               </a:ext>
             </a:extLst>
           </p:cNvPr>
@@ -8805,7 +8837,7 @@
             </a:avLst>
           </a:prstGeom>
           <a:solidFill xmlns:a="http://schemas.openxmlformats.org/drawingml/2006/main">
-            <a:srgbClr val="EEF7FF"/>
+            <a:srgbClr val="D1CFC9"/>
           </a:solidFill>
           <a:ln xmlns:a="http://schemas.openxmlformats.org/drawingml/2006/main" w="0">
             <a:noFill/>
@@ -8817,7 +8849,7 @@
           <p:cNvPr id="7" name="">
             <a:extLst xmlns:a="http://schemas.openxmlformats.org/drawingml/2006/main">
               <a:ext uri="{FF2B5EF4-FFF2-40B4-BE49-F238E27FC236}">
-                <a16:creationId xmlns:a16="http://schemas.microsoft.com/office/drawing/2014/main" id="{1C6823D5-2C92-4103-8C63-431617285530}"/>
+                <a16:creationId xmlns:a16="http://schemas.microsoft.com/office/drawing/2014/main" id="{030522AB-208C-4E95-AC57-DAD335D24C81}"/>
               </a:ext>
             </a:extLst>
           </p:cNvPr>
@@ -8848,7 +8880,7 @@
             <a:pPr algn="ctr">
               <a:defRPr sz="1350" b="1">
                 <a:solidFill>
-                  <a:srgbClr val="2563EB"/>
+                  <a:srgbClr val="52677D"/>
                 </a:solidFill>
                 <a:latin typeface="Helvetica Neue"/>
                 <a:ea typeface="Helvetica Neue"/>
@@ -8858,7 +8890,7 @@
             <a:r>
               <a:rPr sz="1350" b="1">
                 <a:solidFill>
-                  <a:srgbClr val="2563EB"/>
+                  <a:srgbClr val="52677D"/>
                 </a:solidFill>
                 <a:latin typeface="Helvetica Neue"/>
                 <a:ea typeface="Helvetica Neue"/>
@@ -8874,7 +8906,7 @@
           <p:cNvPr id="8" name="">
             <a:extLst xmlns:a="http://schemas.openxmlformats.org/drawingml/2006/main">
               <a:ext uri="{FF2B5EF4-FFF2-40B4-BE49-F238E27FC236}">
-                <a16:creationId xmlns:a16="http://schemas.microsoft.com/office/drawing/2014/main" id="{56C776C5-6681-4115-A10F-469490479730}"/>
+                <a16:creationId xmlns:a16="http://schemas.microsoft.com/office/drawing/2014/main" id="{2605A48F-8DF2-4A86-AD90-28B8FB6AFC7D}"/>
               </a:ext>
             </a:extLst>
           </p:cNvPr>
@@ -8905,7 +8937,7 @@
             <a:pPr algn="l">
               <a:defRPr sz="1575" b="0">
                 <a:solidFill>
-                  <a:srgbClr val="10213D"/>
+                  <a:srgbClr val="0F1A2B"/>
                 </a:solidFill>
                 <a:latin typeface="Helvetica Neue"/>
                 <a:ea typeface="Helvetica Neue"/>
@@ -8915,7 +8947,7 @@
             <a:r>
               <a:rPr sz="1575" b="0">
                 <a:solidFill>
-                  <a:srgbClr val="10213D"/>
+                  <a:srgbClr val="0F1A2B"/>
                 </a:solidFill>
                 <a:latin typeface="Helvetica Neue"/>
                 <a:ea typeface="Helvetica Neue"/>
@@ -8931,7 +8963,7 @@
           <p:cNvPr id="9" name="">
             <a:extLst xmlns:a="http://schemas.openxmlformats.org/drawingml/2006/main">
               <a:ext uri="{FF2B5EF4-FFF2-40B4-BE49-F238E27FC236}">
-                <a16:creationId xmlns:a16="http://schemas.microsoft.com/office/drawing/2014/main" id="{7DC52FAB-1E5D-4F7E-BE70-37B9AA2CBD1D}"/>
+                <a16:creationId xmlns:a16="http://schemas.microsoft.com/office/drawing/2014/main" id="{B4B04CFE-1E82-4A29-A751-A373AB2ED282}"/>
               </a:ext>
             </a:extLst>
           </p:cNvPr>
@@ -8951,7 +8983,7 @@
             </a:avLst>
           </a:prstGeom>
           <a:solidFill xmlns:a="http://schemas.openxmlformats.org/drawingml/2006/main">
-            <a:srgbClr val="EEF7FF"/>
+            <a:srgbClr val="D1CFC9"/>
           </a:solidFill>
           <a:ln xmlns:a="http://schemas.openxmlformats.org/drawingml/2006/main" w="0">
             <a:noFill/>
@@ -8963,7 +8995,7 @@
           <p:cNvPr id="10" name="">
             <a:extLst xmlns:a="http://schemas.openxmlformats.org/drawingml/2006/main">
               <a:ext uri="{FF2B5EF4-FFF2-40B4-BE49-F238E27FC236}">
-                <a16:creationId xmlns:a16="http://schemas.microsoft.com/office/drawing/2014/main" id="{56146449-928D-4A18-8C3E-C2C6A0BFB868}"/>
+                <a16:creationId xmlns:a16="http://schemas.microsoft.com/office/drawing/2014/main" id="{1EFDC42F-9EAF-4EE8-A2B1-CCAC731E6E86}"/>
               </a:ext>
             </a:extLst>
           </p:cNvPr>
@@ -8994,7 +9026,7 @@
             <a:pPr algn="ctr">
               <a:defRPr sz="1350" b="1">
                 <a:solidFill>
-                  <a:srgbClr val="2563EB"/>
+                  <a:srgbClr val="52677D"/>
                 </a:solidFill>
                 <a:latin typeface="Helvetica Neue"/>
                 <a:ea typeface="Helvetica Neue"/>
@@ -9004,7 +9036,7 @@
             <a:r>
               <a:rPr sz="1350" b="1">
                 <a:solidFill>
-                  <a:srgbClr val="2563EB"/>
+                  <a:srgbClr val="52677D"/>
                 </a:solidFill>
                 <a:latin typeface="Helvetica Neue"/>
                 <a:ea typeface="Helvetica Neue"/>
@@ -9020,7 +9052,7 @@
           <p:cNvPr id="11" name="">
             <a:extLst xmlns:a="http://schemas.openxmlformats.org/drawingml/2006/main">
               <a:ext uri="{FF2B5EF4-FFF2-40B4-BE49-F238E27FC236}">
-                <a16:creationId xmlns:a16="http://schemas.microsoft.com/office/drawing/2014/main" id="{91AC4EC0-F97C-4E69-80FF-25E3BA2B2EDC}"/>
+                <a16:creationId xmlns:a16="http://schemas.microsoft.com/office/drawing/2014/main" id="{BDE76C5A-9CA8-47AD-B54F-CB78E3463C15}"/>
               </a:ext>
             </a:extLst>
           </p:cNvPr>
@@ -9051,7 +9083,7 @@
             <a:pPr algn="l">
               <a:defRPr sz="1575" b="0">
                 <a:solidFill>
-                  <a:srgbClr val="10213D"/>
+                  <a:srgbClr val="0F1A2B"/>
                 </a:solidFill>
                 <a:latin typeface="Helvetica Neue"/>
                 <a:ea typeface="Helvetica Neue"/>
@@ -9061,7 +9093,7 @@
             <a:r>
               <a:rPr sz="1575" b="0">
                 <a:solidFill>
-                  <a:srgbClr val="10213D"/>
+                  <a:srgbClr val="0F1A2B"/>
                 </a:solidFill>
                 <a:latin typeface="Helvetica Neue"/>
                 <a:ea typeface="Helvetica Neue"/>
@@ -9077,7 +9109,7 @@
           <p:cNvPr id="12" name="">
             <a:extLst xmlns:a="http://schemas.openxmlformats.org/drawingml/2006/main">
               <a:ext uri="{FF2B5EF4-FFF2-40B4-BE49-F238E27FC236}">
-                <a16:creationId xmlns:a16="http://schemas.microsoft.com/office/drawing/2014/main" id="{E2C763C5-0AB2-4114-BFB8-63407AF9C411}"/>
+                <a16:creationId xmlns:a16="http://schemas.microsoft.com/office/drawing/2014/main" id="{0420FAC1-8219-43B4-A689-44234FCA19D0}"/>
               </a:ext>
             </a:extLst>
           </p:cNvPr>
@@ -9097,7 +9129,7 @@
             </a:avLst>
           </a:prstGeom>
           <a:solidFill xmlns:a="http://schemas.openxmlformats.org/drawingml/2006/main">
-            <a:srgbClr val="EEF7FF"/>
+            <a:srgbClr val="D1CFC9"/>
           </a:solidFill>
           <a:ln xmlns:a="http://schemas.openxmlformats.org/drawingml/2006/main" w="0">
             <a:noFill/>
@@ -9109,7 +9141,7 @@
           <p:cNvPr id="13" name="">
             <a:extLst xmlns:a="http://schemas.openxmlformats.org/drawingml/2006/main">
               <a:ext uri="{FF2B5EF4-FFF2-40B4-BE49-F238E27FC236}">
-                <a16:creationId xmlns:a16="http://schemas.microsoft.com/office/drawing/2014/main" id="{EB85D185-6371-47A3-BB71-5E368625A03C}"/>
+                <a16:creationId xmlns:a16="http://schemas.microsoft.com/office/drawing/2014/main" id="{B5AEF971-0871-432A-AABF-1126270B7806}"/>
               </a:ext>
             </a:extLst>
           </p:cNvPr>
@@ -9140,7 +9172,7 @@
             <a:pPr algn="ctr">
               <a:defRPr sz="1350" b="1">
                 <a:solidFill>
-                  <a:srgbClr val="2563EB"/>
+                  <a:srgbClr val="52677D"/>
                 </a:solidFill>
                 <a:latin typeface="Helvetica Neue"/>
                 <a:ea typeface="Helvetica Neue"/>
@@ -9150,7 +9182,7 @@
             <a:r>
               <a:rPr sz="1350" b="1">
                 <a:solidFill>
-                  <a:srgbClr val="2563EB"/>
+                  <a:srgbClr val="52677D"/>
                 </a:solidFill>
                 <a:latin typeface="Helvetica Neue"/>
                 <a:ea typeface="Helvetica Neue"/>
@@ -9166,7 +9198,7 @@
           <p:cNvPr id="14" name="">
             <a:extLst xmlns:a="http://schemas.openxmlformats.org/drawingml/2006/main">
               <a:ext uri="{FF2B5EF4-FFF2-40B4-BE49-F238E27FC236}">
-                <a16:creationId xmlns:a16="http://schemas.microsoft.com/office/drawing/2014/main" id="{0189CBBA-E27D-48DD-9A4A-94F890EF6C19}"/>
+                <a16:creationId xmlns:a16="http://schemas.microsoft.com/office/drawing/2014/main" id="{8007DC0A-5A6C-4ED2-A889-AFAEADE2B7FE}"/>
               </a:ext>
             </a:extLst>
           </p:cNvPr>
@@ -9197,7 +9229,7 @@
             <a:pPr algn="l">
               <a:defRPr sz="1575" b="0">
                 <a:solidFill>
-                  <a:srgbClr val="10213D"/>
+                  <a:srgbClr val="0F1A2B"/>
                 </a:solidFill>
                 <a:latin typeface="Helvetica Neue"/>
                 <a:ea typeface="Helvetica Neue"/>
@@ -9207,7 +9239,7 @@
             <a:r>
               <a:rPr sz="1575" b="0">
                 <a:solidFill>
-                  <a:srgbClr val="10213D"/>
+                  <a:srgbClr val="0F1A2B"/>
                 </a:solidFill>
                 <a:latin typeface="Helvetica Neue"/>
                 <a:ea typeface="Helvetica Neue"/>
@@ -9223,7 +9255,7 @@
           <p:cNvPr id="15" name="">
             <a:extLst xmlns:a="http://schemas.openxmlformats.org/drawingml/2006/main">
               <a:ext uri="{FF2B5EF4-FFF2-40B4-BE49-F238E27FC236}">
-                <a16:creationId xmlns:a16="http://schemas.microsoft.com/office/drawing/2014/main" id="{6B30FDD3-CA98-4E29-8D6C-8750CC38D2E9}"/>
+                <a16:creationId xmlns:a16="http://schemas.microsoft.com/office/drawing/2014/main" id="{6F7007D8-95CE-4021-BB69-E8AA965F0DE5}"/>
               </a:ext>
             </a:extLst>
           </p:cNvPr>
@@ -9243,7 +9275,7 @@
             </a:avLst>
           </a:prstGeom>
           <a:solidFill xmlns:a="http://schemas.openxmlformats.org/drawingml/2006/main">
-            <a:srgbClr val="EEF7FF"/>
+            <a:srgbClr val="D1CFC9"/>
           </a:solidFill>
           <a:ln xmlns:a="http://schemas.openxmlformats.org/drawingml/2006/main" w="0">
             <a:noFill/>
@@ -9255,7 +9287,7 @@
           <p:cNvPr id="16" name="">
             <a:extLst xmlns:a="http://schemas.openxmlformats.org/drawingml/2006/main">
               <a:ext uri="{FF2B5EF4-FFF2-40B4-BE49-F238E27FC236}">
-                <a16:creationId xmlns:a16="http://schemas.microsoft.com/office/drawing/2014/main" id="{20A1161E-25AA-4512-B211-3F9E356C73DC}"/>
+                <a16:creationId xmlns:a16="http://schemas.microsoft.com/office/drawing/2014/main" id="{6EC43C71-27A4-4F44-8E71-1D19BF2B13E3}"/>
               </a:ext>
             </a:extLst>
           </p:cNvPr>
@@ -9286,7 +9318,7 @@
             <a:pPr algn="l">
               <a:defRPr sz="1125" b="0">
                 <a:solidFill>
-                  <a:srgbClr val="092454"/>
+                  <a:srgbClr val="1C2E4A"/>
                 </a:solidFill>
                 <a:latin typeface="Helvetica Neue"/>
                 <a:ea typeface="Helvetica Neue"/>
@@ -9296,7 +9328,7 @@
             <a:r>
               <a:rPr sz="1125" b="0">
                 <a:solidFill>
-                  <a:srgbClr val="092454"/>
+                  <a:srgbClr val="1C2E4A"/>
                 </a:solidFill>
                 <a:latin typeface="Helvetica Neue"/>
                 <a:ea typeface="Helvetica Neue"/>
@@ -9312,7 +9344,7 @@
           <p:cNvPr id="17" name="">
             <a:extLst xmlns:a="http://schemas.openxmlformats.org/drawingml/2006/main">
               <a:ext uri="{FF2B5EF4-FFF2-40B4-BE49-F238E27FC236}">
-                <a16:creationId xmlns:a16="http://schemas.microsoft.com/office/drawing/2014/main" id="{116BE7E4-AA59-4F31-9E25-2BF52559CB1E}"/>
+                <a16:creationId xmlns:a16="http://schemas.microsoft.com/office/drawing/2014/main" id="{FDAFFF31-9667-42F8-87B2-42646EE6801F}"/>
               </a:ext>
             </a:extLst>
           </p:cNvPr>
@@ -9332,7 +9364,7 @@
             </a:avLst>
           </a:prstGeom>
           <a:solidFill xmlns:a="http://schemas.openxmlformats.org/drawingml/2006/main">
-            <a:srgbClr val="092454"/>
+            <a:srgbClr val="1C2E4A"/>
           </a:solidFill>
           <a:ln xmlns:a="http://schemas.openxmlformats.org/drawingml/2006/main" w="0">
             <a:noFill/>
@@ -9344,7 +9376,7 @@
           <p:cNvPr id="18" name="">
             <a:extLst xmlns:a="http://schemas.openxmlformats.org/drawingml/2006/main">
               <a:ext uri="{FF2B5EF4-FFF2-40B4-BE49-F238E27FC236}">
-                <a16:creationId xmlns:a16="http://schemas.microsoft.com/office/drawing/2014/main" id="{B9158980-11CC-4676-A5D6-4C5A5E31BA2A}"/>
+                <a16:creationId xmlns:a16="http://schemas.microsoft.com/office/drawing/2014/main" id="{9E98D4E6-FCD5-4B18-AA83-0A536F911AF9}"/>
               </a:ext>
             </a:extLst>
           </p:cNvPr>
@@ -9375,7 +9407,7 @@
             <a:pPr algn="l">
               <a:defRPr sz="1050" b="1">
                 <a:solidFill>
-                  <a:srgbClr val="FFD43B"/>
+                  <a:srgbClr val="D1CFC9"/>
                 </a:solidFill>
                 <a:latin typeface="Helvetica Neue"/>
                 <a:ea typeface="Helvetica Neue"/>
@@ -9385,7 +9417,7 @@
             <a:r>
               <a:rPr sz="1050" b="1">
                 <a:solidFill>
-                  <a:srgbClr val="FFD43B"/>
+                  <a:srgbClr val="D1CFC9"/>
                 </a:solidFill>
                 <a:latin typeface="Helvetica Neue"/>
                 <a:ea typeface="Helvetica Neue"/>
@@ -9401,7 +9433,7 @@
           <p:cNvPr id="19" name="">
             <a:extLst xmlns:a="http://schemas.openxmlformats.org/drawingml/2006/main">
               <a:ext uri="{FF2B5EF4-FFF2-40B4-BE49-F238E27FC236}">
-                <a16:creationId xmlns:a16="http://schemas.microsoft.com/office/drawing/2014/main" id="{C7C636C3-A224-4A63-835D-3C0503B08DBF}"/>
+                <a16:creationId xmlns:a16="http://schemas.microsoft.com/office/drawing/2014/main" id="{1398146C-F017-419A-8FD8-B8FEF6EC4D72}"/>
               </a:ext>
             </a:extLst>
           </p:cNvPr>
@@ -9458,7 +9490,7 @@
           <p:cNvPr id="20" name="">
             <a:extLst xmlns:a="http://schemas.openxmlformats.org/drawingml/2006/main">
               <a:ext uri="{FF2B5EF4-FFF2-40B4-BE49-F238E27FC236}">
-                <a16:creationId xmlns:a16="http://schemas.microsoft.com/office/drawing/2014/main" id="{0189FE33-EB31-49E4-8B81-64E659377ACF}"/>
+                <a16:creationId xmlns:a16="http://schemas.microsoft.com/office/drawing/2014/main" id="{99998088-8EF3-4A06-B228-72BBFF7070D1}"/>
               </a:ext>
             </a:extLst>
           </p:cNvPr>
@@ -9489,7 +9521,7 @@
             <a:pPr algn="l">
               <a:defRPr sz="1125" b="0">
                 <a:solidFill>
-                  <a:srgbClr val="BFE6FF"/>
+                  <a:srgbClr val="BDC4D4"/>
                 </a:solidFill>
                 <a:latin typeface="Helvetica Neue"/>
                 <a:ea typeface="Helvetica Neue"/>
@@ -9499,7 +9531,7 @@
             <a:r>
               <a:rPr sz="1125" b="0">
                 <a:solidFill>
-                  <a:srgbClr val="BFE6FF"/>
+                  <a:srgbClr val="BDC4D4"/>
                 </a:solidFill>
                 <a:latin typeface="Helvetica Neue"/>
                 <a:ea typeface="Helvetica Neue"/>
@@ -9515,7 +9547,7 @@
           <p:cNvPr id="21" name="">
             <a:extLst xmlns:a="http://schemas.openxmlformats.org/drawingml/2006/main">
               <a:ext uri="{FF2B5EF4-FFF2-40B4-BE49-F238E27FC236}">
-                <a16:creationId xmlns:a16="http://schemas.microsoft.com/office/drawing/2014/main" id="{27BA8F6A-1299-4B44-A3B0-63BF244FA68E}"/>
+                <a16:creationId xmlns:a16="http://schemas.microsoft.com/office/drawing/2014/main" id="{88AAE11B-E82D-4108-8C63-0E090C485036}"/>
               </a:ext>
             </a:extLst>
           </p:cNvPr>
@@ -9533,7 +9565,7 @@
             <a:avLst/>
           </a:prstGeom>
           <a:solidFill xmlns:a="http://schemas.openxmlformats.org/drawingml/2006/main">
-            <a:srgbClr val="D8E5F2"/>
+            <a:srgbClr val="BDC4D4"/>
           </a:solidFill>
           <a:ln xmlns:a="http://schemas.openxmlformats.org/drawingml/2006/main" w="0">
             <a:noFill/>
@@ -9545,7 +9577,7 @@
           <p:cNvPr id="22" name="">
             <a:extLst xmlns:a="http://schemas.openxmlformats.org/drawingml/2006/main">
               <a:ext uri="{FF2B5EF4-FFF2-40B4-BE49-F238E27FC236}">
-                <a16:creationId xmlns:a16="http://schemas.microsoft.com/office/drawing/2014/main" id="{CF9D8ED6-9464-4061-AC1D-85C30B616CC6}"/>
+                <a16:creationId xmlns:a16="http://schemas.microsoft.com/office/drawing/2014/main" id="{60C40BF7-D4F0-4CB6-A140-464F027B4DFC}"/>
               </a:ext>
             </a:extLst>
           </p:cNvPr>
@@ -9576,7 +9608,7 @@
             <a:pPr algn="l">
               <a:defRPr sz="750" b="0">
                 <a:solidFill>
-                  <a:srgbClr val="61718A"/>
+                  <a:srgbClr val="52677D"/>
                 </a:solidFill>
                 <a:latin typeface="Helvetica Neue"/>
                 <a:ea typeface="Helvetica Neue"/>
@@ -9586,7 +9618,7 @@
             <a:r>
               <a:rPr sz="750" b="0">
                 <a:solidFill>
-                  <a:srgbClr val="61718A"/>
+                  <a:srgbClr val="52677D"/>
                 </a:solidFill>
                 <a:latin typeface="Helvetica Neue"/>
                 <a:ea typeface="Helvetica Neue"/>
@@ -9602,7 +9634,7 @@
           <p:cNvPr id="23" name="">
             <a:extLst xmlns:a="http://schemas.openxmlformats.org/drawingml/2006/main">
               <a:ext uri="{FF2B5EF4-FFF2-40B4-BE49-F238E27FC236}">
-                <a16:creationId xmlns:a16="http://schemas.microsoft.com/office/drawing/2014/main" id="{10EA82CC-569E-4433-AD7B-8554C3B713F8}"/>
+                <a16:creationId xmlns:a16="http://schemas.microsoft.com/office/drawing/2014/main" id="{38F6E1DC-B319-4D95-AAAB-B3AD8B82698D}"/>
               </a:ext>
             </a:extLst>
           </p:cNvPr>
@@ -9633,7 +9665,7 @@
             <a:pPr algn="r">
               <a:defRPr sz="825" b="1">
                 <a:solidFill>
-                  <a:srgbClr val="2563EB"/>
+                  <a:srgbClr val="52677D"/>
                 </a:solidFill>
                 <a:latin typeface="Helvetica Neue"/>
                 <a:ea typeface="Helvetica Neue"/>
@@ -9643,7 +9675,7 @@
             <a:r>
               <a:rPr sz="825" b="1">
                 <a:solidFill>
-                  <a:srgbClr val="2563EB"/>
+                  <a:srgbClr val="52677D"/>
                 </a:solidFill>
                 <a:latin typeface="Helvetica Neue"/>
                 <a:ea typeface="Helvetica Neue"/>
@@ -9657,7 +9689,7 @@
     </p:spTree>
     <p:extLst>
       <p:ext uri="{BB962C8B-B14F-4D97-AF65-F5344CB8AC3E}">
-        <p14:creationId xmlns:p14="http://schemas.microsoft.com/office/powerpoint/2010/main" val="1915437546"/>
+        <p14:creationId xmlns:p14="http://schemas.microsoft.com/office/powerpoint/2010/main" val="1573643634"/>
       </p:ext>
     </p:extLst>
   </p:cSld>
@@ -9688,7 +9720,7 @@
           <p:cNvPr id="24" name="">
             <a:extLst xmlns:a="http://schemas.openxmlformats.org/drawingml/2006/main">
               <a:ext uri="{FF2B5EF4-FFF2-40B4-BE49-F238E27FC236}">
-                <a16:creationId xmlns:a16="http://schemas.microsoft.com/office/drawing/2014/main" id="{B3A83A09-E557-4664-81D1-20C6045D92E2}"/>
+                <a16:creationId xmlns:a16="http://schemas.microsoft.com/office/drawing/2014/main" id="{94758A27-EDEA-4FCF-B174-30EB36681C7B}"/>
               </a:ext>
             </a:extLst>
           </p:cNvPr>
@@ -9706,7 +9738,7 @@
             <a:avLst/>
           </a:prstGeom>
           <a:solidFill xmlns:a="http://schemas.openxmlformats.org/drawingml/2006/main">
-            <a:srgbClr val="092454"/>
+            <a:srgbClr val="1C2E4A"/>
           </a:solidFill>
           <a:ln xmlns:a="http://schemas.openxmlformats.org/drawingml/2006/main" w="0">
             <a:noFill/>
@@ -9718,7 +9750,7 @@
           <p:cNvPr id="2" name="">
             <a:extLst xmlns:a="http://schemas.openxmlformats.org/drawingml/2006/main">
               <a:ext uri="{FF2B5EF4-FFF2-40B4-BE49-F238E27FC236}">
-                <a16:creationId xmlns:a16="http://schemas.microsoft.com/office/drawing/2014/main" id="{A37CC5BB-E5C5-4136-BD76-AB6735447407}"/>
+                <a16:creationId xmlns:a16="http://schemas.microsoft.com/office/drawing/2014/main" id="{08B95433-F3DC-48B2-A415-CDA3E4BCD54B}"/>
               </a:ext>
             </a:extLst>
           </p:cNvPr>
@@ -9749,7 +9781,7 @@
             <a:pPr algn="l">
               <a:defRPr sz="1125" b="1">
                 <a:solidFill>
-                  <a:srgbClr val="2563EB"/>
+                  <a:srgbClr val="52677D"/>
                 </a:solidFill>
                 <a:latin typeface="Helvetica Neue"/>
                 <a:ea typeface="Helvetica Neue"/>
@@ -9759,7 +9791,7 @@
             <a:r>
               <a:rPr sz="1125" b="1">
                 <a:solidFill>
-                  <a:srgbClr val="2563EB"/>
+                  <a:srgbClr val="52677D"/>
                 </a:solidFill>
                 <a:latin typeface="Helvetica Neue"/>
                 <a:ea typeface="Helvetica Neue"/>
@@ -9775,7 +9807,7 @@
           <p:cNvPr id="3" name="">
             <a:extLst xmlns:a="http://schemas.openxmlformats.org/drawingml/2006/main">
               <a:ext uri="{FF2B5EF4-FFF2-40B4-BE49-F238E27FC236}">
-                <a16:creationId xmlns:a16="http://schemas.microsoft.com/office/drawing/2014/main" id="{02C32BB3-D747-4F9C-BF43-EAC71C1385DD}"/>
+                <a16:creationId xmlns:a16="http://schemas.microsoft.com/office/drawing/2014/main" id="{61D791D7-C699-41D7-8D15-F4A040910BE1}"/>
               </a:ext>
             </a:extLst>
           </p:cNvPr>
@@ -9795,7 +9827,7 @@
             </a:avLst>
           </a:prstGeom>
           <a:solidFill xmlns:a="http://schemas.openxmlformats.org/drawingml/2006/main">
-            <a:srgbClr val="FFD43B"/>
+            <a:srgbClr val="D1CFC9"/>
           </a:solidFill>
           <a:ln xmlns:a="http://schemas.openxmlformats.org/drawingml/2006/main" w="0">
             <a:noFill/>
@@ -9807,7 +9839,7 @@
           <p:cNvPr id="4" name="">
             <a:extLst xmlns:a="http://schemas.openxmlformats.org/drawingml/2006/main">
               <a:ext uri="{FF2B5EF4-FFF2-40B4-BE49-F238E27FC236}">
-                <a16:creationId xmlns:a16="http://schemas.microsoft.com/office/drawing/2014/main" id="{F7C15A37-EC98-494D-93C9-7C39628A81DA}"/>
+                <a16:creationId xmlns:a16="http://schemas.microsoft.com/office/drawing/2014/main" id="{CCBBFF43-A674-4BA7-8483-A922CAAA3AB3}"/>
               </a:ext>
             </a:extLst>
           </p:cNvPr>
@@ -9838,7 +9870,7 @@
             <a:pPr algn="ctr">
               <a:defRPr sz="1275" b="1">
                 <a:solidFill>
-                  <a:srgbClr val="092454"/>
+                  <a:srgbClr val="1C2E4A"/>
                 </a:solidFill>
                 <a:latin typeface="Helvetica Neue"/>
                 <a:ea typeface="Helvetica Neue"/>
@@ -9848,7 +9880,7 @@
             <a:r>
               <a:rPr sz="1275" b="1">
                 <a:solidFill>
-                  <a:srgbClr val="092454"/>
+                  <a:srgbClr val="1C2E4A"/>
                 </a:solidFill>
                 <a:latin typeface="Helvetica Neue"/>
                 <a:ea typeface="Helvetica Neue"/>
@@ -9864,7 +9896,7 @@
           <p:cNvPr id="5" name="">
             <a:extLst xmlns:a="http://schemas.openxmlformats.org/drawingml/2006/main">
               <a:ext uri="{FF2B5EF4-FFF2-40B4-BE49-F238E27FC236}">
-                <a16:creationId xmlns:a16="http://schemas.microsoft.com/office/drawing/2014/main" id="{77A6F4EE-79C9-41B1-8AF8-FB205555F808}"/>
+                <a16:creationId xmlns:a16="http://schemas.microsoft.com/office/drawing/2014/main" id="{1A9585BC-EF13-4ADC-BD70-6C98883FF45E}"/>
               </a:ext>
             </a:extLst>
           </p:cNvPr>
@@ -9895,7 +9927,7 @@
             <a:pPr algn="l">
               <a:defRPr sz="2550" b="1">
                 <a:solidFill>
-                  <a:srgbClr val="092454"/>
+                  <a:srgbClr val="1C2E4A"/>
                 </a:solidFill>
                 <a:latin typeface="Helvetica Neue"/>
                 <a:ea typeface="Helvetica Neue"/>
@@ -9905,7 +9937,7 @@
             <a:r>
               <a:rPr sz="2550" b="1">
                 <a:solidFill>
-                  <a:srgbClr val="092454"/>
+                  <a:srgbClr val="1C2E4A"/>
                 </a:solidFill>
                 <a:latin typeface="Helvetica Neue"/>
                 <a:ea typeface="Helvetica Neue"/>
@@ -9921,7 +9953,7 @@
           <p:cNvPr id="6" name="">
             <a:extLst xmlns:a="http://schemas.openxmlformats.org/drawingml/2006/main">
               <a:ext uri="{FF2B5EF4-FFF2-40B4-BE49-F238E27FC236}">
-                <a16:creationId xmlns:a16="http://schemas.microsoft.com/office/drawing/2014/main" id="{1C5CB956-2CD5-4DF2-9A9B-24FC3F929D96}"/>
+                <a16:creationId xmlns:a16="http://schemas.microsoft.com/office/drawing/2014/main" id="{50DF14FD-C7D6-4B81-8D01-C7D5498D4294}"/>
               </a:ext>
             </a:extLst>
           </p:cNvPr>
@@ -9941,7 +9973,7 @@
             </a:avLst>
           </a:prstGeom>
           <a:solidFill xmlns:a="http://schemas.openxmlformats.org/drawingml/2006/main">
-            <a:srgbClr val="EEF7FF"/>
+            <a:srgbClr val="D1CFC9"/>
           </a:solidFill>
           <a:ln xmlns:a="http://schemas.openxmlformats.org/drawingml/2006/main" w="0">
             <a:noFill/>
@@ -9953,7 +9985,7 @@
           <p:cNvPr id="7" name="">
             <a:extLst xmlns:a="http://schemas.openxmlformats.org/drawingml/2006/main">
               <a:ext uri="{FF2B5EF4-FFF2-40B4-BE49-F238E27FC236}">
-                <a16:creationId xmlns:a16="http://schemas.microsoft.com/office/drawing/2014/main" id="{8813F225-84B3-4F89-BF63-DEFBA98EA9F3}"/>
+                <a16:creationId xmlns:a16="http://schemas.microsoft.com/office/drawing/2014/main" id="{EE11E092-F6B6-4345-88E3-0B9DD25E2F1E}"/>
               </a:ext>
             </a:extLst>
           </p:cNvPr>
@@ -9984,7 +10016,7 @@
             <a:pPr algn="ctr">
               <a:defRPr sz="1350" b="1">
                 <a:solidFill>
-                  <a:srgbClr val="2563EB"/>
+                  <a:srgbClr val="52677D"/>
                 </a:solidFill>
                 <a:latin typeface="Helvetica Neue"/>
                 <a:ea typeface="Helvetica Neue"/>
@@ -9994,7 +10026,7 @@
             <a:r>
               <a:rPr sz="1350" b="1">
                 <a:solidFill>
-                  <a:srgbClr val="2563EB"/>
+                  <a:srgbClr val="52677D"/>
                 </a:solidFill>
                 <a:latin typeface="Helvetica Neue"/>
                 <a:ea typeface="Helvetica Neue"/>
@@ -10010,7 +10042,7 @@
           <p:cNvPr id="8" name="">
             <a:extLst xmlns:a="http://schemas.openxmlformats.org/drawingml/2006/main">
               <a:ext uri="{FF2B5EF4-FFF2-40B4-BE49-F238E27FC236}">
-                <a16:creationId xmlns:a16="http://schemas.microsoft.com/office/drawing/2014/main" id="{C312A62C-754C-4D55-8909-0CA330B290F5}"/>
+                <a16:creationId xmlns:a16="http://schemas.microsoft.com/office/drawing/2014/main" id="{D4AF8E90-8BD6-4375-8DE9-5DBEB8F9C2A5}"/>
               </a:ext>
             </a:extLst>
           </p:cNvPr>
@@ -10041,7 +10073,7 @@
             <a:pPr algn="l">
               <a:defRPr sz="1575" b="0">
                 <a:solidFill>
-                  <a:srgbClr val="10213D"/>
+                  <a:srgbClr val="0F1A2B"/>
                 </a:solidFill>
                 <a:latin typeface="Helvetica Neue"/>
                 <a:ea typeface="Helvetica Neue"/>
@@ -10051,7 +10083,7 @@
             <a:r>
               <a:rPr sz="1575" b="0">
                 <a:solidFill>
-                  <a:srgbClr val="10213D"/>
+                  <a:srgbClr val="0F1A2B"/>
                 </a:solidFill>
                 <a:latin typeface="Helvetica Neue"/>
                 <a:ea typeface="Helvetica Neue"/>
@@ -10067,7 +10099,7 @@
           <p:cNvPr id="9" name="">
             <a:extLst xmlns:a="http://schemas.openxmlformats.org/drawingml/2006/main">
               <a:ext uri="{FF2B5EF4-FFF2-40B4-BE49-F238E27FC236}">
-                <a16:creationId xmlns:a16="http://schemas.microsoft.com/office/drawing/2014/main" id="{CAED38CD-97CF-4064-A5AF-C202E0DCBA4D}"/>
+                <a16:creationId xmlns:a16="http://schemas.microsoft.com/office/drawing/2014/main" id="{87F41BA5-058D-4B0D-9240-9EB6341BC876}"/>
               </a:ext>
             </a:extLst>
           </p:cNvPr>
@@ -10087,7 +10119,7 @@
             </a:avLst>
           </a:prstGeom>
           <a:solidFill xmlns:a="http://schemas.openxmlformats.org/drawingml/2006/main">
-            <a:srgbClr val="EEF7FF"/>
+            <a:srgbClr val="D1CFC9"/>
           </a:solidFill>
           <a:ln xmlns:a="http://schemas.openxmlformats.org/drawingml/2006/main" w="0">
             <a:noFill/>
@@ -10099,7 +10131,7 @@
           <p:cNvPr id="10" name="">
             <a:extLst xmlns:a="http://schemas.openxmlformats.org/drawingml/2006/main">
               <a:ext uri="{FF2B5EF4-FFF2-40B4-BE49-F238E27FC236}">
-                <a16:creationId xmlns:a16="http://schemas.microsoft.com/office/drawing/2014/main" id="{27338BB7-B57E-44ED-BF87-F040B9472669}"/>
+                <a16:creationId xmlns:a16="http://schemas.microsoft.com/office/drawing/2014/main" id="{BF7BA407-7C6E-4E43-824F-92F47E3262DD}"/>
               </a:ext>
             </a:extLst>
           </p:cNvPr>
@@ -10130,7 +10162,7 @@
             <a:pPr algn="ctr">
               <a:defRPr sz="1350" b="1">
                 <a:solidFill>
-                  <a:srgbClr val="2563EB"/>
+                  <a:srgbClr val="52677D"/>
                 </a:solidFill>
                 <a:latin typeface="Helvetica Neue"/>
                 <a:ea typeface="Helvetica Neue"/>
@@ -10140,7 +10172,7 @@
             <a:r>
               <a:rPr sz="1350" b="1">
                 <a:solidFill>
-                  <a:srgbClr val="2563EB"/>
+                  <a:srgbClr val="52677D"/>
                 </a:solidFill>
                 <a:latin typeface="Helvetica Neue"/>
                 <a:ea typeface="Helvetica Neue"/>
@@ -10156,7 +10188,7 @@
           <p:cNvPr id="11" name="">
             <a:extLst xmlns:a="http://schemas.openxmlformats.org/drawingml/2006/main">
               <a:ext uri="{FF2B5EF4-FFF2-40B4-BE49-F238E27FC236}">
-                <a16:creationId xmlns:a16="http://schemas.microsoft.com/office/drawing/2014/main" id="{82DC017A-EB1D-4988-98F5-B99B1B23565B}"/>
+                <a16:creationId xmlns:a16="http://schemas.microsoft.com/office/drawing/2014/main" id="{5CD482F9-867E-415D-A4DF-EEB98262D54B}"/>
               </a:ext>
             </a:extLst>
           </p:cNvPr>
@@ -10187,7 +10219,7 @@
             <a:pPr algn="l">
               <a:defRPr sz="1575" b="0">
                 <a:solidFill>
-                  <a:srgbClr val="10213D"/>
+                  <a:srgbClr val="0F1A2B"/>
                 </a:solidFill>
                 <a:latin typeface="Helvetica Neue"/>
                 <a:ea typeface="Helvetica Neue"/>
@@ -10197,7 +10229,7 @@
             <a:r>
               <a:rPr sz="1575" b="0">
                 <a:solidFill>
-                  <a:srgbClr val="10213D"/>
+                  <a:srgbClr val="0F1A2B"/>
                 </a:solidFill>
                 <a:latin typeface="Helvetica Neue"/>
                 <a:ea typeface="Helvetica Neue"/>
@@ -10213,7 +10245,7 @@
           <p:cNvPr id="12" name="">
             <a:extLst xmlns:a="http://schemas.openxmlformats.org/drawingml/2006/main">
               <a:ext uri="{FF2B5EF4-FFF2-40B4-BE49-F238E27FC236}">
-                <a16:creationId xmlns:a16="http://schemas.microsoft.com/office/drawing/2014/main" id="{B8409466-8D86-47BA-AEE6-9E909AB06F60}"/>
+                <a16:creationId xmlns:a16="http://schemas.microsoft.com/office/drawing/2014/main" id="{A798D229-9F3D-46E7-B3E5-3A203B4CB6D4}"/>
               </a:ext>
             </a:extLst>
           </p:cNvPr>
@@ -10233,7 +10265,7 @@
             </a:avLst>
           </a:prstGeom>
           <a:solidFill xmlns:a="http://schemas.openxmlformats.org/drawingml/2006/main">
-            <a:srgbClr val="EEF7FF"/>
+            <a:srgbClr val="D1CFC9"/>
           </a:solidFill>
           <a:ln xmlns:a="http://schemas.openxmlformats.org/drawingml/2006/main" w="0">
             <a:noFill/>
@@ -10245,7 +10277,7 @@
           <p:cNvPr id="13" name="">
             <a:extLst xmlns:a="http://schemas.openxmlformats.org/drawingml/2006/main">
               <a:ext uri="{FF2B5EF4-FFF2-40B4-BE49-F238E27FC236}">
-                <a16:creationId xmlns:a16="http://schemas.microsoft.com/office/drawing/2014/main" id="{8698D0C9-DCE7-4082-9F88-E29F45B49F2B}"/>
+                <a16:creationId xmlns:a16="http://schemas.microsoft.com/office/drawing/2014/main" id="{5AAC3646-65B7-4DE2-A6C5-B5CAE84F7A83}"/>
               </a:ext>
             </a:extLst>
           </p:cNvPr>
@@ -10276,7 +10308,7 @@
             <a:pPr algn="ctr">
               <a:defRPr sz="1350" b="1">
                 <a:solidFill>
-                  <a:srgbClr val="2563EB"/>
+                  <a:srgbClr val="52677D"/>
                 </a:solidFill>
                 <a:latin typeface="Helvetica Neue"/>
                 <a:ea typeface="Helvetica Neue"/>
@@ -10286,7 +10318,7 @@
             <a:r>
               <a:rPr sz="1350" b="1">
                 <a:solidFill>
-                  <a:srgbClr val="2563EB"/>
+                  <a:srgbClr val="52677D"/>
                 </a:solidFill>
                 <a:latin typeface="Helvetica Neue"/>
                 <a:ea typeface="Helvetica Neue"/>
@@ -10302,7 +10334,7 @@
           <p:cNvPr id="14" name="">
             <a:extLst xmlns:a="http://schemas.openxmlformats.org/drawingml/2006/main">
               <a:ext uri="{FF2B5EF4-FFF2-40B4-BE49-F238E27FC236}">
-                <a16:creationId xmlns:a16="http://schemas.microsoft.com/office/drawing/2014/main" id="{3240309B-E480-4987-AB2D-F71577F0A603}"/>
+                <a16:creationId xmlns:a16="http://schemas.microsoft.com/office/drawing/2014/main" id="{1F7C63B7-94F4-4790-B5ED-C2D734675411}"/>
               </a:ext>
             </a:extLst>
           </p:cNvPr>
@@ -10333,7 +10365,7 @@
             <a:pPr algn="l">
               <a:defRPr sz="1575" b="0">
                 <a:solidFill>
-                  <a:srgbClr val="10213D"/>
+                  <a:srgbClr val="0F1A2B"/>
                 </a:solidFill>
                 <a:latin typeface="Helvetica Neue"/>
                 <a:ea typeface="Helvetica Neue"/>
@@ -10343,7 +10375,7 @@
             <a:r>
               <a:rPr sz="1575" b="0">
                 <a:solidFill>
-                  <a:srgbClr val="10213D"/>
+                  <a:srgbClr val="0F1A2B"/>
                 </a:solidFill>
                 <a:latin typeface="Helvetica Neue"/>
                 <a:ea typeface="Helvetica Neue"/>
@@ -10359,7 +10391,7 @@
           <p:cNvPr id="15" name="">
             <a:extLst xmlns:a="http://schemas.openxmlformats.org/drawingml/2006/main">
               <a:ext uri="{FF2B5EF4-FFF2-40B4-BE49-F238E27FC236}">
-                <a16:creationId xmlns:a16="http://schemas.microsoft.com/office/drawing/2014/main" id="{0AC3C1D5-11F9-4E18-AA86-9287C09A9B3E}"/>
+                <a16:creationId xmlns:a16="http://schemas.microsoft.com/office/drawing/2014/main" id="{7F356809-3A3A-47AB-AD4E-1FAC59C33581}"/>
               </a:ext>
             </a:extLst>
           </p:cNvPr>
@@ -10379,7 +10411,7 @@
             </a:avLst>
           </a:prstGeom>
           <a:solidFill xmlns:a="http://schemas.openxmlformats.org/drawingml/2006/main">
-            <a:srgbClr val="EEF7FF"/>
+            <a:srgbClr val="D1CFC9"/>
           </a:solidFill>
           <a:ln xmlns:a="http://schemas.openxmlformats.org/drawingml/2006/main" w="0">
             <a:noFill/>
@@ -10391,7 +10423,7 @@
           <p:cNvPr id="16" name="">
             <a:extLst xmlns:a="http://schemas.openxmlformats.org/drawingml/2006/main">
               <a:ext uri="{FF2B5EF4-FFF2-40B4-BE49-F238E27FC236}">
-                <a16:creationId xmlns:a16="http://schemas.microsoft.com/office/drawing/2014/main" id="{AFFD5C90-D628-4EEE-A3DB-6283E7A20C4D}"/>
+                <a16:creationId xmlns:a16="http://schemas.microsoft.com/office/drawing/2014/main" id="{99B62AFE-F9FC-4293-B16E-5AAE1B15AF45}"/>
               </a:ext>
             </a:extLst>
           </p:cNvPr>
@@ -10422,7 +10454,7 @@
             <a:pPr algn="l">
               <a:defRPr sz="1125" b="0">
                 <a:solidFill>
-                  <a:srgbClr val="092454"/>
+                  <a:srgbClr val="1C2E4A"/>
                 </a:solidFill>
                 <a:latin typeface="Helvetica Neue"/>
                 <a:ea typeface="Helvetica Neue"/>
@@ -10432,7 +10464,7 @@
             <a:r>
               <a:rPr sz="1125" b="0">
                 <a:solidFill>
-                  <a:srgbClr val="092454"/>
+                  <a:srgbClr val="1C2E4A"/>
                 </a:solidFill>
                 <a:latin typeface="Helvetica Neue"/>
                 <a:ea typeface="Helvetica Neue"/>
@@ -10448,7 +10480,7 @@
           <p:cNvPr id="17" name="">
             <a:extLst xmlns:a="http://schemas.openxmlformats.org/drawingml/2006/main">
               <a:ext uri="{FF2B5EF4-FFF2-40B4-BE49-F238E27FC236}">
-                <a16:creationId xmlns:a16="http://schemas.microsoft.com/office/drawing/2014/main" id="{847E6C0A-F58E-4419-9204-AA7299F025FA}"/>
+                <a16:creationId xmlns:a16="http://schemas.microsoft.com/office/drawing/2014/main" id="{74A7E01D-62B7-4624-B53F-D85063318DFE}"/>
               </a:ext>
             </a:extLst>
           </p:cNvPr>
@@ -10468,7 +10500,7 @@
             </a:avLst>
           </a:prstGeom>
           <a:solidFill xmlns:a="http://schemas.openxmlformats.org/drawingml/2006/main">
-            <a:srgbClr val="092454"/>
+            <a:srgbClr val="1C2E4A"/>
           </a:solidFill>
           <a:ln xmlns:a="http://schemas.openxmlformats.org/drawingml/2006/main" w="0">
             <a:noFill/>
@@ -10480,7 +10512,7 @@
           <p:cNvPr id="18" name="">
             <a:extLst xmlns:a="http://schemas.openxmlformats.org/drawingml/2006/main">
               <a:ext uri="{FF2B5EF4-FFF2-40B4-BE49-F238E27FC236}">
-                <a16:creationId xmlns:a16="http://schemas.microsoft.com/office/drawing/2014/main" id="{04DBE9D7-FFE6-4A37-91E1-CDE3E46E7587}"/>
+                <a16:creationId xmlns:a16="http://schemas.microsoft.com/office/drawing/2014/main" id="{EDEB658A-6534-4821-B191-588A00997099}"/>
               </a:ext>
             </a:extLst>
           </p:cNvPr>
@@ -10511,7 +10543,7 @@
             <a:pPr algn="l">
               <a:defRPr sz="1050" b="1">
                 <a:solidFill>
-                  <a:srgbClr val="FFD43B"/>
+                  <a:srgbClr val="D1CFC9"/>
                 </a:solidFill>
                 <a:latin typeface="Helvetica Neue"/>
                 <a:ea typeface="Helvetica Neue"/>
@@ -10521,7 +10553,7 @@
             <a:r>
               <a:rPr sz="1050" b="1">
                 <a:solidFill>
-                  <a:srgbClr val="FFD43B"/>
+                  <a:srgbClr val="D1CFC9"/>
                 </a:solidFill>
                 <a:latin typeface="Helvetica Neue"/>
                 <a:ea typeface="Helvetica Neue"/>
@@ -10537,7 +10569,7 @@
           <p:cNvPr id="19" name="">
             <a:extLst xmlns:a="http://schemas.openxmlformats.org/drawingml/2006/main">
               <a:ext uri="{FF2B5EF4-FFF2-40B4-BE49-F238E27FC236}">
-                <a16:creationId xmlns:a16="http://schemas.microsoft.com/office/drawing/2014/main" id="{8BEE5882-CBEB-4479-B070-E41A6599A2D4}"/>
+                <a16:creationId xmlns:a16="http://schemas.microsoft.com/office/drawing/2014/main" id="{4EC42942-37C5-4C5B-AE34-CB5D1177E012}"/>
               </a:ext>
             </a:extLst>
           </p:cNvPr>
@@ -10594,7 +10626,7 @@
           <p:cNvPr id="20" name="">
             <a:extLst xmlns:a="http://schemas.openxmlformats.org/drawingml/2006/main">
               <a:ext uri="{FF2B5EF4-FFF2-40B4-BE49-F238E27FC236}">
-                <a16:creationId xmlns:a16="http://schemas.microsoft.com/office/drawing/2014/main" id="{2F827FD6-E1D8-47FC-A0DA-340B3DD9235A}"/>
+                <a16:creationId xmlns:a16="http://schemas.microsoft.com/office/drawing/2014/main" id="{275B8466-130A-42FF-A630-15DDE8E8467B}"/>
               </a:ext>
             </a:extLst>
           </p:cNvPr>
@@ -10625,7 +10657,7 @@
             <a:pPr algn="l">
               <a:defRPr sz="1125" b="0">
                 <a:solidFill>
-                  <a:srgbClr val="BFE6FF"/>
+                  <a:srgbClr val="BDC4D4"/>
                 </a:solidFill>
                 <a:latin typeface="Helvetica Neue"/>
                 <a:ea typeface="Helvetica Neue"/>
@@ -10635,7 +10667,7 @@
             <a:r>
               <a:rPr sz="1125" b="0">
                 <a:solidFill>
-                  <a:srgbClr val="BFE6FF"/>
+                  <a:srgbClr val="BDC4D4"/>
                 </a:solidFill>
                 <a:latin typeface="Helvetica Neue"/>
                 <a:ea typeface="Helvetica Neue"/>
@@ -10651,7 +10683,7 @@
           <p:cNvPr id="21" name="">
             <a:extLst xmlns:a="http://schemas.openxmlformats.org/drawingml/2006/main">
               <a:ext uri="{FF2B5EF4-FFF2-40B4-BE49-F238E27FC236}">
-                <a16:creationId xmlns:a16="http://schemas.microsoft.com/office/drawing/2014/main" id="{DE63D772-24D5-4BA9-84F5-7394F9F78170}"/>
+                <a16:creationId xmlns:a16="http://schemas.microsoft.com/office/drawing/2014/main" id="{0434A0D9-77AE-4608-B0D9-894C665A1247}"/>
               </a:ext>
             </a:extLst>
           </p:cNvPr>
@@ -10669,7 +10701,7 @@
             <a:avLst/>
           </a:prstGeom>
           <a:solidFill xmlns:a="http://schemas.openxmlformats.org/drawingml/2006/main">
-            <a:srgbClr val="D8E5F2"/>
+            <a:srgbClr val="BDC4D4"/>
           </a:solidFill>
           <a:ln xmlns:a="http://schemas.openxmlformats.org/drawingml/2006/main" w="0">
             <a:noFill/>
@@ -10681,7 +10713,7 @@
           <p:cNvPr id="22" name="">
             <a:extLst xmlns:a="http://schemas.openxmlformats.org/drawingml/2006/main">
               <a:ext uri="{FF2B5EF4-FFF2-40B4-BE49-F238E27FC236}">
-                <a16:creationId xmlns:a16="http://schemas.microsoft.com/office/drawing/2014/main" id="{A9DF527A-50AB-4CE7-8F17-00CA5E42645E}"/>
+                <a16:creationId xmlns:a16="http://schemas.microsoft.com/office/drawing/2014/main" id="{07D48CB6-BACF-4525-9E3E-50BABA5009E4}"/>
               </a:ext>
             </a:extLst>
           </p:cNvPr>
@@ -10712,7 +10744,7 @@
             <a:pPr algn="l">
               <a:defRPr sz="750" b="0">
                 <a:solidFill>
-                  <a:srgbClr val="61718A"/>
+                  <a:srgbClr val="52677D"/>
                 </a:solidFill>
                 <a:latin typeface="Helvetica Neue"/>
                 <a:ea typeface="Helvetica Neue"/>
@@ -10722,7 +10754,7 @@
             <a:r>
               <a:rPr sz="750" b="0">
                 <a:solidFill>
-                  <a:srgbClr val="61718A"/>
+                  <a:srgbClr val="52677D"/>
                 </a:solidFill>
                 <a:latin typeface="Helvetica Neue"/>
                 <a:ea typeface="Helvetica Neue"/>
@@ -10738,7 +10770,7 @@
           <p:cNvPr id="23" name="">
             <a:extLst xmlns:a="http://schemas.openxmlformats.org/drawingml/2006/main">
               <a:ext uri="{FF2B5EF4-FFF2-40B4-BE49-F238E27FC236}">
-                <a16:creationId xmlns:a16="http://schemas.microsoft.com/office/drawing/2014/main" id="{6A586BED-6B60-49FE-9583-1BA4D153844D}"/>
+                <a16:creationId xmlns:a16="http://schemas.microsoft.com/office/drawing/2014/main" id="{059E8263-7B8B-421D-9E99-6B8FB0FD25FC}"/>
               </a:ext>
             </a:extLst>
           </p:cNvPr>
@@ -10769,7 +10801,7 @@
             <a:pPr algn="r">
               <a:defRPr sz="825" b="1">
                 <a:solidFill>
-                  <a:srgbClr val="2563EB"/>
+                  <a:srgbClr val="52677D"/>
                 </a:solidFill>
                 <a:latin typeface="Helvetica Neue"/>
                 <a:ea typeface="Helvetica Neue"/>
@@ -10779,7 +10811,7 @@
             <a:r>
               <a:rPr sz="825" b="1">
                 <a:solidFill>
-                  <a:srgbClr val="2563EB"/>
+                  <a:srgbClr val="52677D"/>
                 </a:solidFill>
                 <a:latin typeface="Helvetica Neue"/>
                 <a:ea typeface="Helvetica Neue"/>
@@ -10793,7 +10825,7 @@
     </p:spTree>
     <p:extLst>
       <p:ext uri="{BB962C8B-B14F-4D97-AF65-F5344CB8AC3E}">
-        <p14:creationId xmlns:p14="http://schemas.microsoft.com/office/powerpoint/2010/main" val="743133720"/>
+        <p14:creationId xmlns:p14="http://schemas.microsoft.com/office/powerpoint/2010/main" val="1050572022"/>
       </p:ext>
     </p:extLst>
   </p:cSld>
@@ -10824,7 +10856,7 @@
           <p:cNvPr id="24" name="">
             <a:extLst xmlns:a="http://schemas.openxmlformats.org/drawingml/2006/main">
               <a:ext uri="{FF2B5EF4-FFF2-40B4-BE49-F238E27FC236}">
-                <a16:creationId xmlns:a16="http://schemas.microsoft.com/office/drawing/2014/main" id="{A3608A64-FB1C-4726-8C55-3687B55FD905}"/>
+                <a16:creationId xmlns:a16="http://schemas.microsoft.com/office/drawing/2014/main" id="{690B48A3-AC9F-4B8E-BA67-6E9C128C92E1}"/>
               </a:ext>
             </a:extLst>
           </p:cNvPr>
@@ -10842,7 +10874,7 @@
             <a:avLst/>
           </a:prstGeom>
           <a:solidFill xmlns:a="http://schemas.openxmlformats.org/drawingml/2006/main">
-            <a:srgbClr val="6C5CE7"/>
+            <a:srgbClr val="1C2E4A"/>
           </a:solidFill>
           <a:ln xmlns:a="http://schemas.openxmlformats.org/drawingml/2006/main" w="0">
             <a:noFill/>
@@ -10854,7 +10886,7 @@
           <p:cNvPr id="2" name="">
             <a:extLst xmlns:a="http://schemas.openxmlformats.org/drawingml/2006/main">
               <a:ext uri="{FF2B5EF4-FFF2-40B4-BE49-F238E27FC236}">
-                <a16:creationId xmlns:a16="http://schemas.microsoft.com/office/drawing/2014/main" id="{349612BD-1DD7-426C-8C54-F532DF7C60DD}"/>
+                <a16:creationId xmlns:a16="http://schemas.microsoft.com/office/drawing/2014/main" id="{97F9C1CE-2858-4321-B809-0143756A39AB}"/>
               </a:ext>
             </a:extLst>
           </p:cNvPr>
@@ -10885,7 +10917,7 @@
             <a:pPr algn="l">
               <a:defRPr sz="1125" b="1">
                 <a:solidFill>
-                  <a:srgbClr val="2563EB"/>
+                  <a:srgbClr val="52677D"/>
                 </a:solidFill>
                 <a:latin typeface="Helvetica Neue"/>
                 <a:ea typeface="Helvetica Neue"/>
@@ -10895,7 +10927,7 @@
             <a:r>
               <a:rPr sz="1125" b="1">
                 <a:solidFill>
-                  <a:srgbClr val="2563EB"/>
+                  <a:srgbClr val="52677D"/>
                 </a:solidFill>
                 <a:latin typeface="Helvetica Neue"/>
                 <a:ea typeface="Helvetica Neue"/>
@@ -10911,7 +10943,7 @@
           <p:cNvPr id="3" name="">
             <a:extLst xmlns:a="http://schemas.openxmlformats.org/drawingml/2006/main">
               <a:ext uri="{FF2B5EF4-FFF2-40B4-BE49-F238E27FC236}">
-                <a16:creationId xmlns:a16="http://schemas.microsoft.com/office/drawing/2014/main" id="{9B666F0C-DECC-4182-AC6E-7FFD77C11A03}"/>
+                <a16:creationId xmlns:a16="http://schemas.microsoft.com/office/drawing/2014/main" id="{A25FE307-DEE7-438D-A216-89540EE397B1}"/>
               </a:ext>
             </a:extLst>
           </p:cNvPr>
@@ -10931,7 +10963,7 @@
             </a:avLst>
           </a:prstGeom>
           <a:solidFill xmlns:a="http://schemas.openxmlformats.org/drawingml/2006/main">
-            <a:srgbClr val="FFD43B"/>
+            <a:srgbClr val="D1CFC9"/>
           </a:solidFill>
           <a:ln xmlns:a="http://schemas.openxmlformats.org/drawingml/2006/main" w="0">
             <a:noFill/>
@@ -10943,7 +10975,7 @@
           <p:cNvPr id="4" name="">
             <a:extLst xmlns:a="http://schemas.openxmlformats.org/drawingml/2006/main">
               <a:ext uri="{FF2B5EF4-FFF2-40B4-BE49-F238E27FC236}">
-                <a16:creationId xmlns:a16="http://schemas.microsoft.com/office/drawing/2014/main" id="{565EFDDB-FF48-43F2-B7E7-73377015D7F6}"/>
+                <a16:creationId xmlns:a16="http://schemas.microsoft.com/office/drawing/2014/main" id="{C679790E-1C6E-4F6E-9B2A-DFB3F37F9BB2}"/>
               </a:ext>
             </a:extLst>
           </p:cNvPr>
@@ -10974,7 +11006,7 @@
             <a:pPr algn="ctr">
               <a:defRPr sz="1275" b="1">
                 <a:solidFill>
-                  <a:srgbClr val="092454"/>
+                  <a:srgbClr val="1C2E4A"/>
                 </a:solidFill>
                 <a:latin typeface="Helvetica Neue"/>
                 <a:ea typeface="Helvetica Neue"/>
@@ -10984,7 +11016,7 @@
             <a:r>
               <a:rPr sz="1275" b="1">
                 <a:solidFill>
-                  <a:srgbClr val="092454"/>
+                  <a:srgbClr val="1C2E4A"/>
                 </a:solidFill>
                 <a:latin typeface="Helvetica Neue"/>
                 <a:ea typeface="Helvetica Neue"/>
@@ -11000,7 +11032,7 @@
           <p:cNvPr id="5" name="">
             <a:extLst xmlns:a="http://schemas.openxmlformats.org/drawingml/2006/main">
               <a:ext uri="{FF2B5EF4-FFF2-40B4-BE49-F238E27FC236}">
-                <a16:creationId xmlns:a16="http://schemas.microsoft.com/office/drawing/2014/main" id="{C2641D67-6957-4F63-937F-F34326650BA2}"/>
+                <a16:creationId xmlns:a16="http://schemas.microsoft.com/office/drawing/2014/main" id="{75382CCE-E185-4E7C-A3AC-80F051A11C7D}"/>
               </a:ext>
             </a:extLst>
           </p:cNvPr>
@@ -11031,7 +11063,7 @@
             <a:pPr algn="l">
               <a:defRPr sz="2550" b="1">
                 <a:solidFill>
-                  <a:srgbClr val="092454"/>
+                  <a:srgbClr val="1C2E4A"/>
                 </a:solidFill>
                 <a:latin typeface="Helvetica Neue"/>
                 <a:ea typeface="Helvetica Neue"/>
@@ -11041,7 +11073,7 @@
             <a:r>
               <a:rPr sz="2550" b="1">
                 <a:solidFill>
-                  <a:srgbClr val="092454"/>
+                  <a:srgbClr val="1C2E4A"/>
                 </a:solidFill>
                 <a:latin typeface="Helvetica Neue"/>
                 <a:ea typeface="Helvetica Neue"/>
@@ -11057,7 +11089,7 @@
           <p:cNvPr id="6" name="">
             <a:extLst xmlns:a="http://schemas.openxmlformats.org/drawingml/2006/main">
               <a:ext uri="{FF2B5EF4-FFF2-40B4-BE49-F238E27FC236}">
-                <a16:creationId xmlns:a16="http://schemas.microsoft.com/office/drawing/2014/main" id="{72782133-0EC9-46AA-898C-797DE445949C}"/>
+                <a16:creationId xmlns:a16="http://schemas.microsoft.com/office/drawing/2014/main" id="{C86062EA-2086-4D22-9652-BC00338FE2CF}"/>
               </a:ext>
             </a:extLst>
           </p:cNvPr>
@@ -11077,7 +11109,7 @@
             </a:avLst>
           </a:prstGeom>
           <a:solidFill xmlns:a="http://schemas.openxmlformats.org/drawingml/2006/main">
-            <a:srgbClr val="EEF7FF"/>
+            <a:srgbClr val="D1CFC9"/>
           </a:solidFill>
           <a:ln xmlns:a="http://schemas.openxmlformats.org/drawingml/2006/main" w="0">
             <a:noFill/>
@@ -11089,7 +11121,7 @@
           <p:cNvPr id="7" name="">
             <a:extLst xmlns:a="http://schemas.openxmlformats.org/drawingml/2006/main">
               <a:ext uri="{FF2B5EF4-FFF2-40B4-BE49-F238E27FC236}">
-                <a16:creationId xmlns:a16="http://schemas.microsoft.com/office/drawing/2014/main" id="{081E0B08-3E8A-400B-A542-DAD06F34E258}"/>
+                <a16:creationId xmlns:a16="http://schemas.microsoft.com/office/drawing/2014/main" id="{5E12E412-CB7D-4C97-A039-405D47AE5C89}"/>
               </a:ext>
             </a:extLst>
           </p:cNvPr>
@@ -11120,7 +11152,7 @@
             <a:pPr algn="ctr">
               <a:defRPr sz="1350" b="1">
                 <a:solidFill>
-                  <a:srgbClr val="2563EB"/>
+                  <a:srgbClr val="52677D"/>
                 </a:solidFill>
                 <a:latin typeface="Helvetica Neue"/>
                 <a:ea typeface="Helvetica Neue"/>
@@ -11130,7 +11162,7 @@
             <a:r>
               <a:rPr sz="1350" b="1">
                 <a:solidFill>
-                  <a:srgbClr val="2563EB"/>
+                  <a:srgbClr val="52677D"/>
                 </a:solidFill>
                 <a:latin typeface="Helvetica Neue"/>
                 <a:ea typeface="Helvetica Neue"/>
@@ -11146,7 +11178,7 @@
           <p:cNvPr id="8" name="">
             <a:extLst xmlns:a="http://schemas.openxmlformats.org/drawingml/2006/main">
               <a:ext uri="{FF2B5EF4-FFF2-40B4-BE49-F238E27FC236}">
-                <a16:creationId xmlns:a16="http://schemas.microsoft.com/office/drawing/2014/main" id="{EF11B8B4-492F-48F1-90B2-F53508466851}"/>
+                <a16:creationId xmlns:a16="http://schemas.microsoft.com/office/drawing/2014/main" id="{833E2654-EBE6-47A2-B491-CAAE6D39CE68}"/>
               </a:ext>
             </a:extLst>
           </p:cNvPr>
@@ -11177,7 +11209,7 @@
             <a:pPr algn="l">
               <a:defRPr sz="1575" b="0">
                 <a:solidFill>
-                  <a:srgbClr val="10213D"/>
+                  <a:srgbClr val="0F1A2B"/>
                 </a:solidFill>
                 <a:latin typeface="Helvetica Neue"/>
                 <a:ea typeface="Helvetica Neue"/>
@@ -11187,7 +11219,7 @@
             <a:r>
               <a:rPr sz="1575" b="0">
                 <a:solidFill>
-                  <a:srgbClr val="10213D"/>
+                  <a:srgbClr val="0F1A2B"/>
                 </a:solidFill>
                 <a:latin typeface="Helvetica Neue"/>
                 <a:ea typeface="Helvetica Neue"/>
@@ -11203,7 +11235,7 @@
           <p:cNvPr id="9" name="">
             <a:extLst xmlns:a="http://schemas.openxmlformats.org/drawingml/2006/main">
               <a:ext uri="{FF2B5EF4-FFF2-40B4-BE49-F238E27FC236}">
-                <a16:creationId xmlns:a16="http://schemas.microsoft.com/office/drawing/2014/main" id="{BB687D4A-C010-45D5-8FA9-550F9DE978F7}"/>
+                <a16:creationId xmlns:a16="http://schemas.microsoft.com/office/drawing/2014/main" id="{AA3D8930-413B-4D57-BE04-0354F541B13C}"/>
               </a:ext>
             </a:extLst>
           </p:cNvPr>
@@ -11223,7 +11255,7 @@
             </a:avLst>
           </a:prstGeom>
           <a:solidFill xmlns:a="http://schemas.openxmlformats.org/drawingml/2006/main">
-            <a:srgbClr val="EEF7FF"/>
+            <a:srgbClr val="D1CFC9"/>
           </a:solidFill>
           <a:ln xmlns:a="http://schemas.openxmlformats.org/drawingml/2006/main" w="0">
             <a:noFill/>
@@ -11235,7 +11267,7 @@
           <p:cNvPr id="10" name="">
             <a:extLst xmlns:a="http://schemas.openxmlformats.org/drawingml/2006/main">
               <a:ext uri="{FF2B5EF4-FFF2-40B4-BE49-F238E27FC236}">
-                <a16:creationId xmlns:a16="http://schemas.microsoft.com/office/drawing/2014/main" id="{761F6AEE-E0EE-4451-9412-5EC208FD3ACF}"/>
+                <a16:creationId xmlns:a16="http://schemas.microsoft.com/office/drawing/2014/main" id="{87FBF0CE-E8D1-467F-98C9-51C2EB60D809}"/>
               </a:ext>
             </a:extLst>
           </p:cNvPr>
@@ -11266,7 +11298,7 @@
             <a:pPr algn="ctr">
               <a:defRPr sz="1350" b="1">
                 <a:solidFill>
-                  <a:srgbClr val="2563EB"/>
+                  <a:srgbClr val="52677D"/>
                 </a:solidFill>
                 <a:latin typeface="Helvetica Neue"/>
                 <a:ea typeface="Helvetica Neue"/>
@@ -11276,7 +11308,7 @@
             <a:r>
               <a:rPr sz="1350" b="1">
                 <a:solidFill>
-                  <a:srgbClr val="2563EB"/>
+                  <a:srgbClr val="52677D"/>
                 </a:solidFill>
                 <a:latin typeface="Helvetica Neue"/>
                 <a:ea typeface="Helvetica Neue"/>
@@ -11292,7 +11324,7 @@
           <p:cNvPr id="11" name="">
             <a:extLst xmlns:a="http://schemas.openxmlformats.org/drawingml/2006/main">
               <a:ext uri="{FF2B5EF4-FFF2-40B4-BE49-F238E27FC236}">
-                <a16:creationId xmlns:a16="http://schemas.microsoft.com/office/drawing/2014/main" id="{EC7DB24B-4E50-4AD6-B436-35883EA1EF2C}"/>
+                <a16:creationId xmlns:a16="http://schemas.microsoft.com/office/drawing/2014/main" id="{2145FEF4-AB69-4C61-9B1F-A8EC175E3BEF}"/>
               </a:ext>
             </a:extLst>
           </p:cNvPr>
@@ -11323,7 +11355,7 @@
             <a:pPr algn="l">
               <a:defRPr sz="1575" b="0">
                 <a:solidFill>
-                  <a:srgbClr val="10213D"/>
+                  <a:srgbClr val="0F1A2B"/>
                 </a:solidFill>
                 <a:latin typeface="Helvetica Neue"/>
                 <a:ea typeface="Helvetica Neue"/>
@@ -11333,7 +11365,7 @@
             <a:r>
               <a:rPr sz="1575" b="0">
                 <a:solidFill>
-                  <a:srgbClr val="10213D"/>
+                  <a:srgbClr val="0F1A2B"/>
                 </a:solidFill>
                 <a:latin typeface="Helvetica Neue"/>
                 <a:ea typeface="Helvetica Neue"/>
@@ -11349,7 +11381,7 @@
           <p:cNvPr id="12" name="">
             <a:extLst xmlns:a="http://schemas.openxmlformats.org/drawingml/2006/main">
               <a:ext uri="{FF2B5EF4-FFF2-40B4-BE49-F238E27FC236}">
-                <a16:creationId xmlns:a16="http://schemas.microsoft.com/office/drawing/2014/main" id="{0042419D-ECC5-40F4-854B-6FF1967E247A}"/>
+                <a16:creationId xmlns:a16="http://schemas.microsoft.com/office/drawing/2014/main" id="{9D4F7381-9C22-47B5-BF04-7E9D74A624E8}"/>
               </a:ext>
             </a:extLst>
           </p:cNvPr>
@@ -11369,7 +11401,7 @@
             </a:avLst>
           </a:prstGeom>
           <a:solidFill xmlns:a="http://schemas.openxmlformats.org/drawingml/2006/main">
-            <a:srgbClr val="EEF7FF"/>
+            <a:srgbClr val="D1CFC9"/>
           </a:solidFill>
           <a:ln xmlns:a="http://schemas.openxmlformats.org/drawingml/2006/main" w="0">
             <a:noFill/>
@@ -11381,7 +11413,7 @@
           <p:cNvPr id="13" name="">
             <a:extLst xmlns:a="http://schemas.openxmlformats.org/drawingml/2006/main">
               <a:ext uri="{FF2B5EF4-FFF2-40B4-BE49-F238E27FC236}">
-                <a16:creationId xmlns:a16="http://schemas.microsoft.com/office/drawing/2014/main" id="{1E7924E8-31B4-49C6-8E9E-6B8B82A48AB7}"/>
+                <a16:creationId xmlns:a16="http://schemas.microsoft.com/office/drawing/2014/main" id="{6D168B73-BA1D-4F41-908B-87FCDD158313}"/>
               </a:ext>
             </a:extLst>
           </p:cNvPr>
@@ -11412,7 +11444,7 @@
             <a:pPr algn="ctr">
               <a:defRPr sz="1350" b="1">
                 <a:solidFill>
-                  <a:srgbClr val="2563EB"/>
+                  <a:srgbClr val="52677D"/>
                 </a:solidFill>
                 <a:latin typeface="Helvetica Neue"/>
                 <a:ea typeface="Helvetica Neue"/>
@@ -11422,7 +11454,7 @@
             <a:r>
               <a:rPr sz="1350" b="1">
                 <a:solidFill>
-                  <a:srgbClr val="2563EB"/>
+                  <a:srgbClr val="52677D"/>
                 </a:solidFill>
                 <a:latin typeface="Helvetica Neue"/>
                 <a:ea typeface="Helvetica Neue"/>
@@ -11438,7 +11470,7 @@
           <p:cNvPr id="14" name="">
             <a:extLst xmlns:a="http://schemas.openxmlformats.org/drawingml/2006/main">
               <a:ext uri="{FF2B5EF4-FFF2-40B4-BE49-F238E27FC236}">
-                <a16:creationId xmlns:a16="http://schemas.microsoft.com/office/drawing/2014/main" id="{0E52CAD8-40C4-417E-BC22-D73E7BA05C1E}"/>
+                <a16:creationId xmlns:a16="http://schemas.microsoft.com/office/drawing/2014/main" id="{43DA4038-CFD5-4FA1-A139-8E64BAFE611A}"/>
               </a:ext>
             </a:extLst>
           </p:cNvPr>
@@ -11469,7 +11501,7 @@
             <a:pPr algn="l">
               <a:defRPr sz="1575" b="0">
                 <a:solidFill>
-                  <a:srgbClr val="10213D"/>
+                  <a:srgbClr val="0F1A2B"/>
                 </a:solidFill>
                 <a:latin typeface="Helvetica Neue"/>
                 <a:ea typeface="Helvetica Neue"/>
@@ -11479,7 +11511,7 @@
             <a:r>
               <a:rPr sz="1575" b="0">
                 <a:solidFill>
-                  <a:srgbClr val="10213D"/>
+                  <a:srgbClr val="0F1A2B"/>
                 </a:solidFill>
                 <a:latin typeface="Helvetica Neue"/>
                 <a:ea typeface="Helvetica Neue"/>
@@ -11495,7 +11527,7 @@
           <p:cNvPr id="15" name="">
             <a:extLst xmlns:a="http://schemas.openxmlformats.org/drawingml/2006/main">
               <a:ext uri="{FF2B5EF4-FFF2-40B4-BE49-F238E27FC236}">
-                <a16:creationId xmlns:a16="http://schemas.microsoft.com/office/drawing/2014/main" id="{01997EC7-C321-4D3C-9C77-203FD3837174}"/>
+                <a16:creationId xmlns:a16="http://schemas.microsoft.com/office/drawing/2014/main" id="{12917310-0E1B-4B38-BAFA-0CA3B7C0E662}"/>
               </a:ext>
             </a:extLst>
           </p:cNvPr>
@@ -11515,7 +11547,7 @@
             </a:avLst>
           </a:prstGeom>
           <a:solidFill xmlns:a="http://schemas.openxmlformats.org/drawingml/2006/main">
-            <a:srgbClr val="EEF7FF"/>
+            <a:srgbClr val="D1CFC9"/>
           </a:solidFill>
           <a:ln xmlns:a="http://schemas.openxmlformats.org/drawingml/2006/main" w="0">
             <a:noFill/>
@@ -11527,7 +11559,7 @@
           <p:cNvPr id="16" name="">
             <a:extLst xmlns:a="http://schemas.openxmlformats.org/drawingml/2006/main">
               <a:ext uri="{FF2B5EF4-FFF2-40B4-BE49-F238E27FC236}">
-                <a16:creationId xmlns:a16="http://schemas.microsoft.com/office/drawing/2014/main" id="{345FA003-02B4-4939-9050-FA59415BF85F}"/>
+                <a16:creationId xmlns:a16="http://schemas.microsoft.com/office/drawing/2014/main" id="{D9B19AF1-A086-4D1C-8591-C62416782C4B}"/>
               </a:ext>
             </a:extLst>
           </p:cNvPr>
@@ -11558,7 +11590,7 @@
             <a:pPr algn="l">
               <a:defRPr sz="1125" b="0">
                 <a:solidFill>
-                  <a:srgbClr val="092454"/>
+                  <a:srgbClr val="1C2E4A"/>
                 </a:solidFill>
                 <a:latin typeface="Helvetica Neue"/>
                 <a:ea typeface="Helvetica Neue"/>
@@ -11568,7 +11600,7 @@
             <a:r>
               <a:rPr sz="1125" b="0">
                 <a:solidFill>
-                  <a:srgbClr val="092454"/>
+                  <a:srgbClr val="1C2E4A"/>
                 </a:solidFill>
                 <a:latin typeface="Helvetica Neue"/>
                 <a:ea typeface="Helvetica Neue"/>
@@ -11584,7 +11616,7 @@
           <p:cNvPr id="17" name="">
             <a:extLst xmlns:a="http://schemas.openxmlformats.org/drawingml/2006/main">
               <a:ext uri="{FF2B5EF4-FFF2-40B4-BE49-F238E27FC236}">
-                <a16:creationId xmlns:a16="http://schemas.microsoft.com/office/drawing/2014/main" id="{A9803C73-7878-4966-85EE-8EE9D9CC4348}"/>
+                <a16:creationId xmlns:a16="http://schemas.microsoft.com/office/drawing/2014/main" id="{B69DB94E-9248-423A-A168-235EBBCC5233}"/>
               </a:ext>
             </a:extLst>
           </p:cNvPr>
@@ -11604,7 +11636,7 @@
             </a:avLst>
           </a:prstGeom>
           <a:solidFill xmlns:a="http://schemas.openxmlformats.org/drawingml/2006/main">
-            <a:srgbClr val="092454"/>
+            <a:srgbClr val="1C2E4A"/>
           </a:solidFill>
           <a:ln xmlns:a="http://schemas.openxmlformats.org/drawingml/2006/main" w="0">
             <a:noFill/>
@@ -11616,7 +11648,7 @@
           <p:cNvPr id="18" name="">
             <a:extLst xmlns:a="http://schemas.openxmlformats.org/drawingml/2006/main">
               <a:ext uri="{FF2B5EF4-FFF2-40B4-BE49-F238E27FC236}">
-                <a16:creationId xmlns:a16="http://schemas.microsoft.com/office/drawing/2014/main" id="{5D28225B-00C7-4597-A958-A1E9C01ACCF5}"/>
+                <a16:creationId xmlns:a16="http://schemas.microsoft.com/office/drawing/2014/main" id="{7253312C-A4C6-495F-A753-F3DC5D4C2EA4}"/>
               </a:ext>
             </a:extLst>
           </p:cNvPr>
@@ -11647,7 +11679,7 @@
             <a:pPr algn="l">
               <a:defRPr sz="1050" b="1">
                 <a:solidFill>
-                  <a:srgbClr val="FFD43B"/>
+                  <a:srgbClr val="D1CFC9"/>
                 </a:solidFill>
                 <a:latin typeface="Helvetica Neue"/>
                 <a:ea typeface="Helvetica Neue"/>
@@ -11657,7 +11689,7 @@
             <a:r>
               <a:rPr sz="1050" b="1">
                 <a:solidFill>
-                  <a:srgbClr val="FFD43B"/>
+                  <a:srgbClr val="D1CFC9"/>
                 </a:solidFill>
                 <a:latin typeface="Helvetica Neue"/>
                 <a:ea typeface="Helvetica Neue"/>
@@ -11673,7 +11705,7 @@
           <p:cNvPr id="19" name="">
             <a:extLst xmlns:a="http://schemas.openxmlformats.org/drawingml/2006/main">
               <a:ext uri="{FF2B5EF4-FFF2-40B4-BE49-F238E27FC236}">
-                <a16:creationId xmlns:a16="http://schemas.microsoft.com/office/drawing/2014/main" id="{FF2AA713-2E20-4252-B1D9-281B745D9159}"/>
+                <a16:creationId xmlns:a16="http://schemas.microsoft.com/office/drawing/2014/main" id="{40BE501F-A0FF-47AB-8C22-77ECFD661EF2}"/>
               </a:ext>
             </a:extLst>
           </p:cNvPr>
@@ -11730,7 +11762,7 @@
           <p:cNvPr id="20" name="">
             <a:extLst xmlns:a="http://schemas.openxmlformats.org/drawingml/2006/main">
               <a:ext uri="{FF2B5EF4-FFF2-40B4-BE49-F238E27FC236}">
-                <a16:creationId xmlns:a16="http://schemas.microsoft.com/office/drawing/2014/main" id="{C77D8F52-C0E9-4341-8091-FFD89669F759}"/>
+                <a16:creationId xmlns:a16="http://schemas.microsoft.com/office/drawing/2014/main" id="{B38D9D09-7122-46F7-8F27-55C67214179C}"/>
               </a:ext>
             </a:extLst>
           </p:cNvPr>
@@ -11761,7 +11793,7 @@
             <a:pPr algn="l">
               <a:defRPr sz="1125" b="0">
                 <a:solidFill>
-                  <a:srgbClr val="BFE6FF"/>
+                  <a:srgbClr val="BDC4D4"/>
                 </a:solidFill>
                 <a:latin typeface="Helvetica Neue"/>
                 <a:ea typeface="Helvetica Neue"/>
@@ -11771,7 +11803,7 @@
             <a:r>
               <a:rPr sz="1125" b="0">
                 <a:solidFill>
-                  <a:srgbClr val="BFE6FF"/>
+                  <a:srgbClr val="BDC4D4"/>
                 </a:solidFill>
                 <a:latin typeface="Helvetica Neue"/>
                 <a:ea typeface="Helvetica Neue"/>
@@ -11787,7 +11819,7 @@
           <p:cNvPr id="21" name="">
             <a:extLst xmlns:a="http://schemas.openxmlformats.org/drawingml/2006/main">
               <a:ext uri="{FF2B5EF4-FFF2-40B4-BE49-F238E27FC236}">
-                <a16:creationId xmlns:a16="http://schemas.microsoft.com/office/drawing/2014/main" id="{3EB42251-769E-42A9-BA82-D635C7F521F9}"/>
+                <a16:creationId xmlns:a16="http://schemas.microsoft.com/office/drawing/2014/main" id="{7ECCD623-605F-4D14-9AA5-8BD9B05298DB}"/>
               </a:ext>
             </a:extLst>
           </p:cNvPr>
@@ -11805,7 +11837,7 @@
             <a:avLst/>
           </a:prstGeom>
           <a:solidFill xmlns:a="http://schemas.openxmlformats.org/drawingml/2006/main">
-            <a:srgbClr val="D8E5F2"/>
+            <a:srgbClr val="BDC4D4"/>
           </a:solidFill>
           <a:ln xmlns:a="http://schemas.openxmlformats.org/drawingml/2006/main" w="0">
             <a:noFill/>
@@ -11817,7 +11849,7 @@
           <p:cNvPr id="22" name="">
             <a:extLst xmlns:a="http://schemas.openxmlformats.org/drawingml/2006/main">
               <a:ext uri="{FF2B5EF4-FFF2-40B4-BE49-F238E27FC236}">
-                <a16:creationId xmlns:a16="http://schemas.microsoft.com/office/drawing/2014/main" id="{C3A69F45-6C43-4798-A507-04399C2053FA}"/>
+                <a16:creationId xmlns:a16="http://schemas.microsoft.com/office/drawing/2014/main" id="{F583B572-8B93-43C2-8CEA-7AD8166ACAD4}"/>
               </a:ext>
             </a:extLst>
           </p:cNvPr>
@@ -11848,7 +11880,7 @@
             <a:pPr algn="l">
               <a:defRPr sz="750" b="0">
                 <a:solidFill>
-                  <a:srgbClr val="61718A"/>
+                  <a:srgbClr val="52677D"/>
                 </a:solidFill>
                 <a:latin typeface="Helvetica Neue"/>
                 <a:ea typeface="Helvetica Neue"/>
@@ -11858,7 +11890,7 @@
             <a:r>
               <a:rPr sz="750" b="0">
                 <a:solidFill>
-                  <a:srgbClr val="61718A"/>
+                  <a:srgbClr val="52677D"/>
                 </a:solidFill>
                 <a:latin typeface="Helvetica Neue"/>
                 <a:ea typeface="Helvetica Neue"/>
@@ -11874,7 +11906,7 @@
           <p:cNvPr id="23" name="">
             <a:extLst xmlns:a="http://schemas.openxmlformats.org/drawingml/2006/main">
               <a:ext uri="{FF2B5EF4-FFF2-40B4-BE49-F238E27FC236}">
-                <a16:creationId xmlns:a16="http://schemas.microsoft.com/office/drawing/2014/main" id="{56C572F1-BED1-45F9-A41D-DD27CB51510A}"/>
+                <a16:creationId xmlns:a16="http://schemas.microsoft.com/office/drawing/2014/main" id="{2B1FC9C7-198B-4870-A8AB-E3662B1FCFDF}"/>
               </a:ext>
             </a:extLst>
           </p:cNvPr>
@@ -11905,7 +11937,7 @@
             <a:pPr algn="r">
               <a:defRPr sz="825" b="1">
                 <a:solidFill>
-                  <a:srgbClr val="2563EB"/>
+                  <a:srgbClr val="52677D"/>
                 </a:solidFill>
                 <a:latin typeface="Helvetica Neue"/>
                 <a:ea typeface="Helvetica Neue"/>
@@ -11915,7 +11947,7 @@
             <a:r>
               <a:rPr sz="825" b="1">
                 <a:solidFill>
-                  <a:srgbClr val="2563EB"/>
+                  <a:srgbClr val="52677D"/>
                 </a:solidFill>
                 <a:latin typeface="Helvetica Neue"/>
                 <a:ea typeface="Helvetica Neue"/>
@@ -11929,7 +11961,7 @@
     </p:spTree>
     <p:extLst>
       <p:ext uri="{BB962C8B-B14F-4D97-AF65-F5344CB8AC3E}">
-        <p14:creationId xmlns:p14="http://schemas.microsoft.com/office/powerpoint/2010/main" val="532291586"/>
+        <p14:creationId xmlns:p14="http://schemas.microsoft.com/office/powerpoint/2010/main" val="1985954002"/>
       </p:ext>
     </p:extLst>
   </p:cSld>
@@ -11942,7 +11974,7 @@
     <p:bg>
       <p:bgPr>
         <a:solidFill xmlns:a="http://schemas.openxmlformats.org/drawingml/2006/main">
-          <a:srgbClr val="092454"/>
+          <a:srgbClr val="1C2E4A"/>
         </a:solidFill>
       </p:bgPr>
     </p:bg>
@@ -11960,7 +11992,7 @@
           <p:cNvPr id="22" name="">
             <a:extLst xmlns:a="http://schemas.openxmlformats.org/drawingml/2006/main">
               <a:ext uri="{FF2B5EF4-FFF2-40B4-BE49-F238E27FC236}">
-                <a16:creationId xmlns:a16="http://schemas.microsoft.com/office/drawing/2014/main" id="{93213144-4536-4A04-ADFA-4276FCA2D267}"/>
+                <a16:creationId xmlns:a16="http://schemas.microsoft.com/office/drawing/2014/main" id="{D56136D8-AD72-43B6-94FC-26152F865BB1}"/>
               </a:ext>
             </a:extLst>
           </p:cNvPr>
@@ -11991,7 +12023,7 @@
             <a:pPr algn="l">
               <a:defRPr sz="1125" b="1">
                 <a:solidFill>
-                  <a:srgbClr val="FFD43B"/>
+                  <a:srgbClr val="D1CFC9"/>
                 </a:solidFill>
                 <a:latin typeface="Helvetica Neue"/>
                 <a:ea typeface="Helvetica Neue"/>
@@ -12001,7 +12033,7 @@
             <a:r>
               <a:rPr sz="1125" b="1">
                 <a:solidFill>
-                  <a:srgbClr val="FFD43B"/>
+                  <a:srgbClr val="D1CFC9"/>
                 </a:solidFill>
                 <a:latin typeface="Helvetica Neue"/>
                 <a:ea typeface="Helvetica Neue"/>
@@ -12017,7 +12049,7 @@
           <p:cNvPr id="2" name="">
             <a:extLst xmlns:a="http://schemas.openxmlformats.org/drawingml/2006/main">
               <a:ext uri="{FF2B5EF4-FFF2-40B4-BE49-F238E27FC236}">
-                <a16:creationId xmlns:a16="http://schemas.microsoft.com/office/drawing/2014/main" id="{54F7138D-BD45-41B0-A6BC-0324A21D7F2F}"/>
+                <a16:creationId xmlns:a16="http://schemas.microsoft.com/office/drawing/2014/main" id="{1C555BA9-EFA2-4FF3-A105-1C3DBBE34AA0}"/>
               </a:ext>
             </a:extLst>
           </p:cNvPr>
@@ -12074,7 +12106,7 @@
           <p:cNvPr id="3" name="">
             <a:extLst xmlns:a="http://schemas.openxmlformats.org/drawingml/2006/main">
               <a:ext uri="{FF2B5EF4-FFF2-40B4-BE49-F238E27FC236}">
-                <a16:creationId xmlns:a16="http://schemas.microsoft.com/office/drawing/2014/main" id="{1BC1CD8A-7000-4376-9915-E877A1E7EBF9}"/>
+                <a16:creationId xmlns:a16="http://schemas.microsoft.com/office/drawing/2014/main" id="{7203D8C7-1582-4954-A1DD-E5C086155C47}"/>
               </a:ext>
             </a:extLst>
           </p:cNvPr>
@@ -12094,7 +12126,7 @@
             </a:avLst>
           </a:prstGeom>
           <a:solidFill xmlns:a="http://schemas.openxmlformats.org/drawingml/2006/main">
-            <a:srgbClr val="FFD43B"/>
+            <a:srgbClr val="D1CFC9"/>
           </a:solidFill>
           <a:ln xmlns:a="http://schemas.openxmlformats.org/drawingml/2006/main" w="0">
             <a:noFill/>
@@ -12106,7 +12138,7 @@
           <p:cNvPr id="4" name="">
             <a:extLst xmlns:a="http://schemas.openxmlformats.org/drawingml/2006/main">
               <a:ext uri="{FF2B5EF4-FFF2-40B4-BE49-F238E27FC236}">
-                <a16:creationId xmlns:a16="http://schemas.microsoft.com/office/drawing/2014/main" id="{02209B14-357B-4FF7-9909-20819B86A8AA}"/>
+                <a16:creationId xmlns:a16="http://schemas.microsoft.com/office/drawing/2014/main" id="{48DF5068-49F3-4CD7-929B-BB6352E6993F}"/>
               </a:ext>
             </a:extLst>
           </p:cNvPr>
@@ -12137,7 +12169,7 @@
             <a:pPr algn="ctr">
               <a:defRPr sz="1275" b="1">
                 <a:solidFill>
-                  <a:srgbClr val="092454"/>
+                  <a:srgbClr val="1C2E4A"/>
                 </a:solidFill>
                 <a:latin typeface="Helvetica Neue"/>
                 <a:ea typeface="Helvetica Neue"/>
@@ -12147,7 +12179,7 @@
             <a:r>
               <a:rPr sz="1275" b="1">
                 <a:solidFill>
-                  <a:srgbClr val="092454"/>
+                  <a:srgbClr val="1C2E4A"/>
                 </a:solidFill>
                 <a:latin typeface="Helvetica Neue"/>
                 <a:ea typeface="Helvetica Neue"/>
@@ -12163,7 +12195,7 @@
           <p:cNvPr id="5" name="">
             <a:extLst xmlns:a="http://schemas.openxmlformats.org/drawingml/2006/main">
               <a:ext uri="{FF2B5EF4-FFF2-40B4-BE49-F238E27FC236}">
-                <a16:creationId xmlns:a16="http://schemas.microsoft.com/office/drawing/2014/main" id="{89038BC6-EE07-4BB4-8651-093ACDB79FA6}"/>
+                <a16:creationId xmlns:a16="http://schemas.microsoft.com/office/drawing/2014/main" id="{CC83A420-C8FB-42CC-8E3A-B46CD9A8A01D}"/>
               </a:ext>
             </a:extLst>
           </p:cNvPr>
@@ -12194,7 +12226,7 @@
             <a:pPr algn="l">
               <a:defRPr sz="1950" b="1">
                 <a:solidFill>
-                  <a:srgbClr val="FFD43B"/>
+                  <a:srgbClr val="D1CFC9"/>
                 </a:solidFill>
                 <a:latin typeface="Helvetica Neue"/>
                 <a:ea typeface="Helvetica Neue"/>
@@ -12204,7 +12236,7 @@
             <a:r>
               <a:rPr sz="1950" b="1">
                 <a:solidFill>
-                  <a:srgbClr val="FFD43B"/>
+                  <a:srgbClr val="D1CFC9"/>
                 </a:solidFill>
                 <a:latin typeface="Helvetica Neue"/>
                 <a:ea typeface="Helvetica Neue"/>
@@ -12220,7 +12252,7 @@
           <p:cNvPr id="6" name="">
             <a:extLst xmlns:a="http://schemas.openxmlformats.org/drawingml/2006/main">
               <a:ext uri="{FF2B5EF4-FFF2-40B4-BE49-F238E27FC236}">
-                <a16:creationId xmlns:a16="http://schemas.microsoft.com/office/drawing/2014/main" id="{04781242-5BBC-4E65-844D-F440B3E790FF}"/>
+                <a16:creationId xmlns:a16="http://schemas.microsoft.com/office/drawing/2014/main" id="{CB43DE65-8DF6-48D1-A22B-9A6D65ADF802}"/>
               </a:ext>
             </a:extLst>
           </p:cNvPr>
@@ -12277,7 +12309,7 @@
           <p:cNvPr id="7" name="">
             <a:extLst xmlns:a="http://schemas.openxmlformats.org/drawingml/2006/main">
               <a:ext uri="{FF2B5EF4-FFF2-40B4-BE49-F238E27FC236}">
-                <a16:creationId xmlns:a16="http://schemas.microsoft.com/office/drawing/2014/main" id="{875CB611-11F6-4AF2-9F1E-84C38805AA14}"/>
+                <a16:creationId xmlns:a16="http://schemas.microsoft.com/office/drawing/2014/main" id="{CB8895DB-78D9-45D8-911D-E8D575EE5EA8}"/>
               </a:ext>
             </a:extLst>
           </p:cNvPr>
@@ -12308,7 +12340,7 @@
             <a:pPr algn="l">
               <a:defRPr sz="1950" b="1">
                 <a:solidFill>
-                  <a:srgbClr val="FFD43B"/>
+                  <a:srgbClr val="D1CFC9"/>
                 </a:solidFill>
                 <a:latin typeface="Helvetica Neue"/>
                 <a:ea typeface="Helvetica Neue"/>
@@ -12318,7 +12350,7 @@
             <a:r>
               <a:rPr sz="1950" b="1">
                 <a:solidFill>
-                  <a:srgbClr val="FFD43B"/>
+                  <a:srgbClr val="D1CFC9"/>
                 </a:solidFill>
                 <a:latin typeface="Helvetica Neue"/>
                 <a:ea typeface="Helvetica Neue"/>
@@ -12334,7 +12366,7 @@
           <p:cNvPr id="8" name="">
             <a:extLst xmlns:a="http://schemas.openxmlformats.org/drawingml/2006/main">
               <a:ext uri="{FF2B5EF4-FFF2-40B4-BE49-F238E27FC236}">
-                <a16:creationId xmlns:a16="http://schemas.microsoft.com/office/drawing/2014/main" id="{26EDD631-8022-461B-A649-A3201564E913}"/>
+                <a16:creationId xmlns:a16="http://schemas.microsoft.com/office/drawing/2014/main" id="{7E4C5328-752B-4211-BF89-7B9AAC2D8CAD}"/>
               </a:ext>
             </a:extLst>
           </p:cNvPr>
@@ -12391,7 +12423,7 @@
           <p:cNvPr id="9" name="">
             <a:extLst xmlns:a="http://schemas.openxmlformats.org/drawingml/2006/main">
               <a:ext uri="{FF2B5EF4-FFF2-40B4-BE49-F238E27FC236}">
-                <a16:creationId xmlns:a16="http://schemas.microsoft.com/office/drawing/2014/main" id="{59FC28EB-961F-424A-A928-9AEA3E3EAECC}"/>
+                <a16:creationId xmlns:a16="http://schemas.microsoft.com/office/drawing/2014/main" id="{3C6AC1AC-CA56-4ECA-9CC7-E508000BDE9C}"/>
               </a:ext>
             </a:extLst>
           </p:cNvPr>
@@ -12422,7 +12454,7 @@
             <a:pPr algn="l">
               <a:defRPr sz="1950" b="1">
                 <a:solidFill>
-                  <a:srgbClr val="FFD43B"/>
+                  <a:srgbClr val="D1CFC9"/>
                 </a:solidFill>
                 <a:latin typeface="Helvetica Neue"/>
                 <a:ea typeface="Helvetica Neue"/>
@@ -12432,7 +12464,7 @@
             <a:r>
               <a:rPr sz="1950" b="1">
                 <a:solidFill>
-                  <a:srgbClr val="FFD43B"/>
+                  <a:srgbClr val="D1CFC9"/>
                 </a:solidFill>
                 <a:latin typeface="Helvetica Neue"/>
                 <a:ea typeface="Helvetica Neue"/>
@@ -12448,7 +12480,7 @@
           <p:cNvPr id="10" name="">
             <a:extLst xmlns:a="http://schemas.openxmlformats.org/drawingml/2006/main">
               <a:ext uri="{FF2B5EF4-FFF2-40B4-BE49-F238E27FC236}">
-                <a16:creationId xmlns:a16="http://schemas.microsoft.com/office/drawing/2014/main" id="{262F06C1-BDCF-4DD9-B643-B74E7954F30D}"/>
+                <a16:creationId xmlns:a16="http://schemas.microsoft.com/office/drawing/2014/main" id="{B618196B-7221-4144-A981-FE1DA9F8C5C1}"/>
               </a:ext>
             </a:extLst>
           </p:cNvPr>
@@ -12505,7 +12537,7 @@
           <p:cNvPr id="11" name="">
             <a:extLst xmlns:a="http://schemas.openxmlformats.org/drawingml/2006/main">
               <a:ext uri="{FF2B5EF4-FFF2-40B4-BE49-F238E27FC236}">
-                <a16:creationId xmlns:a16="http://schemas.microsoft.com/office/drawing/2014/main" id="{A0948E87-DE22-4406-83F9-995663351D8F}"/>
+                <a16:creationId xmlns:a16="http://schemas.microsoft.com/office/drawing/2014/main" id="{6B6F0717-16B1-4992-9168-E680B5F62084}"/>
               </a:ext>
             </a:extLst>
           </p:cNvPr>
@@ -12536,7 +12568,7 @@
             <a:pPr algn="l">
               <a:defRPr sz="1950" b="1">
                 <a:solidFill>
-                  <a:srgbClr val="FFD43B"/>
+                  <a:srgbClr val="D1CFC9"/>
                 </a:solidFill>
                 <a:latin typeface="Helvetica Neue"/>
                 <a:ea typeface="Helvetica Neue"/>
@@ -12546,7 +12578,7 @@
             <a:r>
               <a:rPr sz="1950" b="1">
                 <a:solidFill>
-                  <a:srgbClr val="FFD43B"/>
+                  <a:srgbClr val="D1CFC9"/>
                 </a:solidFill>
                 <a:latin typeface="Helvetica Neue"/>
                 <a:ea typeface="Helvetica Neue"/>
@@ -12562,7 +12594,7 @@
           <p:cNvPr id="12" name="">
             <a:extLst xmlns:a="http://schemas.openxmlformats.org/drawingml/2006/main">
               <a:ext uri="{FF2B5EF4-FFF2-40B4-BE49-F238E27FC236}">
-                <a16:creationId xmlns:a16="http://schemas.microsoft.com/office/drawing/2014/main" id="{148A1233-CD1B-4BBB-BBA0-8A77719E996D}"/>
+                <a16:creationId xmlns:a16="http://schemas.microsoft.com/office/drawing/2014/main" id="{F4BF1EE6-C3B0-426C-BB45-5A8F42A190D9}"/>
               </a:ext>
             </a:extLst>
           </p:cNvPr>
@@ -12619,7 +12651,7 @@
           <p:cNvPr id="13" name="">
             <a:extLst xmlns:a="http://schemas.openxmlformats.org/drawingml/2006/main">
               <a:ext uri="{FF2B5EF4-FFF2-40B4-BE49-F238E27FC236}">
-                <a16:creationId xmlns:a16="http://schemas.microsoft.com/office/drawing/2014/main" id="{120F701A-E506-44B6-B777-AD28F833830B}"/>
+                <a16:creationId xmlns:a16="http://schemas.microsoft.com/office/drawing/2014/main" id="{7AB54F33-7D10-4C90-BD5C-184FDEAD7A61}"/>
               </a:ext>
             </a:extLst>
           </p:cNvPr>
@@ -12650,7 +12682,7 @@
             <a:pPr algn="l">
               <a:defRPr sz="1950" b="1">
                 <a:solidFill>
-                  <a:srgbClr val="FFD43B"/>
+                  <a:srgbClr val="D1CFC9"/>
                 </a:solidFill>
                 <a:latin typeface="Helvetica Neue"/>
                 <a:ea typeface="Helvetica Neue"/>
@@ -12660,7 +12692,7 @@
             <a:r>
               <a:rPr sz="1950" b="1">
                 <a:solidFill>
-                  <a:srgbClr val="FFD43B"/>
+                  <a:srgbClr val="D1CFC9"/>
                 </a:solidFill>
                 <a:latin typeface="Helvetica Neue"/>
                 <a:ea typeface="Helvetica Neue"/>
@@ -12676,7 +12708,7 @@
           <p:cNvPr id="14" name="">
             <a:extLst xmlns:a="http://schemas.openxmlformats.org/drawingml/2006/main">
               <a:ext uri="{FF2B5EF4-FFF2-40B4-BE49-F238E27FC236}">
-                <a16:creationId xmlns:a16="http://schemas.microsoft.com/office/drawing/2014/main" id="{F6A29C4F-DCC7-4775-A677-2D1763ED36B5}"/>
+                <a16:creationId xmlns:a16="http://schemas.microsoft.com/office/drawing/2014/main" id="{7747F680-14FF-4BA3-B948-06AA227895D7}"/>
               </a:ext>
             </a:extLst>
           </p:cNvPr>
@@ -12733,7 +12765,7 @@
           <p:cNvPr id="15" name="">
             <a:extLst xmlns:a="http://schemas.openxmlformats.org/drawingml/2006/main">
               <a:ext uri="{FF2B5EF4-FFF2-40B4-BE49-F238E27FC236}">
-                <a16:creationId xmlns:a16="http://schemas.microsoft.com/office/drawing/2014/main" id="{D4F6A7AB-7A44-4D80-B853-67A0186E04BB}"/>
+                <a16:creationId xmlns:a16="http://schemas.microsoft.com/office/drawing/2014/main" id="{78B9F737-7A50-4DF4-A34C-0BAC08B4580C}"/>
               </a:ext>
             </a:extLst>
           </p:cNvPr>
@@ -12753,7 +12785,7 @@
             </a:avLst>
           </a:prstGeom>
           <a:solidFill xmlns:a="http://schemas.openxmlformats.org/drawingml/2006/main">
-            <a:srgbClr val="FFD43B"/>
+            <a:srgbClr val="D1CFC9"/>
           </a:solidFill>
           <a:ln xmlns:a="http://schemas.openxmlformats.org/drawingml/2006/main" w="0">
             <a:noFill/>
@@ -12765,7 +12797,7 @@
           <p:cNvPr id="16" name="">
             <a:extLst xmlns:a="http://schemas.openxmlformats.org/drawingml/2006/main">
               <a:ext uri="{FF2B5EF4-FFF2-40B4-BE49-F238E27FC236}">
-                <a16:creationId xmlns:a16="http://schemas.microsoft.com/office/drawing/2014/main" id="{62B09CC2-66FC-4EAA-AFC2-FD69C3CE7703}"/>
+                <a16:creationId xmlns:a16="http://schemas.microsoft.com/office/drawing/2014/main" id="{5D88272F-EA5C-446A-AFF0-ED01DEC1E2F0}"/>
               </a:ext>
             </a:extLst>
           </p:cNvPr>
@@ -12796,7 +12828,7 @@
             <a:pPr algn="ctr">
               <a:defRPr sz="1050" b="1">
                 <a:solidFill>
-                  <a:srgbClr val="092454"/>
+                  <a:srgbClr val="1C2E4A"/>
                 </a:solidFill>
                 <a:latin typeface="Helvetica Neue"/>
                 <a:ea typeface="Helvetica Neue"/>
@@ -12806,7 +12838,7 @@
             <a:r>
               <a:rPr sz="1050" b="1">
                 <a:solidFill>
-                  <a:srgbClr val="092454"/>
+                  <a:srgbClr val="1C2E4A"/>
                 </a:solidFill>
                 <a:latin typeface="Helvetica Neue"/>
                 <a:ea typeface="Helvetica Neue"/>
@@ -12822,7 +12854,7 @@
           <p:cNvPr id="17" name="">
             <a:extLst xmlns:a="http://schemas.openxmlformats.org/drawingml/2006/main">
               <a:ext uri="{FF2B5EF4-FFF2-40B4-BE49-F238E27FC236}">
-                <a16:creationId xmlns:a16="http://schemas.microsoft.com/office/drawing/2014/main" id="{B0E87C0B-033C-4169-9073-F986F141EBA0}"/>
+                <a16:creationId xmlns:a16="http://schemas.microsoft.com/office/drawing/2014/main" id="{4F91BA09-3B89-4804-9CE5-F02D08A7F2AD}"/>
               </a:ext>
             </a:extLst>
           </p:cNvPr>
@@ -12853,7 +12885,7 @@
             <a:pPr algn="ctr">
               <a:defRPr sz="2250" b="1">
                 <a:solidFill>
-                  <a:srgbClr val="092454"/>
+                  <a:srgbClr val="1C2E4A"/>
                 </a:solidFill>
                 <a:latin typeface="Helvetica Neue"/>
                 <a:ea typeface="Helvetica Neue"/>
@@ -12863,7 +12895,7 @@
             <a:r>
               <a:rPr sz="2250" b="1">
                 <a:solidFill>
-                  <a:srgbClr val="092454"/>
+                  <a:srgbClr val="1C2E4A"/>
                 </a:solidFill>
                 <a:latin typeface="Helvetica Neue"/>
                 <a:ea typeface="Helvetica Neue"/>
@@ -12876,7 +12908,7 @@
             <a:pPr algn="ctr">
               <a:defRPr sz="2250" b="1">
                 <a:solidFill>
-                  <a:srgbClr val="092454"/>
+                  <a:srgbClr val="1C2E4A"/>
                 </a:solidFill>
                 <a:latin typeface="Helvetica Neue"/>
                 <a:ea typeface="Helvetica Neue"/>
@@ -12886,7 +12918,7 @@
             <a:r>
               <a:rPr sz="2250" b="1">
                 <a:solidFill>
-                  <a:srgbClr val="092454"/>
+                  <a:srgbClr val="1C2E4A"/>
                 </a:solidFill>
                 <a:latin typeface="Helvetica Neue"/>
                 <a:ea typeface="Helvetica Neue"/>
@@ -12899,7 +12931,7 @@
             <a:pPr algn="ctr">
               <a:defRPr sz="2250" b="1">
                 <a:solidFill>
-                  <a:srgbClr val="092454"/>
+                  <a:srgbClr val="1C2E4A"/>
                 </a:solidFill>
                 <a:latin typeface="Helvetica Neue"/>
                 <a:ea typeface="Helvetica Neue"/>
@@ -12909,7 +12941,7 @@
             <a:r>
               <a:rPr sz="2250" b="1">
                 <a:solidFill>
-                  <a:srgbClr val="092454"/>
+                  <a:srgbClr val="1C2E4A"/>
                 </a:solidFill>
                 <a:latin typeface="Helvetica Neue"/>
                 <a:ea typeface="Helvetica Neue"/>
@@ -12925,7 +12957,7 @@
           <p:cNvPr id="18" name="">
             <a:extLst xmlns:a="http://schemas.openxmlformats.org/drawingml/2006/main">
               <a:ext uri="{FF2B5EF4-FFF2-40B4-BE49-F238E27FC236}">
-                <a16:creationId xmlns:a16="http://schemas.microsoft.com/office/drawing/2014/main" id="{12D94CF7-34E8-4E82-AF29-3EF590C7D809}"/>
+                <a16:creationId xmlns:a16="http://schemas.microsoft.com/office/drawing/2014/main" id="{E276DC03-1F55-4975-8BD2-4158ACCE9219}"/>
               </a:ext>
             </a:extLst>
           </p:cNvPr>
@@ -12956,7 +12988,7 @@
             <a:pPr algn="ctr">
               <a:defRPr sz="1125" b="0">
                 <a:solidFill>
-                  <a:srgbClr val="092454"/>
+                  <a:srgbClr val="1C2E4A"/>
                 </a:solidFill>
                 <a:latin typeface="Helvetica Neue"/>
                 <a:ea typeface="Helvetica Neue"/>
@@ -12966,7 +12998,7 @@
             <a:r>
               <a:rPr sz="1125" b="0">
                 <a:solidFill>
-                  <a:srgbClr val="092454"/>
+                  <a:srgbClr val="1C2E4A"/>
                 </a:solidFill>
                 <a:latin typeface="Helvetica Neue"/>
                 <a:ea typeface="Helvetica Neue"/>
@@ -12982,7 +13014,7 @@
           <p:cNvPr id="19" name="">
             <a:extLst xmlns:a="http://schemas.openxmlformats.org/drawingml/2006/main">
               <a:ext uri="{FF2B5EF4-FFF2-40B4-BE49-F238E27FC236}">
-                <a16:creationId xmlns:a16="http://schemas.microsoft.com/office/drawing/2014/main" id="{941CFFC1-47E4-45AB-880B-FBAA612C3DFA}"/>
+                <a16:creationId xmlns:a16="http://schemas.microsoft.com/office/drawing/2014/main" id="{49384907-F711-41C7-83C6-D4C2684B5B80}"/>
               </a:ext>
             </a:extLst>
           </p:cNvPr>
@@ -13000,7 +13032,7 @@
             <a:avLst/>
           </a:prstGeom>
           <a:solidFill xmlns:a="http://schemas.openxmlformats.org/drawingml/2006/main">
-            <a:srgbClr val="31507E"/>
+            <a:srgbClr val="52677D"/>
           </a:solidFill>
           <a:ln xmlns:a="http://schemas.openxmlformats.org/drawingml/2006/main" w="0">
             <a:noFill/>
@@ -13012,7 +13044,7 @@
           <p:cNvPr id="20" name="">
             <a:extLst xmlns:a="http://schemas.openxmlformats.org/drawingml/2006/main">
               <a:ext uri="{FF2B5EF4-FFF2-40B4-BE49-F238E27FC236}">
-                <a16:creationId xmlns:a16="http://schemas.microsoft.com/office/drawing/2014/main" id="{16543003-8E92-472B-9E63-DFC43D50EA33}"/>
+                <a16:creationId xmlns:a16="http://schemas.microsoft.com/office/drawing/2014/main" id="{9EFA7FE3-ED2D-4449-9CFF-0228BC52C17A}"/>
               </a:ext>
             </a:extLst>
           </p:cNvPr>
@@ -13043,7 +13075,7 @@
             <a:pPr algn="l">
               <a:defRPr sz="750" b="0">
                 <a:solidFill>
-                  <a:srgbClr val="BFE6FF"/>
+                  <a:srgbClr val="BDC4D4"/>
                 </a:solidFill>
                 <a:latin typeface="Helvetica Neue"/>
                 <a:ea typeface="Helvetica Neue"/>
@@ -13053,7 +13085,7 @@
             <a:r>
               <a:rPr sz="750" b="0">
                 <a:solidFill>
-                  <a:srgbClr val="BFE6FF"/>
+                  <a:srgbClr val="BDC4D4"/>
                 </a:solidFill>
                 <a:latin typeface="Helvetica Neue"/>
                 <a:ea typeface="Helvetica Neue"/>
@@ -13069,7 +13101,7 @@
           <p:cNvPr id="21" name="">
             <a:extLst xmlns:a="http://schemas.openxmlformats.org/drawingml/2006/main">
               <a:ext uri="{FF2B5EF4-FFF2-40B4-BE49-F238E27FC236}">
-                <a16:creationId xmlns:a16="http://schemas.microsoft.com/office/drawing/2014/main" id="{7796A7FF-EC80-4348-BED0-206D926FD94F}"/>
+                <a16:creationId xmlns:a16="http://schemas.microsoft.com/office/drawing/2014/main" id="{E57E41CA-2914-4ED5-939C-66CF5C8C087A}"/>
               </a:ext>
             </a:extLst>
           </p:cNvPr>
@@ -13100,7 +13132,7 @@
             <a:pPr algn="r">
               <a:defRPr sz="825" b="1">
                 <a:solidFill>
-                  <a:srgbClr val="FFD43B"/>
+                  <a:srgbClr val="D1CFC9"/>
                 </a:solidFill>
                 <a:latin typeface="Helvetica Neue"/>
                 <a:ea typeface="Helvetica Neue"/>
@@ -13110,7 +13142,7 @@
             <a:r>
               <a:rPr sz="825" b="1">
                 <a:solidFill>
-                  <a:srgbClr val="FFD43B"/>
+                  <a:srgbClr val="D1CFC9"/>
                 </a:solidFill>
                 <a:latin typeface="Helvetica Neue"/>
                 <a:ea typeface="Helvetica Neue"/>
@@ -13124,7 +13156,7 @@
     </p:spTree>
     <p:extLst>
       <p:ext uri="{BB962C8B-B14F-4D97-AF65-F5344CB8AC3E}">
-        <p14:creationId xmlns:p14="http://schemas.microsoft.com/office/powerpoint/2010/main" val="713315986"/>
+        <p14:creationId xmlns:p14="http://schemas.microsoft.com/office/powerpoint/2010/main" val="612558625"/>
       </p:ext>
     </p:extLst>
   </p:cSld>
